--- a/barunjase_week5.pptx
+++ b/barunjase_week5.pptx
@@ -9173,7 +9173,7 @@
                 <a:ea typeface="Calibri" pitchFamily="34" charset="-122"/>
                 <a:cs typeface="Calibri" pitchFamily="34" charset="-120"/>
               </a:rPr>
-              <a:t>•  프로토콜: 불일치 20% 이상이면 클래스 정의 재논의</a:t>
+              <a:t>•  결과: 불일치 2건(slouch_back→tilt_left), 기준(20% 미만) 통과</a:t>
             </a:r>
             <a:endParaRPr lang="en-US" sz="1150" dirty="0"/>
           </a:p>
@@ -9188,7 +9188,7 @@
         <p:spPr>
           <a:xfrm>
             <a:off x="6949440" y="3840480"/>
-            <a:ext cx="1792224" cy="310896"/>
+            <a:ext cx="2948940" cy="310896"/>
           </a:xfrm>
           <a:prstGeom prst="roundRect">
             <a:avLst>
@@ -9196,7 +9196,7 @@
             </a:avLst>
           </a:prstGeom>
           <a:solidFill>
-            <a:srgbClr val="3A2A22"/>
+            <a:srgbClr val="12432F"/>
           </a:solidFill>
           <a:ln/>
         </p:spPr>
@@ -9210,7 +9210,7 @@
         <p:spPr>
           <a:xfrm>
             <a:off x="6949440" y="3840480"/>
-            <a:ext cx="1792224" cy="310896"/>
+            <a:ext cx="2948940" cy="310896"/>
           </a:xfrm>
           <a:prstGeom prst="rect">
             <a:avLst/>
@@ -9228,13 +9228,13 @@
             <a:r>
               <a:rPr lang="en-US" sz="1050" b="1" dirty="0">
                 <a:solidFill>
-                  <a:srgbClr val="E8734A"/>
+                  <a:srgbClr val="3FD48C"/>
                 </a:solidFill>
                 <a:latin typeface="Calibri" pitchFamily="34" charset="0"/>
                 <a:ea typeface="Calibri" pitchFamily="34" charset="-122"/>
                 <a:cs typeface="Calibri" pitchFamily="34" charset="-120"/>
               </a:rPr>
-              <a:t>팀원 라벨링 결과 대기 중</a:t>
+              <a:t>일치율 94.4% (34/36) — 기준 통과</a:t>
             </a:r>
             <a:endParaRPr lang="en-US" sz="1050" dirty="0"/>
           </a:p>

--- a/barunjase_week5.pptx
+++ b/barunjase_week5.pptx
@@ -9173,7 +9173,7 @@
                 <a:ea typeface="Calibri" pitchFamily="34" charset="-122"/>
                 <a:cs typeface="Calibri" pitchFamily="34" charset="-120"/>
               </a:rPr>
-              <a:t>•  결과: 불일치 2건(slouch_back→tilt_left), 기준(20% 미만) 통과</a:t>
+              <a:t>•  결과: 불일치 2건은 고개만 기운 사진 → "tilt는 몸통 기울임만"으로 정의 확정</a:t>
             </a:r>
             <a:endParaRPr lang="en-US" sz="1150" dirty="0"/>
           </a:p>
@@ -12029,7 +12029,7 @@
                           <a:ea typeface="Calibri" pitchFamily="34" charset="-122"/>
                           <a:cs typeface="Calibri" pitchFamily="34" charset="-120"/>
                         </a:rPr>
-                        <a:t>코 좌우 치우침 &gt; 어깨너비 0.35배</a:t>
+                        <a:t>어깨 중점 좌우 치우침 &gt; 어깨너비 0.35배</a:t>
                       </a:r>
                       <a:endParaRPr lang="en-US" sz="1150" dirty="0">
                         <a:latin typeface="Calibri" charset="0"/>

--- a/barunjase_week5.pptx
+++ b/barunjase_week5.pptx
@@ -9173,7 +9173,7 @@
                 <a:ea typeface="Calibri" pitchFamily="34" charset="-122"/>
                 <a:cs typeface="Calibri" pitchFamily="34" charset="-120"/>
               </a:rPr>
-              <a:t>•  결과: 불일치 2건은 고개만 기운 사진 → "tilt는 몸통 기울임만"으로 정의 확정</a:t>
+              <a:t>•  결과: 불일치 2건 — 고개 기울임이 원인 → "tilt는 몸통 기울임만"으로 정의 확정, 기존 tilt 80장 전수 확인(수정 없음)</a:t>
             </a:r>
             <a:endParaRPr lang="en-US" sz="1150" dirty="0"/>
           </a:p>

--- a/barunjase_week5.pptx
+++ b/barunjase_week5.pptx
@@ -18,9 +18,10 @@
     <p:sldId id="266" r:id="rId12"/>
     <p:sldId id="267" r:id="rId13"/>
     <p:sldId id="268" r:id="rId14"/>
+    <p:sldId id="269" r:id="rId15"/>
   </p:sldIdLst>
   <p:notesMasterIdLst>
-    <p:notesMasterId r:id="rId15"/>
+    <p:notesMasterId r:id="rId16"/>
   </p:notesMasterIdLst>
   <p:sldSz cx="12192000" cy="6858000"/>
   <p:notesSz cx="6858000" cy="12192000"/>
@@ -1133,6 +1134,94 @@
             <a:fld id="{F7021451-1387-4CA6-816F-3879F97B5CBC}" type="slidenum">
               <a:rPr lang="en-US"/>
               <a:t>13</a:t>
+            </a:fld>
+            <a:endParaRPr lang="en-US"/>
+          </a:p>
+        </p:txBody>
+      </p:sp>
+    </p:spTree>
+    <p:extLst>
+      <p:ext uri="{BB962C8B-B14F-4D97-AF65-F5344CB8AC3E}">
+        <p14:creationId xmlns:p14="http://schemas.microsoft.com/office/powerpoint/2010/main" val="1024086991"/>
+      </p:ext>
+    </p:extLst>
+  </p:cSld>
+  <p:clrMapOvr>
+    <a:masterClrMapping/>
+  </p:clrMapOvr>
+</p:notes>
+</file>
+
+<file path=ppt/notesSlides/notesSlide14.xml><?xml version="1.0" encoding="utf-8"?>
+<p:notes xmlns:a="http://schemas.openxmlformats.org/drawingml/2006/main" xmlns:r="http://schemas.openxmlformats.org/officeDocument/2006/relationships" xmlns:p="http://schemas.openxmlformats.org/presentationml/2006/main">
+  <p:cSld>
+    <p:spTree>
+      <p:nvGrpSpPr>
+        <p:cNvPr id="1" name=""/>
+        <p:cNvGrpSpPr/>
+        <p:nvPr/>
+      </p:nvGrpSpPr>
+      <p:grpSpPr>
+        <a:xfrm>
+          <a:off x="0" y="0"/>
+          <a:ext cx="0" cy="0"/>
+          <a:chOff x="0" y="0"/>
+          <a:chExt cx="0" cy="0"/>
+        </a:xfrm>
+      </p:grpSpPr>
+      <p:sp>
+        <p:nvSpPr>
+          <p:cNvPr id="2" name="Slide Image Placeholder 1"/>
+          <p:cNvSpPr>
+            <a:spLocks noGrp="1" noRot="1" noChangeAspect="1"/>
+          </p:cNvSpPr>
+          <p:nvPr>
+            <p:ph type="sldImg"/>
+          </p:nvPr>
+        </p:nvSpPr>
+        <p:spPr/>
+      </p:sp>
+      <p:sp>
+        <p:nvSpPr>
+          <p:cNvPr id="3" name="Notes Placeholder 2"/>
+          <p:cNvSpPr>
+            <a:spLocks noGrp="1"/>
+          </p:cNvSpPr>
+          <p:nvPr>
+            <p:ph type="body" idx="1"/>
+          </p:nvPr>
+        </p:nvSpPr>
+        <p:spPr/>
+        <p:txBody>
+          <a:bodyPr/>
+          <a:lstStyle/>
+          <a:p>
+            <a:r>
+              <a:rPr lang="en-US" dirty="0"/>
+              <a:t/>
+            </a:r>
+            <a:endParaRPr lang="en-US" dirty="0"/>
+          </a:p>
+        </p:txBody>
+      </p:sp>
+      <p:sp>
+        <p:nvSpPr>
+          <p:cNvPr id="4" name="Slide Number Placeholder 3"/>
+          <p:cNvSpPr>
+            <a:spLocks noGrp="1"/>
+          </p:cNvSpPr>
+          <p:nvPr>
+            <p:ph type="sldNum" sz="quarter" idx="10"/>
+          </p:nvPr>
+        </p:nvSpPr>
+        <p:spPr/>
+        <p:txBody>
+          <a:bodyPr/>
+          <a:lstStyle/>
+          <a:p>
+            <a:fld id="{F7021451-1387-4CA6-816F-3879F97B5CBC}" type="slidenum">
+              <a:rPr lang="en-US"/>
+              <a:t>14</a:t>
             </a:fld>
             <a:endParaRPr lang="en-US"/>
           </a:p>
@@ -2565,6 +2654,1841 @@
                 <a:ea typeface="Calibri" pitchFamily="34" charset="-122"/>
                 <a:cs typeface="Calibri" pitchFamily="34" charset="-120"/>
               </a:rPr>
+              <a:t>FEEDBACK MAPPING</a:t>
+            </a:r>
+            <a:endParaRPr lang="en-US" sz="1200" dirty="0"/>
+          </a:p>
+        </p:txBody>
+      </p:sp>
+      <p:sp>
+        <p:nvSpPr>
+          <p:cNvPr id="3" name="Text 1"/>
+          <p:cNvSpPr txBox="1"/>
+          <p:nvPr/>
+        </p:nvSpPr>
+        <p:spPr>
+          <a:xfrm>
+            <a:off x="640080" y="685800"/>
+            <a:ext cx="10881360" cy="822960"/>
+          </a:xfrm>
+          <a:prstGeom prst="rect">
+            <a:avLst/>
+          </a:prstGeom>
+          <a:noFill/>
+          <a:ln/>
+        </p:spPr>
+        <p:txBody>
+          <a:bodyPr wrap="square" lIns="0" tIns="0" rIns="0" bIns="0" rtlCol="0" anchor="ctr"/>
+          <a:lstStyle/>
+          <a:p>
+            <a:pPr indent="0" marL="0">
+              <a:buNone/>
+            </a:pPr>
+            <a:r>
+              <a:rPr lang="en-US" sz="2700" b="1" dirty="0">
+                <a:solidFill>
+                  <a:srgbClr val="EAF3F1"/>
+                </a:solidFill>
+                <a:latin typeface="Arial" pitchFamily="34" charset="0"/>
+                <a:ea typeface="Arial" pitchFamily="34" charset="-122"/>
+                <a:cs typeface="Arial" pitchFamily="34" charset="-120"/>
+              </a:rPr>
+              <a:t>교수님 피드백과 우리 상태</a:t>
+            </a:r>
+            <a:endParaRPr lang="en-US" sz="2700" dirty="0"/>
+          </a:p>
+        </p:txBody>
+      </p:sp>
+      <p:graphicFrame>
+        <p:nvGraphicFramePr>
+          <p:cNvPr id="11" name="Table 0"/>
+          <p:cNvGraphicFramePr>
+            <a:graphicFrameLocks noGrp="1"/>
+          </p:cNvGraphicFramePr>
+          <p:nvPr>
+            <p:extLst>
+              <p:ext uri="{D42A27DB-BD31-4B8C-83A1-F6EECF244321}">
+                <p14:modId xmlns:p14="http://schemas.microsoft.com/office/powerpoint/2010/main" val="1579011935"/>
+              </p:ext>
+            </p:extLst>
+          </p:nvPr>
+        </p:nvGraphicFramePr>
+        <p:xfrm>
+          <a:off x="640080" y="1691640"/>
+          <a:ext cx="10908792" cy="914400"/>
+        </p:xfrm>
+        <a:graphic>
+          <a:graphicData uri="http://schemas.openxmlformats.org/drawingml/2006/table">
+            <a:tbl>
+              <a:tblPr/>
+              <a:tblGrid>
+                <a:gridCol w="3657600"/>
+                <a:gridCol w="1371600"/>
+                <a:gridCol w="5879592"/>
+              </a:tblGrid>
+              <a:tr h="566928">
+                <a:tc>
+                  <a:txBody>
+                    <a:bodyPr/>
+                    <a:lstStyle/>
+                    <a:p>
+                      <a:pPr indent="0" marL="0">
+                        <a:buNone/>
+                      </a:pPr>
+                      <a:r>
+                        <a:rPr lang="en-US" sz="1150" b="1" dirty="0">
+                          <a:solidFill>
+                            <a:srgbClr val="EAF3F1"/>
+                          </a:solidFill>
+                          <a:latin typeface="Calibri" pitchFamily="34" charset="0"/>
+                          <a:ea typeface="Calibri" pitchFamily="34" charset="-122"/>
+                          <a:cs typeface="Calibri" pitchFamily="34" charset="-120"/>
+                        </a:rPr>
+                        <a:t>피드백</a:t>
+                      </a:r>
+                      <a:endParaRPr lang="en-US" sz="1150" dirty="0">
+                        <a:latin typeface="Calibri" charset="0"/>
+                        <a:ea typeface="Calibri" charset="0"/>
+                        <a:cs typeface="Calibri" charset="0"/>
+                      </a:endParaRPr>
+                    </a:p>
+                  </a:txBody>
+                  <a:tcPr marL="91440" marR="91440" marT="45720" marB="45720" anchor="ctr">
+                    <a:lnL w="19050" cap="flat" cmpd="sng" algn="ctr">
+                      <a:solidFill>
+                        <a:srgbClr val="0B1A26"/>
+                      </a:solidFill>
+                      <a:prstDash val="solid"/>
+                      <a:round/>
+                      <a:headEnd type="none" w="med" len="med"/>
+                      <a:tailEnd type="none" w="med" len="med"/>
+                    </a:lnL>
+                    <a:lnR w="19050" cap="flat" cmpd="sng" algn="ctr">
+                      <a:solidFill>
+                        <a:srgbClr val="0B1A26"/>
+                      </a:solidFill>
+                      <a:prstDash val="solid"/>
+                      <a:round/>
+                      <a:headEnd type="none" w="med" len="med"/>
+                      <a:tailEnd type="none" w="med" len="med"/>
+                    </a:lnR>
+                    <a:lnT w="19050" cap="flat" cmpd="sng" algn="ctr">
+                      <a:solidFill>
+                        <a:srgbClr val="0B1A26"/>
+                      </a:solidFill>
+                      <a:prstDash val="solid"/>
+                      <a:round/>
+                      <a:headEnd type="none" w="med" len="med"/>
+                      <a:tailEnd type="none" w="med" len="med"/>
+                    </a:lnT>
+                    <a:lnB w="19050" cap="flat" cmpd="sng" algn="ctr">
+                      <a:solidFill>
+                        <a:srgbClr val="0B1A26"/>
+                      </a:solidFill>
+                      <a:prstDash val="solid"/>
+                      <a:round/>
+                      <a:headEnd type="none" w="med" len="med"/>
+                      <a:tailEnd type="none" w="med" len="med"/>
+                    </a:lnB>
+                    <a:solidFill>
+                      <a:srgbClr val="12655A"/>
+                    </a:solidFill>
+                  </a:tcPr>
+                </a:tc>
+                <a:tc>
+                  <a:txBody>
+                    <a:bodyPr/>
+                    <a:lstStyle/>
+                    <a:p>
+                      <a:pPr indent="0" marL="0">
+                        <a:buNone/>
+                      </a:pPr>
+                      <a:r>
+                        <a:rPr lang="en-US" sz="1150" b="1" dirty="0">
+                          <a:solidFill>
+                            <a:srgbClr val="EAF3F1"/>
+                          </a:solidFill>
+                          <a:latin typeface="Calibri" pitchFamily="34" charset="0"/>
+                          <a:ea typeface="Calibri" pitchFamily="34" charset="-122"/>
+                          <a:cs typeface="Calibri" pitchFamily="34" charset="-120"/>
+                        </a:rPr>
+                        <a:t>현재 상태</a:t>
+                      </a:r>
+                      <a:endParaRPr lang="en-US" sz="1150" dirty="0">
+                        <a:latin typeface="Calibri" charset="0"/>
+                        <a:ea typeface="Calibri" charset="0"/>
+                        <a:cs typeface="Calibri" charset="0"/>
+                      </a:endParaRPr>
+                    </a:p>
+                  </a:txBody>
+                  <a:tcPr marL="91440" marR="91440" marT="45720" marB="45720" anchor="ctr">
+                    <a:lnL w="19050" cap="flat" cmpd="sng" algn="ctr">
+                      <a:solidFill>
+                        <a:srgbClr val="0B1A26"/>
+                      </a:solidFill>
+                      <a:prstDash val="solid"/>
+                      <a:round/>
+                      <a:headEnd type="none" w="med" len="med"/>
+                      <a:tailEnd type="none" w="med" len="med"/>
+                    </a:lnL>
+                    <a:lnR w="19050" cap="flat" cmpd="sng" algn="ctr">
+                      <a:solidFill>
+                        <a:srgbClr val="0B1A26"/>
+                      </a:solidFill>
+                      <a:prstDash val="solid"/>
+                      <a:round/>
+                      <a:headEnd type="none" w="med" len="med"/>
+                      <a:tailEnd type="none" w="med" len="med"/>
+                    </a:lnR>
+                    <a:lnT w="19050" cap="flat" cmpd="sng" algn="ctr">
+                      <a:solidFill>
+                        <a:srgbClr val="0B1A26"/>
+                      </a:solidFill>
+                      <a:prstDash val="solid"/>
+                      <a:round/>
+                      <a:headEnd type="none" w="med" len="med"/>
+                      <a:tailEnd type="none" w="med" len="med"/>
+                    </a:lnT>
+                    <a:lnB w="19050" cap="flat" cmpd="sng" algn="ctr">
+                      <a:solidFill>
+                        <a:srgbClr val="0B1A26"/>
+                      </a:solidFill>
+                      <a:prstDash val="solid"/>
+                      <a:round/>
+                      <a:headEnd type="none" w="med" len="med"/>
+                      <a:tailEnd type="none" w="med" len="med"/>
+                    </a:lnB>
+                    <a:solidFill>
+                      <a:srgbClr val="12655A"/>
+                    </a:solidFill>
+                  </a:tcPr>
+                </a:tc>
+                <a:tc>
+                  <a:txBody>
+                    <a:bodyPr/>
+                    <a:lstStyle/>
+                    <a:p>
+                      <a:pPr indent="0" marL="0">
+                        <a:buNone/>
+                      </a:pPr>
+                      <a:r>
+                        <a:rPr lang="en-US" sz="1150" b="1" dirty="0">
+                          <a:solidFill>
+                            <a:srgbClr val="EAF3F1"/>
+                          </a:solidFill>
+                          <a:latin typeface="Calibri" pitchFamily="34" charset="0"/>
+                          <a:ea typeface="Calibri" pitchFamily="34" charset="-122"/>
+                          <a:cs typeface="Calibri" pitchFamily="34" charset="-120"/>
+                        </a:rPr>
+                        <a:t>대응</a:t>
+                      </a:r>
+                      <a:endParaRPr lang="en-US" sz="1150" dirty="0">
+                        <a:latin typeface="Calibri" charset="0"/>
+                        <a:ea typeface="Calibri" charset="0"/>
+                        <a:cs typeface="Calibri" charset="0"/>
+                      </a:endParaRPr>
+                    </a:p>
+                  </a:txBody>
+                  <a:tcPr marL="91440" marR="91440" marT="45720" marB="45720" anchor="ctr">
+                    <a:lnL w="19050" cap="flat" cmpd="sng" algn="ctr">
+                      <a:solidFill>
+                        <a:srgbClr val="0B1A26"/>
+                      </a:solidFill>
+                      <a:prstDash val="solid"/>
+                      <a:round/>
+                      <a:headEnd type="none" w="med" len="med"/>
+                      <a:tailEnd type="none" w="med" len="med"/>
+                    </a:lnL>
+                    <a:lnR w="19050" cap="flat" cmpd="sng" algn="ctr">
+                      <a:solidFill>
+                        <a:srgbClr val="0B1A26"/>
+                      </a:solidFill>
+                      <a:prstDash val="solid"/>
+                      <a:round/>
+                      <a:headEnd type="none" w="med" len="med"/>
+                      <a:tailEnd type="none" w="med" len="med"/>
+                    </a:lnR>
+                    <a:lnT w="19050" cap="flat" cmpd="sng" algn="ctr">
+                      <a:solidFill>
+                        <a:srgbClr val="0B1A26"/>
+                      </a:solidFill>
+                      <a:prstDash val="solid"/>
+                      <a:round/>
+                      <a:headEnd type="none" w="med" len="med"/>
+                      <a:tailEnd type="none" w="med" len="med"/>
+                    </a:lnT>
+                    <a:lnB w="19050" cap="flat" cmpd="sng" algn="ctr">
+                      <a:solidFill>
+                        <a:srgbClr val="0B1A26"/>
+                      </a:solidFill>
+                      <a:prstDash val="solid"/>
+                      <a:round/>
+                      <a:headEnd type="none" w="med" len="med"/>
+                      <a:tailEnd type="none" w="med" len="med"/>
+                    </a:lnB>
+                    <a:solidFill>
+                      <a:srgbClr val="12655A"/>
+                    </a:solidFill>
+                  </a:tcPr>
+                </a:tc>
+              </a:tr>
+              <a:tr h="566928">
+                <a:tc>
+                  <a:txBody>
+                    <a:bodyPr/>
+                    <a:lstStyle/>
+                    <a:p>
+                      <a:pPr indent="0" marL="0">
+                        <a:buNone/>
+                      </a:pPr>
+                      <a:r>
+                        <a:rPr lang="en-US" sz="1150" dirty="0">
+                          <a:solidFill>
+                            <a:srgbClr val="16262E"/>
+                          </a:solidFill>
+                          <a:latin typeface="Calibri" pitchFamily="34" charset="0"/>
+                          <a:ea typeface="Calibri" pitchFamily="34" charset="-122"/>
+                          <a:cs typeface="Calibri" pitchFamily="34" charset="-120"/>
+                        </a:rPr>
+                        <a:t>목표를 최소 fps가 아닌 최대 fps로</a:t>
+                      </a:r>
+                      <a:endParaRPr lang="en-US" sz="1150" dirty="0">
+                        <a:latin typeface="Calibri" charset="0"/>
+                        <a:ea typeface="Calibri" charset="0"/>
+                        <a:cs typeface="Calibri" charset="0"/>
+                      </a:endParaRPr>
+                    </a:p>
+                  </a:txBody>
+                  <a:tcPr marL="91440" marR="91440" marT="45720" marB="45720" anchor="ctr">
+                    <a:lnL w="19050" cap="flat" cmpd="sng" algn="ctr">
+                      <a:solidFill>
+                        <a:srgbClr val="0B1A26"/>
+                      </a:solidFill>
+                      <a:prstDash val="solid"/>
+                      <a:round/>
+                      <a:headEnd type="none" w="med" len="med"/>
+                      <a:tailEnd type="none" w="med" len="med"/>
+                    </a:lnL>
+                    <a:lnR w="19050" cap="flat" cmpd="sng" algn="ctr">
+                      <a:solidFill>
+                        <a:srgbClr val="0B1A26"/>
+                      </a:solidFill>
+                      <a:prstDash val="solid"/>
+                      <a:round/>
+                      <a:headEnd type="none" w="med" len="med"/>
+                      <a:tailEnd type="none" w="med" len="med"/>
+                    </a:lnR>
+                    <a:lnT w="19050" cap="flat" cmpd="sng" algn="ctr">
+                      <a:solidFill>
+                        <a:srgbClr val="0B1A26"/>
+                      </a:solidFill>
+                      <a:prstDash val="solid"/>
+                      <a:round/>
+                      <a:headEnd type="none" w="med" len="med"/>
+                      <a:tailEnd type="none" w="med" len="med"/>
+                    </a:lnT>
+                    <a:lnB w="19050" cap="flat" cmpd="sng" algn="ctr">
+                      <a:solidFill>
+                        <a:srgbClr val="0B1A26"/>
+                      </a:solidFill>
+                      <a:prstDash val="solid"/>
+                      <a:round/>
+                      <a:headEnd type="none" w="med" len="med"/>
+                      <a:tailEnd type="none" w="med" len="med"/>
+                    </a:lnB>
+                    <a:solidFill>
+                      <a:srgbClr val="FFFFFF"/>
+                    </a:solidFill>
+                  </a:tcPr>
+                </a:tc>
+                <a:tc>
+                  <a:txBody>
+                    <a:bodyPr/>
+                    <a:lstStyle/>
+                    <a:p>
+                      <a:pPr indent="0" marL="0">
+                        <a:buNone/>
+                      </a:pPr>
+                      <a:r>
+                        <a:rPr lang="en-US" sz="1150" b="1" dirty="0">
+                          <a:solidFill>
+                            <a:srgbClr val="9A3F1F"/>
+                          </a:solidFill>
+                          <a:latin typeface="Calibri" pitchFamily="34" charset="0"/>
+                          <a:ea typeface="Calibri" pitchFamily="34" charset="-122"/>
+                          <a:cs typeface="Calibri" pitchFamily="34" charset="-120"/>
+                        </a:rPr>
+                        <a:t>방향 수정</a:t>
+                      </a:r>
+                      <a:endParaRPr lang="en-US" sz="1150" dirty="0">
+                        <a:latin typeface="Calibri" charset="0"/>
+                        <a:ea typeface="Calibri" charset="0"/>
+                        <a:cs typeface="Calibri" charset="0"/>
+                      </a:endParaRPr>
+                    </a:p>
+                  </a:txBody>
+                  <a:tcPr marL="91440" marR="91440" marT="45720" marB="45720" anchor="ctr">
+                    <a:lnL w="19050" cap="flat" cmpd="sng" algn="ctr">
+                      <a:solidFill>
+                        <a:srgbClr val="0B1A26"/>
+                      </a:solidFill>
+                      <a:prstDash val="solid"/>
+                      <a:round/>
+                      <a:headEnd type="none" w="med" len="med"/>
+                      <a:tailEnd type="none" w="med" len="med"/>
+                    </a:lnL>
+                    <a:lnR w="19050" cap="flat" cmpd="sng" algn="ctr">
+                      <a:solidFill>
+                        <a:srgbClr val="0B1A26"/>
+                      </a:solidFill>
+                      <a:prstDash val="solid"/>
+                      <a:round/>
+                      <a:headEnd type="none" w="med" len="med"/>
+                      <a:tailEnd type="none" w="med" len="med"/>
+                    </a:lnR>
+                    <a:lnT w="19050" cap="flat" cmpd="sng" algn="ctr">
+                      <a:solidFill>
+                        <a:srgbClr val="0B1A26"/>
+                      </a:solidFill>
+                      <a:prstDash val="solid"/>
+                      <a:round/>
+                      <a:headEnd type="none" w="med" len="med"/>
+                      <a:tailEnd type="none" w="med" len="med"/>
+                    </a:lnT>
+                    <a:lnB w="19050" cap="flat" cmpd="sng" algn="ctr">
+                      <a:solidFill>
+                        <a:srgbClr val="0B1A26"/>
+                      </a:solidFill>
+                      <a:prstDash val="solid"/>
+                      <a:round/>
+                      <a:headEnd type="none" w="med" len="med"/>
+                      <a:tailEnd type="none" w="med" len="med"/>
+                    </a:lnB>
+                    <a:solidFill>
+                      <a:srgbClr val="FDEFE8"/>
+                    </a:solidFill>
+                  </a:tcPr>
+                </a:tc>
+                <a:tc>
+                  <a:txBody>
+                    <a:bodyPr/>
+                    <a:lstStyle/>
+                    <a:p>
+                      <a:pPr indent="0" marL="0">
+                        <a:buNone/>
+                      </a:pPr>
+                      <a:r>
+                        <a:rPr lang="en-US" sz="1150" dirty="0">
+                          <a:solidFill>
+                            <a:srgbClr val="16262E"/>
+                          </a:solidFill>
+                          <a:latin typeface="Calibri" pitchFamily="34" charset="0"/>
+                          <a:ea typeface="Calibri" pitchFamily="34" charset="-122"/>
+                          <a:cs typeface="Calibri" pitchFamily="34" charset="-120"/>
+                        </a:rPr>
+                        <a:t>캡처 29.4fps 실측 있음 → 추론·마스킹 포함 전체 파이프라인 fps를 재측정</a:t>
+                      </a:r>
+                      <a:endParaRPr lang="en-US" sz="1150" dirty="0">
+                        <a:latin typeface="Calibri" charset="0"/>
+                        <a:ea typeface="Calibri" charset="0"/>
+                        <a:cs typeface="Calibri" charset="0"/>
+                      </a:endParaRPr>
+                    </a:p>
+                  </a:txBody>
+                  <a:tcPr marL="91440" marR="91440" marT="45720" marB="45720" anchor="ctr">
+                    <a:lnL w="19050" cap="flat" cmpd="sng" algn="ctr">
+                      <a:solidFill>
+                        <a:srgbClr val="0B1A26"/>
+                      </a:solidFill>
+                      <a:prstDash val="solid"/>
+                      <a:round/>
+                      <a:headEnd type="none" w="med" len="med"/>
+                      <a:tailEnd type="none" w="med" len="med"/>
+                    </a:lnL>
+                    <a:lnR w="19050" cap="flat" cmpd="sng" algn="ctr">
+                      <a:solidFill>
+                        <a:srgbClr val="0B1A26"/>
+                      </a:solidFill>
+                      <a:prstDash val="solid"/>
+                      <a:round/>
+                      <a:headEnd type="none" w="med" len="med"/>
+                      <a:tailEnd type="none" w="med" len="med"/>
+                    </a:lnR>
+                    <a:lnT w="19050" cap="flat" cmpd="sng" algn="ctr">
+                      <a:solidFill>
+                        <a:srgbClr val="0B1A26"/>
+                      </a:solidFill>
+                      <a:prstDash val="solid"/>
+                      <a:round/>
+                      <a:headEnd type="none" w="med" len="med"/>
+                      <a:tailEnd type="none" w="med" len="med"/>
+                    </a:lnT>
+                    <a:lnB w="19050" cap="flat" cmpd="sng" algn="ctr">
+                      <a:solidFill>
+                        <a:srgbClr val="0B1A26"/>
+                      </a:solidFill>
+                      <a:prstDash val="solid"/>
+                      <a:round/>
+                      <a:headEnd type="none" w="med" len="med"/>
+                      <a:tailEnd type="none" w="med" len="med"/>
+                    </a:lnB>
+                    <a:solidFill>
+                      <a:srgbClr val="FFFFFF"/>
+                    </a:solidFill>
+                  </a:tcPr>
+                </a:tc>
+              </a:tr>
+              <a:tr h="566928">
+                <a:tc>
+                  <a:txBody>
+                    <a:bodyPr/>
+                    <a:lstStyle/>
+                    <a:p>
+                      <a:pPr indent="0" marL="0">
+                        <a:buNone/>
+                      </a:pPr>
+                      <a:r>
+                        <a:rPr lang="en-US" sz="1150" dirty="0">
+                          <a:solidFill>
+                            <a:srgbClr val="16262E"/>
+                          </a:solidFill>
+                          <a:latin typeface="Calibri" pitchFamily="34" charset="0"/>
+                          <a:ea typeface="Calibri" pitchFamily="34" charset="-122"/>
+                          <a:cs typeface="Calibri" pitchFamily="34" charset="-120"/>
+                        </a:rPr>
+                        <a:t>허리 위치 추정</a:t>
+                      </a:r>
+                      <a:endParaRPr lang="en-US" sz="1150" dirty="0">
+                        <a:latin typeface="Calibri" charset="0"/>
+                        <a:ea typeface="Calibri" charset="0"/>
+                        <a:cs typeface="Calibri" charset="0"/>
+                      </a:endParaRPr>
+                    </a:p>
+                  </a:txBody>
+                  <a:tcPr marL="91440" marR="91440" marT="45720" marB="45720" anchor="ctr">
+                    <a:lnL w="19050" cap="flat" cmpd="sng" algn="ctr">
+                      <a:solidFill>
+                        <a:srgbClr val="0B1A26"/>
+                      </a:solidFill>
+                      <a:prstDash val="solid"/>
+                      <a:round/>
+                      <a:headEnd type="none" w="med" len="med"/>
+                      <a:tailEnd type="none" w="med" len="med"/>
+                    </a:lnL>
+                    <a:lnR w="19050" cap="flat" cmpd="sng" algn="ctr">
+                      <a:solidFill>
+                        <a:srgbClr val="0B1A26"/>
+                      </a:solidFill>
+                      <a:prstDash val="solid"/>
+                      <a:round/>
+                      <a:headEnd type="none" w="med" len="med"/>
+                      <a:tailEnd type="none" w="med" len="med"/>
+                    </a:lnR>
+                    <a:lnT w="19050" cap="flat" cmpd="sng" algn="ctr">
+                      <a:solidFill>
+                        <a:srgbClr val="0B1A26"/>
+                      </a:solidFill>
+                      <a:prstDash val="solid"/>
+                      <a:round/>
+                      <a:headEnd type="none" w="med" len="med"/>
+                      <a:tailEnd type="none" w="med" len="med"/>
+                    </a:lnT>
+                    <a:lnB w="19050" cap="flat" cmpd="sng" algn="ctr">
+                      <a:solidFill>
+                        <a:srgbClr val="0B1A26"/>
+                      </a:solidFill>
+                      <a:prstDash val="solid"/>
+                      <a:round/>
+                      <a:headEnd type="none" w="med" len="med"/>
+                      <a:tailEnd type="none" w="med" len="med"/>
+                    </a:lnB>
+                    <a:solidFill>
+                      <a:srgbClr val="FFFFFF"/>
+                    </a:solidFill>
+                  </a:tcPr>
+                </a:tc>
+                <a:tc>
+                  <a:txBody>
+                    <a:bodyPr/>
+                    <a:lstStyle/>
+                    <a:p>
+                      <a:pPr indent="0" marL="0">
+                        <a:buNone/>
+                      </a:pPr>
+                      <a:r>
+                        <a:rPr lang="en-US" sz="1150" b="1" dirty="0">
+                          <a:solidFill>
+                            <a:srgbClr val="12655A"/>
+                          </a:solidFill>
+                          <a:latin typeface="Calibri" pitchFamily="34" charset="0"/>
+                          <a:ea typeface="Calibri" pitchFamily="34" charset="-122"/>
+                          <a:cs typeface="Calibri" pitchFamily="34" charset="-120"/>
+                        </a:rPr>
+                        <a:t>반영됨</a:t>
+                      </a:r>
+                      <a:endParaRPr lang="en-US" sz="1150" dirty="0">
+                        <a:latin typeface="Calibri" charset="0"/>
+                        <a:ea typeface="Calibri" charset="0"/>
+                        <a:cs typeface="Calibri" charset="0"/>
+                      </a:endParaRPr>
+                    </a:p>
+                  </a:txBody>
+                  <a:tcPr marL="91440" marR="91440" marT="45720" marB="45720" anchor="ctr">
+                    <a:lnL w="19050" cap="flat" cmpd="sng" algn="ctr">
+                      <a:solidFill>
+                        <a:srgbClr val="0B1A26"/>
+                      </a:solidFill>
+                      <a:prstDash val="solid"/>
+                      <a:round/>
+                      <a:headEnd type="none" w="med" len="med"/>
+                      <a:tailEnd type="none" w="med" len="med"/>
+                    </a:lnL>
+                    <a:lnR w="19050" cap="flat" cmpd="sng" algn="ctr">
+                      <a:solidFill>
+                        <a:srgbClr val="0B1A26"/>
+                      </a:solidFill>
+                      <a:prstDash val="solid"/>
+                      <a:round/>
+                      <a:headEnd type="none" w="med" len="med"/>
+                      <a:tailEnd type="none" w="med" len="med"/>
+                    </a:lnR>
+                    <a:lnT w="19050" cap="flat" cmpd="sng" algn="ctr">
+                      <a:solidFill>
+                        <a:srgbClr val="0B1A26"/>
+                      </a:solidFill>
+                      <a:prstDash val="solid"/>
+                      <a:round/>
+                      <a:headEnd type="none" w="med" len="med"/>
+                      <a:tailEnd type="none" w="med" len="med"/>
+                    </a:lnT>
+                    <a:lnB w="19050" cap="flat" cmpd="sng" algn="ctr">
+                      <a:solidFill>
+                        <a:srgbClr val="0B1A26"/>
+                      </a:solidFill>
+                      <a:prstDash val="solid"/>
+                      <a:round/>
+                      <a:headEnd type="none" w="med" len="med"/>
+                      <a:tailEnd type="none" w="med" len="med"/>
+                    </a:lnB>
+                    <a:solidFill>
+                      <a:srgbClr val="E9FBF7"/>
+                    </a:solidFill>
+                  </a:tcPr>
+                </a:tc>
+                <a:tc>
+                  <a:txBody>
+                    <a:bodyPr/>
+                    <a:lstStyle/>
+                    <a:p>
+                      <a:pPr indent="0" marL="0">
+                        <a:buNone/>
+                      </a:pPr>
+                      <a:r>
+                        <a:rPr lang="en-US" sz="1150" dirty="0">
+                          <a:solidFill>
+                            <a:srgbClr val="16262E"/>
+                          </a:solidFill>
+                          <a:latin typeface="Calibri" pitchFamily="34" charset="0"/>
+                          <a:ea typeface="Calibri" pitchFamily="34" charset="-122"/>
+                          <a:cs typeface="Calibri" pitchFamily="34" charset="-120"/>
+                        </a:rPr>
+                        <a:t>가림 보정 스무딩 + 엉덩이−가슴 depth 차 (책상 가림 시 신뢰도↓ → 머리−가슴 depth 차로 보완)</a:t>
+                      </a:r>
+                      <a:endParaRPr lang="en-US" sz="1150" dirty="0">
+                        <a:latin typeface="Calibri" charset="0"/>
+                        <a:ea typeface="Calibri" charset="0"/>
+                        <a:cs typeface="Calibri" charset="0"/>
+                      </a:endParaRPr>
+                    </a:p>
+                  </a:txBody>
+                  <a:tcPr marL="91440" marR="91440" marT="45720" marB="45720" anchor="ctr">
+                    <a:lnL w="19050" cap="flat" cmpd="sng" algn="ctr">
+                      <a:solidFill>
+                        <a:srgbClr val="0B1A26"/>
+                      </a:solidFill>
+                      <a:prstDash val="solid"/>
+                      <a:round/>
+                      <a:headEnd type="none" w="med" len="med"/>
+                      <a:tailEnd type="none" w="med" len="med"/>
+                    </a:lnL>
+                    <a:lnR w="19050" cap="flat" cmpd="sng" algn="ctr">
+                      <a:solidFill>
+                        <a:srgbClr val="0B1A26"/>
+                      </a:solidFill>
+                      <a:prstDash val="solid"/>
+                      <a:round/>
+                      <a:headEnd type="none" w="med" len="med"/>
+                      <a:tailEnd type="none" w="med" len="med"/>
+                    </a:lnR>
+                    <a:lnT w="19050" cap="flat" cmpd="sng" algn="ctr">
+                      <a:solidFill>
+                        <a:srgbClr val="0B1A26"/>
+                      </a:solidFill>
+                      <a:prstDash val="solid"/>
+                      <a:round/>
+                      <a:headEnd type="none" w="med" len="med"/>
+                      <a:tailEnd type="none" w="med" len="med"/>
+                    </a:lnT>
+                    <a:lnB w="19050" cap="flat" cmpd="sng" algn="ctr">
+                      <a:solidFill>
+                        <a:srgbClr val="0B1A26"/>
+                      </a:solidFill>
+                      <a:prstDash val="solid"/>
+                      <a:round/>
+                      <a:headEnd type="none" w="med" len="med"/>
+                      <a:tailEnd type="none" w="med" len="med"/>
+                    </a:lnB>
+                    <a:solidFill>
+                      <a:srgbClr val="FFFFFF"/>
+                    </a:solidFill>
+                  </a:tcPr>
+                </a:tc>
+              </a:tr>
+              <a:tr h="566928">
+                <a:tc>
+                  <a:txBody>
+                    <a:bodyPr/>
+                    <a:lstStyle/>
+                    <a:p>
+                      <a:pPr indent="0" marL="0">
+                        <a:buNone/>
+                      </a:pPr>
+                      <a:r>
+                        <a:rPr lang="en-US" sz="1150" dirty="0">
+                          <a:solidFill>
+                            <a:srgbClr val="16262E"/>
+                          </a:solidFill>
+                          <a:latin typeface="Calibri" pitchFamily="34" charset="0"/>
+                          <a:ea typeface="Calibri" pitchFamily="34" charset="-122"/>
+                          <a:cs typeface="Calibri" pitchFamily="34" charset="-120"/>
+                        </a:rPr>
+                        <a:t>정면 depth로 측면 자세 추정</a:t>
+                      </a:r>
+                      <a:endParaRPr lang="en-US" sz="1150" dirty="0">
+                        <a:latin typeface="Calibri" charset="0"/>
+                        <a:ea typeface="Calibri" charset="0"/>
+                        <a:cs typeface="Calibri" charset="0"/>
+                      </a:endParaRPr>
+                    </a:p>
+                  </a:txBody>
+                  <a:tcPr marL="91440" marR="91440" marT="45720" marB="45720" anchor="ctr">
+                    <a:lnL w="19050" cap="flat" cmpd="sng" algn="ctr">
+                      <a:solidFill>
+                        <a:srgbClr val="0B1A26"/>
+                      </a:solidFill>
+                      <a:prstDash val="solid"/>
+                      <a:round/>
+                      <a:headEnd type="none" w="med" len="med"/>
+                      <a:tailEnd type="none" w="med" len="med"/>
+                    </a:lnL>
+                    <a:lnR w="19050" cap="flat" cmpd="sng" algn="ctr">
+                      <a:solidFill>
+                        <a:srgbClr val="0B1A26"/>
+                      </a:solidFill>
+                      <a:prstDash val="solid"/>
+                      <a:round/>
+                      <a:headEnd type="none" w="med" len="med"/>
+                      <a:tailEnd type="none" w="med" len="med"/>
+                    </a:lnR>
+                    <a:lnT w="19050" cap="flat" cmpd="sng" algn="ctr">
+                      <a:solidFill>
+                        <a:srgbClr val="0B1A26"/>
+                      </a:solidFill>
+                      <a:prstDash val="solid"/>
+                      <a:round/>
+                      <a:headEnd type="none" w="med" len="med"/>
+                      <a:tailEnd type="none" w="med" len="med"/>
+                    </a:lnT>
+                    <a:lnB w="19050" cap="flat" cmpd="sng" algn="ctr">
+                      <a:solidFill>
+                        <a:srgbClr val="0B1A26"/>
+                      </a:solidFill>
+                      <a:prstDash val="solid"/>
+                      <a:round/>
+                      <a:headEnd type="none" w="med" len="med"/>
+                      <a:tailEnd type="none" w="med" len="med"/>
+                    </a:lnB>
+                    <a:solidFill>
+                      <a:srgbClr val="FFFFFF"/>
+                    </a:solidFill>
+                  </a:tcPr>
+                </a:tc>
+                <a:tc>
+                  <a:txBody>
+                    <a:bodyPr/>
+                    <a:lstStyle/>
+                    <a:p>
+                      <a:pPr indent="0" marL="0">
+                        <a:buNone/>
+                      </a:pPr>
+                      <a:r>
+                        <a:rPr lang="en-US" sz="1150" b="1" dirty="0">
+                          <a:solidFill>
+                            <a:srgbClr val="12655A"/>
+                          </a:solidFill>
+                          <a:latin typeface="Calibri" pitchFamily="34" charset="0"/>
+                          <a:ea typeface="Calibri" pitchFamily="34" charset="-122"/>
+                          <a:cs typeface="Calibri" pitchFamily="34" charset="-120"/>
+                        </a:rPr>
+                        <a:t>반영됨</a:t>
+                      </a:r>
+                      <a:endParaRPr lang="en-US" sz="1150" dirty="0">
+                        <a:latin typeface="Calibri" charset="0"/>
+                        <a:ea typeface="Calibri" charset="0"/>
+                        <a:cs typeface="Calibri" charset="0"/>
+                      </a:endParaRPr>
+                    </a:p>
+                  </a:txBody>
+                  <a:tcPr marL="91440" marR="91440" marT="45720" marB="45720" anchor="ctr">
+                    <a:lnL w="19050" cap="flat" cmpd="sng" algn="ctr">
+                      <a:solidFill>
+                        <a:srgbClr val="0B1A26"/>
+                      </a:solidFill>
+                      <a:prstDash val="solid"/>
+                      <a:round/>
+                      <a:headEnd type="none" w="med" len="med"/>
+                      <a:tailEnd type="none" w="med" len="med"/>
+                    </a:lnL>
+                    <a:lnR w="19050" cap="flat" cmpd="sng" algn="ctr">
+                      <a:solidFill>
+                        <a:srgbClr val="0B1A26"/>
+                      </a:solidFill>
+                      <a:prstDash val="solid"/>
+                      <a:round/>
+                      <a:headEnd type="none" w="med" len="med"/>
+                      <a:tailEnd type="none" w="med" len="med"/>
+                    </a:lnR>
+                    <a:lnT w="19050" cap="flat" cmpd="sng" algn="ctr">
+                      <a:solidFill>
+                        <a:srgbClr val="0B1A26"/>
+                      </a:solidFill>
+                      <a:prstDash val="solid"/>
+                      <a:round/>
+                      <a:headEnd type="none" w="med" len="med"/>
+                      <a:tailEnd type="none" w="med" len="med"/>
+                    </a:lnT>
+                    <a:lnB w="19050" cap="flat" cmpd="sng" algn="ctr">
+                      <a:solidFill>
+                        <a:srgbClr val="0B1A26"/>
+                      </a:solidFill>
+                      <a:prstDash val="solid"/>
+                      <a:round/>
+                      <a:headEnd type="none" w="med" len="med"/>
+                      <a:tailEnd type="none" w="med" len="med"/>
+                    </a:lnB>
+                    <a:solidFill>
+                      <a:srgbClr val="E9FBF7"/>
+                    </a:solidFill>
+                  </a:tcPr>
+                </a:tc>
+                <a:tc>
+                  <a:txBody>
+                    <a:bodyPr/>
+                    <a:lstStyle/>
+                    <a:p>
+                      <a:pPr indent="0" marL="0">
+                        <a:buNone/>
+                      </a:pPr>
+                      <a:r>
+                        <a:rPr lang="en-US" sz="1150" dirty="0">
+                          <a:solidFill>
+                            <a:srgbClr val="16262E"/>
+                          </a:solidFill>
+                          <a:latin typeface="Calibri" pitchFamily="34" charset="0"/>
+                          <a:ea typeface="Calibri" pitchFamily="34" charset="-122"/>
+                          <a:cs typeface="Calibri" pitchFamily="34" charset="-120"/>
+                        </a:rPr>
+                        <a:t>실측에서 분리됨: 엉덩이−가슴 정상 +0.05 / 기댐 −0.12m, 머리−가슴 0.15 → 0.06m</a:t>
+                      </a:r>
+                      <a:endParaRPr lang="en-US" sz="1150" dirty="0">
+                        <a:latin typeface="Calibri" charset="0"/>
+                        <a:ea typeface="Calibri" charset="0"/>
+                        <a:cs typeface="Calibri" charset="0"/>
+                      </a:endParaRPr>
+                    </a:p>
+                  </a:txBody>
+                  <a:tcPr marL="91440" marR="91440" marT="45720" marB="45720" anchor="ctr">
+                    <a:lnL w="19050" cap="flat" cmpd="sng" algn="ctr">
+                      <a:solidFill>
+                        <a:srgbClr val="0B1A26"/>
+                      </a:solidFill>
+                      <a:prstDash val="solid"/>
+                      <a:round/>
+                      <a:headEnd type="none" w="med" len="med"/>
+                      <a:tailEnd type="none" w="med" len="med"/>
+                    </a:lnL>
+                    <a:lnR w="19050" cap="flat" cmpd="sng" algn="ctr">
+                      <a:solidFill>
+                        <a:srgbClr val="0B1A26"/>
+                      </a:solidFill>
+                      <a:prstDash val="solid"/>
+                      <a:round/>
+                      <a:headEnd type="none" w="med" len="med"/>
+                      <a:tailEnd type="none" w="med" len="med"/>
+                    </a:lnR>
+                    <a:lnT w="19050" cap="flat" cmpd="sng" algn="ctr">
+                      <a:solidFill>
+                        <a:srgbClr val="0B1A26"/>
+                      </a:solidFill>
+                      <a:prstDash val="solid"/>
+                      <a:round/>
+                      <a:headEnd type="none" w="med" len="med"/>
+                      <a:tailEnd type="none" w="med" len="med"/>
+                    </a:lnT>
+                    <a:lnB w="19050" cap="flat" cmpd="sng" algn="ctr">
+                      <a:solidFill>
+                        <a:srgbClr val="0B1A26"/>
+                      </a:solidFill>
+                      <a:prstDash val="solid"/>
+                      <a:round/>
+                      <a:headEnd type="none" w="med" len="med"/>
+                      <a:tailEnd type="none" w="med" len="med"/>
+                    </a:lnB>
+                    <a:solidFill>
+                      <a:srgbClr val="FFFFFF"/>
+                    </a:solidFill>
+                  </a:tcPr>
+                </a:tc>
+              </a:tr>
+              <a:tr h="566928">
+                <a:tc>
+                  <a:txBody>
+                    <a:bodyPr/>
+                    <a:lstStyle/>
+                    <a:p>
+                      <a:pPr indent="0" marL="0">
+                        <a:buNone/>
+                      </a:pPr>
+                      <a:r>
+                        <a:rPr lang="en-US" sz="1150" dirty="0">
+                          <a:solidFill>
+                            <a:srgbClr val="16262E"/>
+                          </a:solidFill>
+                          <a:latin typeface="Calibri" pitchFamily="34" charset="0"/>
+                          <a:ea typeface="Calibri" pitchFamily="34" charset="-122"/>
+                          <a:cs typeface="Calibri" pitchFamily="34" charset="-120"/>
+                        </a:rPr>
+                        <a:t>앉을 때마다 기준점이 필요한가 → 절대값으로</a:t>
+                      </a:r>
+                      <a:endParaRPr lang="en-US" sz="1150" dirty="0">
+                        <a:latin typeface="Calibri" charset="0"/>
+                        <a:ea typeface="Calibri" charset="0"/>
+                        <a:cs typeface="Calibri" charset="0"/>
+                      </a:endParaRPr>
+                    </a:p>
+                  </a:txBody>
+                  <a:tcPr marL="91440" marR="91440" marT="45720" marB="45720" anchor="ctr">
+                    <a:lnL w="19050" cap="flat" cmpd="sng" algn="ctr">
+                      <a:solidFill>
+                        <a:srgbClr val="0B1A26"/>
+                      </a:solidFill>
+                      <a:prstDash val="solid"/>
+                      <a:round/>
+                      <a:headEnd type="none" w="med" len="med"/>
+                      <a:tailEnd type="none" w="med" len="med"/>
+                    </a:lnL>
+                    <a:lnR w="19050" cap="flat" cmpd="sng" algn="ctr">
+                      <a:solidFill>
+                        <a:srgbClr val="0B1A26"/>
+                      </a:solidFill>
+                      <a:prstDash val="solid"/>
+                      <a:round/>
+                      <a:headEnd type="none" w="med" len="med"/>
+                      <a:tailEnd type="none" w="med" len="med"/>
+                    </a:lnR>
+                    <a:lnT w="19050" cap="flat" cmpd="sng" algn="ctr">
+                      <a:solidFill>
+                        <a:srgbClr val="0B1A26"/>
+                      </a:solidFill>
+                      <a:prstDash val="solid"/>
+                      <a:round/>
+                      <a:headEnd type="none" w="med" len="med"/>
+                      <a:tailEnd type="none" w="med" len="med"/>
+                    </a:lnT>
+                    <a:lnB w="19050" cap="flat" cmpd="sng" algn="ctr">
+                      <a:solidFill>
+                        <a:srgbClr val="0B1A26"/>
+                      </a:solidFill>
+                      <a:prstDash val="solid"/>
+                      <a:round/>
+                      <a:headEnd type="none" w="med" len="med"/>
+                      <a:tailEnd type="none" w="med" len="med"/>
+                    </a:lnB>
+                    <a:solidFill>
+                      <a:srgbClr val="FFFFFF"/>
+                    </a:solidFill>
+                  </a:tcPr>
+                </a:tc>
+                <a:tc>
+                  <a:txBody>
+                    <a:bodyPr/>
+                    <a:lstStyle/>
+                    <a:p>
+                      <a:pPr indent="0" marL="0">
+                        <a:buNone/>
+                      </a:pPr>
+                      <a:r>
+                        <a:rPr lang="en-US" sz="1150" b="1" dirty="0">
+                          <a:solidFill>
+                            <a:srgbClr val="9A3F1F"/>
+                          </a:solidFill>
+                          <a:latin typeface="Calibri" pitchFamily="34" charset="0"/>
+                          <a:ea typeface="Calibri" pitchFamily="34" charset="-122"/>
+                          <a:cs typeface="Calibri" pitchFamily="34" charset="-120"/>
+                        </a:rPr>
+                        <a:t>설계함</a:t>
+                      </a:r>
+                      <a:endParaRPr lang="en-US" sz="1150" dirty="0">
+                        <a:latin typeface="Calibri" charset="0"/>
+                        <a:ea typeface="Calibri" charset="0"/>
+                        <a:cs typeface="Calibri" charset="0"/>
+                      </a:endParaRPr>
+                    </a:p>
+                  </a:txBody>
+                  <a:tcPr marL="91440" marR="91440" marT="45720" marB="45720" anchor="ctr">
+                    <a:lnL w="19050" cap="flat" cmpd="sng" algn="ctr">
+                      <a:solidFill>
+                        <a:srgbClr val="0B1A26"/>
+                      </a:solidFill>
+                      <a:prstDash val="solid"/>
+                      <a:round/>
+                      <a:headEnd type="none" w="med" len="med"/>
+                      <a:tailEnd type="none" w="med" len="med"/>
+                    </a:lnL>
+                    <a:lnR w="19050" cap="flat" cmpd="sng" algn="ctr">
+                      <a:solidFill>
+                        <a:srgbClr val="0B1A26"/>
+                      </a:solidFill>
+                      <a:prstDash val="solid"/>
+                      <a:round/>
+                      <a:headEnd type="none" w="med" len="med"/>
+                      <a:tailEnd type="none" w="med" len="med"/>
+                    </a:lnR>
+                    <a:lnT w="19050" cap="flat" cmpd="sng" algn="ctr">
+                      <a:solidFill>
+                        <a:srgbClr val="0B1A26"/>
+                      </a:solidFill>
+                      <a:prstDash val="solid"/>
+                      <a:round/>
+                      <a:headEnd type="none" w="med" len="med"/>
+                      <a:tailEnd type="none" w="med" len="med"/>
+                    </a:lnT>
+                    <a:lnB w="19050" cap="flat" cmpd="sng" algn="ctr">
+                      <a:solidFill>
+                        <a:srgbClr val="0B1A26"/>
+                      </a:solidFill>
+                      <a:prstDash val="solid"/>
+                      <a:round/>
+                      <a:headEnd type="none" w="med" len="med"/>
+                      <a:tailEnd type="none" w="med" len="med"/>
+                    </a:lnB>
+                    <a:solidFill>
+                      <a:srgbClr val="FDEFE8"/>
+                    </a:solidFill>
+                  </a:tcPr>
+                </a:tc>
+                <a:tc>
+                  <a:txBody>
+                    <a:bodyPr/>
+                    <a:lstStyle/>
+                    <a:p>
+                      <a:pPr indent="0" marL="0">
+                        <a:buNone/>
+                      </a:pPr>
+                      <a:r>
+                        <a:rPr lang="en-US" sz="1150" dirty="0">
+                          <a:solidFill>
+                            <a:srgbClr val="16262E"/>
+                          </a:solidFill>
+                          <a:latin typeface="Calibri" pitchFamily="34" charset="0"/>
+                          <a:ea typeface="Calibri" pitchFamily="34" charset="-122"/>
+                          <a:cs typeface="Calibri" pitchFamily="34" charset="-120"/>
+                        </a:rPr>
+                        <a:t>중력 기준 각도 + 어깨너비 비율 (다음 슬라이드)</a:t>
+                      </a:r>
+                      <a:endParaRPr lang="en-US" sz="1150" dirty="0">
+                        <a:latin typeface="Calibri" charset="0"/>
+                        <a:ea typeface="Calibri" charset="0"/>
+                        <a:cs typeface="Calibri" charset="0"/>
+                      </a:endParaRPr>
+                    </a:p>
+                  </a:txBody>
+                  <a:tcPr marL="91440" marR="91440" marT="45720" marB="45720" anchor="ctr">
+                    <a:lnL w="19050" cap="flat" cmpd="sng" algn="ctr">
+                      <a:solidFill>
+                        <a:srgbClr val="0B1A26"/>
+                      </a:solidFill>
+                      <a:prstDash val="solid"/>
+                      <a:round/>
+                      <a:headEnd type="none" w="med" len="med"/>
+                      <a:tailEnd type="none" w="med" len="med"/>
+                    </a:lnL>
+                    <a:lnR w="19050" cap="flat" cmpd="sng" algn="ctr">
+                      <a:solidFill>
+                        <a:srgbClr val="0B1A26"/>
+                      </a:solidFill>
+                      <a:prstDash val="solid"/>
+                      <a:round/>
+                      <a:headEnd type="none" w="med" len="med"/>
+                      <a:tailEnd type="none" w="med" len="med"/>
+                    </a:lnR>
+                    <a:lnT w="19050" cap="flat" cmpd="sng" algn="ctr">
+                      <a:solidFill>
+                        <a:srgbClr val="0B1A26"/>
+                      </a:solidFill>
+                      <a:prstDash val="solid"/>
+                      <a:round/>
+                      <a:headEnd type="none" w="med" len="med"/>
+                      <a:tailEnd type="none" w="med" len="med"/>
+                    </a:lnT>
+                    <a:lnB w="19050" cap="flat" cmpd="sng" algn="ctr">
+                      <a:solidFill>
+                        <a:srgbClr val="0B1A26"/>
+                      </a:solidFill>
+                      <a:prstDash val="solid"/>
+                      <a:round/>
+                      <a:headEnd type="none" w="med" len="med"/>
+                      <a:tailEnd type="none" w="med" len="med"/>
+                    </a:lnB>
+                    <a:solidFill>
+                      <a:srgbClr val="FFFFFF"/>
+                    </a:solidFill>
+                  </a:tcPr>
+                </a:tc>
+              </a:tr>
+              <a:tr h="566928">
+                <a:tc>
+                  <a:txBody>
+                    <a:bodyPr/>
+                    <a:lstStyle/>
+                    <a:p>
+                      <a:pPr indent="0" marL="0">
+                        <a:buNone/>
+                      </a:pPr>
+                      <a:r>
+                        <a:rPr lang="en-US" sz="1150" dirty="0">
+                          <a:solidFill>
+                            <a:srgbClr val="16262E"/>
+                          </a:solidFill>
+                          <a:latin typeface="Calibri" pitchFamily="34" charset="0"/>
+                          <a:ea typeface="Calibri" pitchFamily="34" charset="-122"/>
+                          <a:cs typeface="Calibri" pitchFamily="34" charset="-120"/>
+                        </a:rPr>
+                        <a:t>체형(복부·여성 체형 등) 두께 차이</a:t>
+                      </a:r>
+                      <a:endParaRPr lang="en-US" sz="1150" dirty="0">
+                        <a:latin typeface="Calibri" charset="0"/>
+                        <a:ea typeface="Calibri" charset="0"/>
+                        <a:cs typeface="Calibri" charset="0"/>
+                      </a:endParaRPr>
+                    </a:p>
+                  </a:txBody>
+                  <a:tcPr marL="91440" marR="91440" marT="45720" marB="45720" anchor="ctr">
+                    <a:lnL w="19050" cap="flat" cmpd="sng" algn="ctr">
+                      <a:solidFill>
+                        <a:srgbClr val="0B1A26"/>
+                      </a:solidFill>
+                      <a:prstDash val="solid"/>
+                      <a:round/>
+                      <a:headEnd type="none" w="med" len="med"/>
+                      <a:tailEnd type="none" w="med" len="med"/>
+                    </a:lnL>
+                    <a:lnR w="19050" cap="flat" cmpd="sng" algn="ctr">
+                      <a:solidFill>
+                        <a:srgbClr val="0B1A26"/>
+                      </a:solidFill>
+                      <a:prstDash val="solid"/>
+                      <a:round/>
+                      <a:headEnd type="none" w="med" len="med"/>
+                      <a:tailEnd type="none" w="med" len="med"/>
+                    </a:lnR>
+                    <a:lnT w="19050" cap="flat" cmpd="sng" algn="ctr">
+                      <a:solidFill>
+                        <a:srgbClr val="0B1A26"/>
+                      </a:solidFill>
+                      <a:prstDash val="solid"/>
+                      <a:round/>
+                      <a:headEnd type="none" w="med" len="med"/>
+                      <a:tailEnd type="none" w="med" len="med"/>
+                    </a:lnT>
+                    <a:lnB w="19050" cap="flat" cmpd="sng" algn="ctr">
+                      <a:solidFill>
+                        <a:srgbClr val="0B1A26"/>
+                      </a:solidFill>
+                      <a:prstDash val="solid"/>
+                      <a:round/>
+                      <a:headEnd type="none" w="med" len="med"/>
+                      <a:tailEnd type="none" w="med" len="med"/>
+                    </a:lnB>
+                    <a:solidFill>
+                      <a:srgbClr val="FFFFFF"/>
+                    </a:solidFill>
+                  </a:tcPr>
+                </a:tc>
+                <a:tc>
+                  <a:txBody>
+                    <a:bodyPr/>
+                    <a:lstStyle/>
+                    <a:p>
+                      <a:pPr indent="0" marL="0">
+                        <a:buNone/>
+                      </a:pPr>
+                      <a:r>
+                        <a:rPr lang="en-US" sz="1150" b="1" dirty="0">
+                          <a:solidFill>
+                            <a:srgbClr val="9A3F1F"/>
+                          </a:solidFill>
+                          <a:latin typeface="Calibri" pitchFamily="34" charset="0"/>
+                          <a:ea typeface="Calibri" pitchFamily="34" charset="-122"/>
+                          <a:cs typeface="Calibri" pitchFamily="34" charset="-120"/>
+                        </a:rPr>
+                        <a:t>미해결</a:t>
+                      </a:r>
+                      <a:endParaRPr lang="en-US" sz="1150" dirty="0">
+                        <a:latin typeface="Calibri" charset="0"/>
+                        <a:ea typeface="Calibri" charset="0"/>
+                        <a:cs typeface="Calibri" charset="0"/>
+                      </a:endParaRPr>
+                    </a:p>
+                  </a:txBody>
+                  <a:tcPr marL="91440" marR="91440" marT="45720" marB="45720" anchor="ctr">
+                    <a:lnL w="19050" cap="flat" cmpd="sng" algn="ctr">
+                      <a:solidFill>
+                        <a:srgbClr val="0B1A26"/>
+                      </a:solidFill>
+                      <a:prstDash val="solid"/>
+                      <a:round/>
+                      <a:headEnd type="none" w="med" len="med"/>
+                      <a:tailEnd type="none" w="med" len="med"/>
+                    </a:lnL>
+                    <a:lnR w="19050" cap="flat" cmpd="sng" algn="ctr">
+                      <a:solidFill>
+                        <a:srgbClr val="0B1A26"/>
+                      </a:solidFill>
+                      <a:prstDash val="solid"/>
+                      <a:round/>
+                      <a:headEnd type="none" w="med" len="med"/>
+                      <a:tailEnd type="none" w="med" len="med"/>
+                    </a:lnR>
+                    <a:lnT w="19050" cap="flat" cmpd="sng" algn="ctr">
+                      <a:solidFill>
+                        <a:srgbClr val="0B1A26"/>
+                      </a:solidFill>
+                      <a:prstDash val="solid"/>
+                      <a:round/>
+                      <a:headEnd type="none" w="med" len="med"/>
+                      <a:tailEnd type="none" w="med" len="med"/>
+                    </a:lnT>
+                    <a:lnB w="19050" cap="flat" cmpd="sng" algn="ctr">
+                      <a:solidFill>
+                        <a:srgbClr val="0B1A26"/>
+                      </a:solidFill>
+                      <a:prstDash val="solid"/>
+                      <a:round/>
+                      <a:headEnd type="none" w="med" len="med"/>
+                      <a:tailEnd type="none" w="med" len="med"/>
+                    </a:lnB>
+                    <a:solidFill>
+                      <a:srgbClr val="FDEFE8"/>
+                    </a:solidFill>
+                  </a:tcPr>
+                </a:tc>
+                <a:tc>
+                  <a:txBody>
+                    <a:bodyPr/>
+                    <a:lstStyle/>
+                    <a:p>
+                      <a:pPr indent="0" marL="0">
+                        <a:buNone/>
+                      </a:pPr>
+                      <a:r>
+                        <a:rPr lang="en-US" sz="1150" dirty="0">
+                          <a:solidFill>
+                            <a:srgbClr val="16262E"/>
+                          </a:solidFill>
+                          <a:latin typeface="Calibri" pitchFamily="34" charset="0"/>
+                          <a:ea typeface="Calibri" pitchFamily="34" charset="-122"/>
+                          <a:cs typeface="Calibri" pitchFamily="34" charset="-120"/>
+                        </a:rPr>
+                        <a:t>비율로 줄이되 한계 인정, 체형 다양한 참가자 확보</a:t>
+                      </a:r>
+                      <a:endParaRPr lang="en-US" sz="1150" dirty="0">
+                        <a:latin typeface="Calibri" charset="0"/>
+                        <a:ea typeface="Calibri" charset="0"/>
+                        <a:cs typeface="Calibri" charset="0"/>
+                      </a:endParaRPr>
+                    </a:p>
+                  </a:txBody>
+                  <a:tcPr marL="91440" marR="91440" marT="45720" marB="45720" anchor="ctr">
+                    <a:lnL w="19050" cap="flat" cmpd="sng" algn="ctr">
+                      <a:solidFill>
+                        <a:srgbClr val="0B1A26"/>
+                      </a:solidFill>
+                      <a:prstDash val="solid"/>
+                      <a:round/>
+                      <a:headEnd type="none" w="med" len="med"/>
+                      <a:tailEnd type="none" w="med" len="med"/>
+                    </a:lnL>
+                    <a:lnR w="19050" cap="flat" cmpd="sng" algn="ctr">
+                      <a:solidFill>
+                        <a:srgbClr val="0B1A26"/>
+                      </a:solidFill>
+                      <a:prstDash val="solid"/>
+                      <a:round/>
+                      <a:headEnd type="none" w="med" len="med"/>
+                      <a:tailEnd type="none" w="med" len="med"/>
+                    </a:lnR>
+                    <a:lnT w="19050" cap="flat" cmpd="sng" algn="ctr">
+                      <a:solidFill>
+                        <a:srgbClr val="0B1A26"/>
+                      </a:solidFill>
+                      <a:prstDash val="solid"/>
+                      <a:round/>
+                      <a:headEnd type="none" w="med" len="med"/>
+                      <a:tailEnd type="none" w="med" len="med"/>
+                    </a:lnT>
+                    <a:lnB w="19050" cap="flat" cmpd="sng" algn="ctr">
+                      <a:solidFill>
+                        <a:srgbClr val="0B1A26"/>
+                      </a:solidFill>
+                      <a:prstDash val="solid"/>
+                      <a:round/>
+                      <a:headEnd type="none" w="med" len="med"/>
+                      <a:tailEnd type="none" w="med" len="med"/>
+                    </a:lnB>
+                    <a:solidFill>
+                      <a:srgbClr val="FFFFFF"/>
+                    </a:solidFill>
+                  </a:tcPr>
+                </a:tc>
+              </a:tr>
+              <a:tr h="566928">
+                <a:tc>
+                  <a:txBody>
+                    <a:bodyPr/>
+                    <a:lstStyle/>
+                    <a:p>
+                      <a:pPr indent="0" marL="0">
+                        <a:buNone/>
+                      </a:pPr>
+                      <a:r>
+                        <a:rPr lang="en-US" sz="1150" dirty="0">
+                          <a:solidFill>
+                            <a:srgbClr val="16262E"/>
+                          </a:solidFill>
+                          <a:latin typeface="Calibri" pitchFamily="34" charset="0"/>
+                          <a:ea typeface="Calibri" pitchFamily="34" charset="-122"/>
+                          <a:cs typeface="Calibri" pitchFamily="34" charset="-120"/>
+                        </a:rPr>
+                        <a:t>거북목, 허리받침에서 엉덩이가 뜬 자세</a:t>
+                      </a:r>
+                      <a:endParaRPr lang="en-US" sz="1150" dirty="0">
+                        <a:latin typeface="Calibri" charset="0"/>
+                        <a:ea typeface="Calibri" charset="0"/>
+                        <a:cs typeface="Calibri" charset="0"/>
+                      </a:endParaRPr>
+                    </a:p>
+                  </a:txBody>
+                  <a:tcPr marL="91440" marR="91440" marT="45720" marB="45720" anchor="ctr">
+                    <a:lnL w="19050" cap="flat" cmpd="sng" algn="ctr">
+                      <a:solidFill>
+                        <a:srgbClr val="0B1A26"/>
+                      </a:solidFill>
+                      <a:prstDash val="solid"/>
+                      <a:round/>
+                      <a:headEnd type="none" w="med" len="med"/>
+                      <a:tailEnd type="none" w="med" len="med"/>
+                    </a:lnL>
+                    <a:lnR w="19050" cap="flat" cmpd="sng" algn="ctr">
+                      <a:solidFill>
+                        <a:srgbClr val="0B1A26"/>
+                      </a:solidFill>
+                      <a:prstDash val="solid"/>
+                      <a:round/>
+                      <a:headEnd type="none" w="med" len="med"/>
+                      <a:tailEnd type="none" w="med" len="med"/>
+                    </a:lnR>
+                    <a:lnT w="19050" cap="flat" cmpd="sng" algn="ctr">
+                      <a:solidFill>
+                        <a:srgbClr val="0B1A26"/>
+                      </a:solidFill>
+                      <a:prstDash val="solid"/>
+                      <a:round/>
+                      <a:headEnd type="none" w="med" len="med"/>
+                      <a:tailEnd type="none" w="med" len="med"/>
+                    </a:lnT>
+                    <a:lnB w="19050" cap="flat" cmpd="sng" algn="ctr">
+                      <a:solidFill>
+                        <a:srgbClr val="0B1A26"/>
+                      </a:solidFill>
+                      <a:prstDash val="solid"/>
+                      <a:round/>
+                      <a:headEnd type="none" w="med" len="med"/>
+                      <a:tailEnd type="none" w="med" len="med"/>
+                    </a:lnB>
+                    <a:solidFill>
+                      <a:srgbClr val="FFFFFF"/>
+                    </a:solidFill>
+                  </a:tcPr>
+                </a:tc>
+                <a:tc>
+                  <a:txBody>
+                    <a:bodyPr/>
+                    <a:lstStyle/>
+                    <a:p>
+                      <a:pPr indent="0" marL="0">
+                        <a:buNone/>
+                      </a:pPr>
+                      <a:r>
+                        <a:rPr lang="en-US" sz="1150" b="1" dirty="0">
+                          <a:solidFill>
+                            <a:srgbClr val="9A3F1F"/>
+                          </a:solidFill>
+                          <a:latin typeface="Calibri" pitchFamily="34" charset="0"/>
+                          <a:ea typeface="Calibri" pitchFamily="34" charset="-122"/>
+                          <a:cs typeface="Calibri" pitchFamily="34" charset="-120"/>
+                        </a:rPr>
+                        <a:t>설계함</a:t>
+                      </a:r>
+                      <a:endParaRPr lang="en-US" sz="1150" dirty="0">
+                        <a:latin typeface="Calibri" charset="0"/>
+                        <a:ea typeface="Calibri" charset="0"/>
+                        <a:cs typeface="Calibri" charset="0"/>
+                      </a:endParaRPr>
+                    </a:p>
+                  </a:txBody>
+                  <a:tcPr marL="91440" marR="91440" marT="45720" marB="45720" anchor="ctr">
+                    <a:lnL w="19050" cap="flat" cmpd="sng" algn="ctr">
+                      <a:solidFill>
+                        <a:srgbClr val="0B1A26"/>
+                      </a:solidFill>
+                      <a:prstDash val="solid"/>
+                      <a:round/>
+                      <a:headEnd type="none" w="med" len="med"/>
+                      <a:tailEnd type="none" w="med" len="med"/>
+                    </a:lnL>
+                    <a:lnR w="19050" cap="flat" cmpd="sng" algn="ctr">
+                      <a:solidFill>
+                        <a:srgbClr val="0B1A26"/>
+                      </a:solidFill>
+                      <a:prstDash val="solid"/>
+                      <a:round/>
+                      <a:headEnd type="none" w="med" len="med"/>
+                      <a:tailEnd type="none" w="med" len="med"/>
+                    </a:lnR>
+                    <a:lnT w="19050" cap="flat" cmpd="sng" algn="ctr">
+                      <a:solidFill>
+                        <a:srgbClr val="0B1A26"/>
+                      </a:solidFill>
+                      <a:prstDash val="solid"/>
+                      <a:round/>
+                      <a:headEnd type="none" w="med" len="med"/>
+                      <a:tailEnd type="none" w="med" len="med"/>
+                    </a:lnT>
+                    <a:lnB w="19050" cap="flat" cmpd="sng" algn="ctr">
+                      <a:solidFill>
+                        <a:srgbClr val="0B1A26"/>
+                      </a:solidFill>
+                      <a:prstDash val="solid"/>
+                      <a:round/>
+                      <a:headEnd type="none" w="med" len="med"/>
+                      <a:tailEnd type="none" w="med" len="med"/>
+                    </a:lnB>
+                    <a:solidFill>
+                      <a:srgbClr val="FDEFE8"/>
+                    </a:solidFill>
+                  </a:tcPr>
+                </a:tc>
+                <a:tc>
+                  <a:txBody>
+                    <a:bodyPr/>
+                    <a:lstStyle/>
+                    <a:p>
+                      <a:pPr indent="0" marL="0">
+                        <a:buNone/>
+                      </a:pPr>
+                      <a:r>
+                        <a:rPr lang="en-US" sz="1150" dirty="0">
+                          <a:solidFill>
+                            <a:srgbClr val="16262E"/>
+                          </a:solidFill>
+                          <a:latin typeface="Calibri" pitchFamily="34" charset="0"/>
+                          <a:ea typeface="Calibri" pitchFamily="34" charset="-122"/>
+                          <a:cs typeface="Calibri" pitchFamily="34" charset="-120"/>
+                        </a:rPr>
+                        <a:t>head_forward_ratio, torso_pitch로 측정 — 클래스 정의는 6주차 논의</a:t>
+                      </a:r>
+                      <a:endParaRPr lang="en-US" sz="1150" dirty="0">
+                        <a:latin typeface="Calibri" charset="0"/>
+                        <a:ea typeface="Calibri" charset="0"/>
+                        <a:cs typeface="Calibri" charset="0"/>
+                      </a:endParaRPr>
+                    </a:p>
+                  </a:txBody>
+                  <a:tcPr marL="91440" marR="91440" marT="45720" marB="45720" anchor="ctr">
+                    <a:lnL w="19050" cap="flat" cmpd="sng" algn="ctr">
+                      <a:solidFill>
+                        <a:srgbClr val="0B1A26"/>
+                      </a:solidFill>
+                      <a:prstDash val="solid"/>
+                      <a:round/>
+                      <a:headEnd type="none" w="med" len="med"/>
+                      <a:tailEnd type="none" w="med" len="med"/>
+                    </a:lnL>
+                    <a:lnR w="19050" cap="flat" cmpd="sng" algn="ctr">
+                      <a:solidFill>
+                        <a:srgbClr val="0B1A26"/>
+                      </a:solidFill>
+                      <a:prstDash val="solid"/>
+                      <a:round/>
+                      <a:headEnd type="none" w="med" len="med"/>
+                      <a:tailEnd type="none" w="med" len="med"/>
+                    </a:lnR>
+                    <a:lnT w="19050" cap="flat" cmpd="sng" algn="ctr">
+                      <a:solidFill>
+                        <a:srgbClr val="0B1A26"/>
+                      </a:solidFill>
+                      <a:prstDash val="solid"/>
+                      <a:round/>
+                      <a:headEnd type="none" w="med" len="med"/>
+                      <a:tailEnd type="none" w="med" len="med"/>
+                    </a:lnT>
+                    <a:lnB w="19050" cap="flat" cmpd="sng" algn="ctr">
+                      <a:solidFill>
+                        <a:srgbClr val="0B1A26"/>
+                      </a:solidFill>
+                      <a:prstDash val="solid"/>
+                      <a:round/>
+                      <a:headEnd type="none" w="med" len="med"/>
+                      <a:tailEnd type="none" w="med" len="med"/>
+                    </a:lnB>
+                    <a:solidFill>
+                      <a:srgbClr val="FFFFFF"/>
+                    </a:solidFill>
+                  </a:tcPr>
+                </a:tc>
+              </a:tr>
+              <a:tr h="566928">
+                <a:tc>
+                  <a:txBody>
+                    <a:bodyPr/>
+                    <a:lstStyle/>
+                    <a:p>
+                      <a:pPr indent="0" marL="0">
+                        <a:buNone/>
+                      </a:pPr>
+                      <a:r>
+                        <a:rPr lang="en-US" sz="1150" dirty="0">
+                          <a:solidFill>
+                            <a:srgbClr val="16262E"/>
+                          </a:solidFill>
+                          <a:latin typeface="Calibri" pitchFamily="34" charset="0"/>
+                          <a:ea typeface="Calibri" pitchFamily="34" charset="-122"/>
+                          <a:cs typeface="Calibri" pitchFamily="34" charset="-120"/>
+                        </a:rPr>
+                        <a:t>팔 위치·책상 높이 고려</a:t>
+                      </a:r>
+                      <a:endParaRPr lang="en-US" sz="1150" dirty="0">
+                        <a:latin typeface="Calibri" charset="0"/>
+                        <a:ea typeface="Calibri" charset="0"/>
+                        <a:cs typeface="Calibri" charset="0"/>
+                      </a:endParaRPr>
+                    </a:p>
+                  </a:txBody>
+                  <a:tcPr marL="91440" marR="91440" marT="45720" marB="45720" anchor="ctr">
+                    <a:lnL w="19050" cap="flat" cmpd="sng" algn="ctr">
+                      <a:solidFill>
+                        <a:srgbClr val="0B1A26"/>
+                      </a:solidFill>
+                      <a:prstDash val="solid"/>
+                      <a:round/>
+                      <a:headEnd type="none" w="med" len="med"/>
+                      <a:tailEnd type="none" w="med" len="med"/>
+                    </a:lnL>
+                    <a:lnR w="19050" cap="flat" cmpd="sng" algn="ctr">
+                      <a:solidFill>
+                        <a:srgbClr val="0B1A26"/>
+                      </a:solidFill>
+                      <a:prstDash val="solid"/>
+                      <a:round/>
+                      <a:headEnd type="none" w="med" len="med"/>
+                      <a:tailEnd type="none" w="med" len="med"/>
+                    </a:lnR>
+                    <a:lnT w="19050" cap="flat" cmpd="sng" algn="ctr">
+                      <a:solidFill>
+                        <a:srgbClr val="0B1A26"/>
+                      </a:solidFill>
+                      <a:prstDash val="solid"/>
+                      <a:round/>
+                      <a:headEnd type="none" w="med" len="med"/>
+                      <a:tailEnd type="none" w="med" len="med"/>
+                    </a:lnT>
+                    <a:lnB w="19050" cap="flat" cmpd="sng" algn="ctr">
+                      <a:solidFill>
+                        <a:srgbClr val="0B1A26"/>
+                      </a:solidFill>
+                      <a:prstDash val="solid"/>
+                      <a:round/>
+                      <a:headEnd type="none" w="med" len="med"/>
+                      <a:tailEnd type="none" w="med" len="med"/>
+                    </a:lnB>
+                    <a:solidFill>
+                      <a:srgbClr val="FFFFFF"/>
+                    </a:solidFill>
+                  </a:tcPr>
+                </a:tc>
+                <a:tc>
+                  <a:txBody>
+                    <a:bodyPr/>
+                    <a:lstStyle/>
+                    <a:p>
+                      <a:pPr indent="0" marL="0">
+                        <a:buNone/>
+                      </a:pPr>
+                      <a:r>
+                        <a:rPr lang="en-US" sz="1150" b="1" dirty="0">
+                          <a:solidFill>
+                            <a:srgbClr val="9A3F1F"/>
+                          </a:solidFill>
+                          <a:latin typeface="Calibri" pitchFamily="34" charset="0"/>
+                          <a:ea typeface="Calibri" pitchFamily="34" charset="-122"/>
+                          <a:cs typeface="Calibri" pitchFamily="34" charset="-120"/>
+                        </a:rPr>
+                        <a:t>미착수</a:t>
+                      </a:r>
+                      <a:endParaRPr lang="en-US" sz="1150" dirty="0">
+                        <a:latin typeface="Calibri" charset="0"/>
+                        <a:ea typeface="Calibri" charset="0"/>
+                        <a:cs typeface="Calibri" charset="0"/>
+                      </a:endParaRPr>
+                    </a:p>
+                  </a:txBody>
+                  <a:tcPr marL="91440" marR="91440" marT="45720" marB="45720" anchor="ctr">
+                    <a:lnL w="19050" cap="flat" cmpd="sng" algn="ctr">
+                      <a:solidFill>
+                        <a:srgbClr val="0B1A26"/>
+                      </a:solidFill>
+                      <a:prstDash val="solid"/>
+                      <a:round/>
+                      <a:headEnd type="none" w="med" len="med"/>
+                      <a:tailEnd type="none" w="med" len="med"/>
+                    </a:lnL>
+                    <a:lnR w="19050" cap="flat" cmpd="sng" algn="ctr">
+                      <a:solidFill>
+                        <a:srgbClr val="0B1A26"/>
+                      </a:solidFill>
+                      <a:prstDash val="solid"/>
+                      <a:round/>
+                      <a:headEnd type="none" w="med" len="med"/>
+                      <a:tailEnd type="none" w="med" len="med"/>
+                    </a:lnR>
+                    <a:lnT w="19050" cap="flat" cmpd="sng" algn="ctr">
+                      <a:solidFill>
+                        <a:srgbClr val="0B1A26"/>
+                      </a:solidFill>
+                      <a:prstDash val="solid"/>
+                      <a:round/>
+                      <a:headEnd type="none" w="med" len="med"/>
+                      <a:tailEnd type="none" w="med" len="med"/>
+                    </a:lnT>
+                    <a:lnB w="19050" cap="flat" cmpd="sng" algn="ctr">
+                      <a:solidFill>
+                        <a:srgbClr val="0B1A26"/>
+                      </a:solidFill>
+                      <a:prstDash val="solid"/>
+                      <a:round/>
+                      <a:headEnd type="none" w="med" len="med"/>
+                      <a:tailEnd type="none" w="med" len="med"/>
+                    </a:lnB>
+                    <a:solidFill>
+                      <a:srgbClr val="FDEFE8"/>
+                    </a:solidFill>
+                  </a:tcPr>
+                </a:tc>
+                <a:tc>
+                  <a:txBody>
+                    <a:bodyPr/>
+                    <a:lstStyle/>
+                    <a:p>
+                      <a:pPr indent="0" marL="0">
+                        <a:buNone/>
+                      </a:pPr>
+                      <a:r>
+                        <a:rPr lang="en-US" sz="1150" dirty="0">
+                          <a:solidFill>
+                            <a:srgbClr val="16262E"/>
+                          </a:solidFill>
+                          <a:latin typeface="Calibri" pitchFamily="34" charset="0"/>
+                          <a:ea typeface="Calibri" pitchFamily="34" charset="-122"/>
+                          <a:cs typeface="Calibri" pitchFamily="34" charset="-120"/>
+                        </a:rPr>
+                        <a:t>어깨-팔꿈치-손목 keypoint로 6주차 이후 검토</a:t>
+                      </a:r>
+                      <a:endParaRPr lang="en-US" sz="1150" dirty="0">
+                        <a:latin typeface="Calibri" charset="0"/>
+                        <a:ea typeface="Calibri" charset="0"/>
+                        <a:cs typeface="Calibri" charset="0"/>
+                      </a:endParaRPr>
+                    </a:p>
+                  </a:txBody>
+                  <a:tcPr marL="91440" marR="91440" marT="45720" marB="45720" anchor="ctr">
+                    <a:lnL w="19050" cap="flat" cmpd="sng" algn="ctr">
+                      <a:solidFill>
+                        <a:srgbClr val="0B1A26"/>
+                      </a:solidFill>
+                      <a:prstDash val="solid"/>
+                      <a:round/>
+                      <a:headEnd type="none" w="med" len="med"/>
+                      <a:tailEnd type="none" w="med" len="med"/>
+                    </a:lnL>
+                    <a:lnR w="19050" cap="flat" cmpd="sng" algn="ctr">
+                      <a:solidFill>
+                        <a:srgbClr val="0B1A26"/>
+                      </a:solidFill>
+                      <a:prstDash val="solid"/>
+                      <a:round/>
+                      <a:headEnd type="none" w="med" len="med"/>
+                      <a:tailEnd type="none" w="med" len="med"/>
+                    </a:lnR>
+                    <a:lnT w="19050" cap="flat" cmpd="sng" algn="ctr">
+                      <a:solidFill>
+                        <a:srgbClr val="0B1A26"/>
+                      </a:solidFill>
+                      <a:prstDash val="solid"/>
+                      <a:round/>
+                      <a:headEnd type="none" w="med" len="med"/>
+                      <a:tailEnd type="none" w="med" len="med"/>
+                    </a:lnT>
+                    <a:lnB w="19050" cap="flat" cmpd="sng" algn="ctr">
+                      <a:solidFill>
+                        <a:srgbClr val="0B1A26"/>
+                      </a:solidFill>
+                      <a:prstDash val="solid"/>
+                      <a:round/>
+                      <a:headEnd type="none" w="med" len="med"/>
+                      <a:tailEnd type="none" w="med" len="med"/>
+                    </a:lnB>
+                    <a:solidFill>
+                      <a:srgbClr val="FFFFFF"/>
+                    </a:solidFill>
+                  </a:tcPr>
+                </a:tc>
+              </a:tr>
+            </a:tbl>
+          </a:graphicData>
+        </a:graphic>
+      </p:graphicFrame>
+      <p:sp>
+        <p:nvSpPr>
+          <p:cNvPr id="5" name="Text 2"/>
+          <p:cNvSpPr txBox="1"/>
+          <p:nvPr/>
+        </p:nvSpPr>
+        <p:spPr>
+          <a:xfrm>
+            <a:off x="11365992" y="6355080"/>
+            <a:ext cx="548640" cy="320040"/>
+          </a:xfrm>
+          <a:prstGeom prst="rect">
+            <a:avLst/>
+          </a:prstGeom>
+          <a:noFill/>
+          <a:ln/>
+        </p:spPr>
+        <p:txBody>
+          <a:bodyPr wrap="square" lIns="0" tIns="0" rIns="0" bIns="0" rtlCol="0" anchor="ctr"/>
+          <a:lstStyle/>
+          <a:p>
+            <a:pPr algn="r" indent="0" marL="0">
+              <a:buNone/>
+            </a:pPr>
+            <a:r>
+              <a:rPr lang="en-US" sz="1100" dirty="0">
+                <a:solidFill>
+                  <a:srgbClr val="9FB6BC"/>
+                </a:solidFill>
+                <a:latin typeface="Calibri" pitchFamily="34" charset="0"/>
+                <a:ea typeface="Calibri" pitchFamily="34" charset="-122"/>
+                <a:cs typeface="Calibri" pitchFamily="34" charset="-120"/>
+              </a:rPr>
+              <a:t>10</a:t>
+            </a:r>
+            <a:endParaRPr lang="en-US" sz="1100" dirty="0"/>
+          </a:p>
+        </p:txBody>
+      </p:sp>
+    </p:spTree>
+  </p:cSld>
+  <p:clrMapOvr>
+    <a:masterClrMapping/>
+  </p:clrMapOvr>
+</p:sld>
+</file>
+
+<file path=ppt/slides/slide11.xml><?xml version="1.0" encoding="utf-8"?>
+<p:sld xmlns:a="http://schemas.openxmlformats.org/drawingml/2006/main" xmlns:r="http://schemas.openxmlformats.org/officeDocument/2006/relationships" xmlns:p="http://schemas.openxmlformats.org/presentationml/2006/main">
+  <p:cSld name="Slide 11">
+    <p:bg>
+      <p:bgPr>
+        <a:blipFill dpi="0" rotWithShape="1">
+          <a:blip r:embed="rId1">
+            <a:lum/>
+          </a:blip>
+          <a:srcRect/>
+          <a:stretch>
+            <a:fillRect/>
+          </a:stretch>
+        </a:blipFill>
+        <a:effectLst/>
+      </p:bgPr>
+    </p:bg>
+    <p:spTree>
+      <p:nvGrpSpPr>
+        <p:cNvPr id="1" name=""/>
+        <p:cNvGrpSpPr/>
+        <p:nvPr/>
+      </p:nvGrpSpPr>
+      <p:grpSpPr>
+        <a:xfrm>
+          <a:off x="0" y="0"/>
+          <a:ext cx="0" cy="0"/>
+          <a:chOff x="0" y="0"/>
+          <a:chExt cx="0" cy="0"/>
+        </a:xfrm>
+      </p:grpSpPr>
+      <p:sp>
+        <p:nvSpPr>
+          <p:cNvPr id="2" name="Text 0"/>
+          <p:cNvSpPr txBox="1"/>
+          <p:nvPr/>
+        </p:nvSpPr>
+        <p:spPr>
+          <a:xfrm>
+            <a:off x="640080" y="384048"/>
+            <a:ext cx="8229600" cy="320040"/>
+          </a:xfrm>
+          <a:prstGeom prst="rect">
+            <a:avLst/>
+          </a:prstGeom>
+          <a:noFill/>
+          <a:ln/>
+        </p:spPr>
+        <p:txBody>
+          <a:bodyPr wrap="square" lIns="0" tIns="0" rIns="0" bIns="0" rtlCol="0" anchor="ctr"/>
+          <a:lstStyle/>
+          <a:p>
+            <a:pPr indent="0" marL="0">
+              <a:buNone/>
+            </a:pPr>
+            <a:r>
+              <a:rPr lang="en-US" sz="1200" b="1" spc="200" kern="0" dirty="0">
+                <a:solidFill>
+                  <a:srgbClr val="2FE0C4"/>
+                </a:solidFill>
+                <a:latin typeface="Calibri" pitchFamily="34" charset="0"/>
+                <a:ea typeface="Calibri" pitchFamily="34" charset="-122"/>
+                <a:cs typeface="Calibri" pitchFamily="34" charset="-120"/>
+              </a:rPr>
               <a:t>ABSOLUTE POSTURE DESIGN</a:t>
             </a:r>
             <a:endParaRPr lang="en-US" sz="1200" dirty="0"/>
@@ -3098,7 +5022,7 @@
       </p:sp>
       <p:graphicFrame>
         <p:nvGraphicFramePr>
-          <p:cNvPr id="11" name="Table 0"/>
+          <p:cNvPr id="12" name="Table 0"/>
           <p:cNvGraphicFramePr>
             <a:graphicFrameLocks noGrp="1"/>
           </p:cNvGraphicFramePr>
@@ -4332,661 +6256,6 @@
                 <a:ea typeface="Calibri" pitchFamily="34" charset="-122"/>
                 <a:cs typeface="Calibri" pitchFamily="34" charset="-120"/>
               </a:rPr>
-              <a:t>10</a:t>
-            </a:r>
-            <a:endParaRPr lang="en-US" sz="1100" dirty="0"/>
-          </a:p>
-        </p:txBody>
-      </p:sp>
-    </p:spTree>
-  </p:cSld>
-  <p:clrMapOvr>
-    <a:masterClrMapping/>
-  </p:clrMapOvr>
-</p:sld>
-</file>
-
-<file path=ppt/slides/slide11.xml><?xml version="1.0" encoding="utf-8"?>
-<p:sld xmlns:a="http://schemas.openxmlformats.org/drawingml/2006/main" xmlns:r="http://schemas.openxmlformats.org/officeDocument/2006/relationships" xmlns:p="http://schemas.openxmlformats.org/presentationml/2006/main">
-  <p:cSld name="Slide 11">
-    <p:bg>
-      <p:bgPr>
-        <a:blipFill dpi="0" rotWithShape="1">
-          <a:blip r:embed="rId1">
-            <a:lum/>
-          </a:blip>
-          <a:srcRect/>
-          <a:stretch>
-            <a:fillRect/>
-          </a:stretch>
-        </a:blipFill>
-        <a:effectLst/>
-      </p:bgPr>
-    </p:bg>
-    <p:spTree>
-      <p:nvGrpSpPr>
-        <p:cNvPr id="1" name=""/>
-        <p:cNvGrpSpPr/>
-        <p:nvPr/>
-      </p:nvGrpSpPr>
-      <p:grpSpPr>
-        <a:xfrm>
-          <a:off x="0" y="0"/>
-          <a:ext cx="0" cy="0"/>
-          <a:chOff x="0" y="0"/>
-          <a:chExt cx="0" cy="0"/>
-        </a:xfrm>
-      </p:grpSpPr>
-      <p:sp>
-        <p:nvSpPr>
-          <p:cNvPr id="2" name="Text 0"/>
-          <p:cNvSpPr txBox="1"/>
-          <p:nvPr/>
-        </p:nvSpPr>
-        <p:spPr>
-          <a:xfrm>
-            <a:off x="640080" y="384048"/>
-            <a:ext cx="8229600" cy="320040"/>
-          </a:xfrm>
-          <a:prstGeom prst="rect">
-            <a:avLst/>
-          </a:prstGeom>
-          <a:noFill/>
-          <a:ln/>
-        </p:spPr>
-        <p:txBody>
-          <a:bodyPr wrap="square" lIns="0" tIns="0" rIns="0" bIns="0" rtlCol="0" anchor="ctr"/>
-          <a:lstStyle/>
-          <a:p>
-            <a:pPr indent="0" marL="0">
-              <a:buNone/>
-            </a:pPr>
-            <a:r>
-              <a:rPr lang="en-US" sz="1200" b="1" spc="200" kern="0" dirty="0">
-                <a:solidFill>
-                  <a:srgbClr val="2FE0C4"/>
-                </a:solidFill>
-                <a:latin typeface="Calibri" pitchFamily="34" charset="0"/>
-                <a:ea typeface="Calibri" pitchFamily="34" charset="-122"/>
-                <a:cs typeface="Calibri" pitchFamily="34" charset="-120"/>
-              </a:rPr>
-              <a:t>PRIOR WORK</a:t>
-            </a:r>
-            <a:endParaRPr lang="en-US" sz="1200" dirty="0"/>
-          </a:p>
-        </p:txBody>
-      </p:sp>
-      <p:sp>
-        <p:nvSpPr>
-          <p:cNvPr id="3" name="Text 1"/>
-          <p:cNvSpPr txBox="1"/>
-          <p:nvPr/>
-        </p:nvSpPr>
-        <p:spPr>
-          <a:xfrm>
-            <a:off x="640080" y="685800"/>
-            <a:ext cx="10881360" cy="822960"/>
-          </a:xfrm>
-          <a:prstGeom prst="rect">
-            <a:avLst/>
-          </a:prstGeom>
-          <a:noFill/>
-          <a:ln/>
-        </p:spPr>
-        <p:txBody>
-          <a:bodyPr wrap="square" lIns="0" tIns="0" rIns="0" bIns="0" rtlCol="0" anchor="ctr"/>
-          <a:lstStyle/>
-          <a:p>
-            <a:pPr indent="0" marL="0">
-              <a:buNone/>
-            </a:pPr>
-            <a:r>
-              <a:rPr lang="en-US" sz="2700" b="1" dirty="0">
-                <a:solidFill>
-                  <a:srgbClr val="EAF3F1"/>
-                </a:solidFill>
-                <a:latin typeface="Arial" pitchFamily="34" charset="0"/>
-                <a:ea typeface="Arial" pitchFamily="34" charset="-122"/>
-                <a:cs typeface="Arial" pitchFamily="34" charset="-120"/>
-              </a:rPr>
-              <a:t>선행연구로 본 근거와 한계</a:t>
-            </a:r>
-            <a:endParaRPr lang="en-US" sz="2700" dirty="0"/>
-          </a:p>
-        </p:txBody>
-      </p:sp>
-      <p:sp>
-        <p:nvSpPr>
-          <p:cNvPr id="4" name="Shape 2"/>
-          <p:cNvSpPr/>
-          <p:nvPr/>
-        </p:nvSpPr>
-        <p:spPr>
-          <a:xfrm>
-            <a:off x="640080" y="1691640"/>
-            <a:ext cx="5349240" cy="3657600"/>
-          </a:xfrm>
-          <a:prstGeom prst="roundRect">
-            <a:avLst>
-              <a:gd name="adj" fmla="val 3000"/>
-            </a:avLst>
-          </a:prstGeom>
-          <a:solidFill>
-            <a:srgbClr val="FFFFFF"/>
-          </a:solidFill>
-          <a:ln/>
-        </p:spPr>
-      </p:sp>
-      <p:sp>
-        <p:nvSpPr>
-          <p:cNvPr id="5" name="Shape 3"/>
-          <p:cNvSpPr/>
-          <p:nvPr/>
-        </p:nvSpPr>
-        <p:spPr>
-          <a:xfrm>
-            <a:off x="896112" y="1920240"/>
-            <a:ext cx="548640" cy="548640"/>
-          </a:xfrm>
-          <a:prstGeom prst="ellipse">
-            <a:avLst/>
-          </a:prstGeom>
-          <a:solidFill>
-            <a:srgbClr val="12655A"/>
-          </a:solidFill>
-          <a:ln/>
-        </p:spPr>
-      </p:sp>
-      <p:pic>
-        <p:nvPicPr>
-          <p:cNvPr id="6" name="Image 0" descr="preencoded.png">    </p:cNvPr>
-          <p:cNvPicPr>
-            <a:picLocks noChangeAspect="1"/>
-          </p:cNvPicPr>
-          <p:nvPr/>
-        </p:nvPicPr>
-        <p:blipFill>
-          <a:blip r:embed="rId2"/>
-          <a:stretch>
-            <a:fillRect/>
-          </a:stretch>
-        </p:blipFill>
-        <p:spPr>
-          <a:xfrm>
-            <a:off x="1038758" y="2062886"/>
-            <a:ext cx="263347" cy="263347"/>
-          </a:xfrm>
-          <a:prstGeom prst="rect">
-            <a:avLst/>
-          </a:prstGeom>
-        </p:spPr>
-      </p:pic>
-      <p:sp>
-        <p:nvSpPr>
-          <p:cNvPr id="7" name="Text 4"/>
-          <p:cNvSpPr txBox="1"/>
-          <p:nvPr/>
-        </p:nvSpPr>
-        <p:spPr>
-          <a:xfrm>
-            <a:off x="1600200" y="1920240"/>
-            <a:ext cx="4160520" cy="548640"/>
-          </a:xfrm>
-          <a:prstGeom prst="rect">
-            <a:avLst/>
-          </a:prstGeom>
-          <a:noFill/>
-          <a:ln/>
-        </p:spPr>
-        <p:txBody>
-          <a:bodyPr wrap="square" lIns="0" tIns="0" rIns="0" bIns="0" rtlCol="0" anchor="ctr"/>
-          <a:lstStyle/>
-          <a:p>
-            <a:pPr indent="0" marL="0">
-              <a:buNone/>
-            </a:pPr>
-            <a:r>
-              <a:rPr lang="en-US" sz="1450" b="1" dirty="0">
-                <a:solidFill>
-                  <a:srgbClr val="16262E"/>
-                </a:solidFill>
-                <a:latin typeface="Arial" pitchFamily="34" charset="0"/>
-                <a:ea typeface="Arial" pitchFamily="34" charset="-122"/>
-                <a:cs typeface="Arial" pitchFamily="34" charset="-120"/>
-              </a:rPr>
-              <a:t>Manghisi 외 (2017) · Kinect v2 K2RULA</a:t>
-            </a:r>
-            <a:endParaRPr lang="en-US" sz="1450" dirty="0"/>
-          </a:p>
-        </p:txBody>
-      </p:sp>
-      <p:sp>
-        <p:nvSpPr>
-          <p:cNvPr id="8" name="Text 5"/>
-          <p:cNvSpPr txBox="1"/>
-          <p:nvPr/>
-        </p:nvSpPr>
-        <p:spPr>
-          <a:xfrm>
-            <a:off x="914400" y="2651760"/>
-            <a:ext cx="4800600" cy="2560320"/>
-          </a:xfrm>
-          <a:prstGeom prst="rect">
-            <a:avLst/>
-          </a:prstGeom>
-          <a:noFill/>
-          <a:ln/>
-        </p:spPr>
-        <p:txBody>
-          <a:bodyPr wrap="square" lIns="0" tIns="0" rIns="0" bIns="0" rtlCol="0" anchor="t"/>
-          <a:lstStyle/>
-          <a:p>
-            <a:pPr indent="0" marL="0">
-              <a:lnSpc>
-                <a:spcPct val="115000"/>
-              </a:lnSpc>
-              <a:spcAft>
-                <a:spcPts val="700"/>
-              </a:spcAft>
-              <a:buNone/>
-            </a:pPr>
-            <a:r>
-              <a:rPr lang="en-US" sz="1250" dirty="0">
-                <a:solidFill>
-                  <a:srgbClr val="3C4A50"/>
-                </a:solidFill>
-                <a:latin typeface="Calibri" pitchFamily="34" charset="0"/>
-                <a:ea typeface="Calibri" pitchFamily="34" charset="-122"/>
-                <a:cs typeface="Calibri" pitchFamily="34" charset="-120"/>
-              </a:rPr>
-              <a:t>•  깊이 카메라로 RULA를 실시간 계산. 광학 모션캡처와 총점 일치 0.97(κ=0.87), RULA 전문가와 0.96(κ=0.84)</a:t>
-            </a:r>
-            <a:endParaRPr lang="en-US" sz="1250" dirty="0"/>
-          </a:p>
-          <a:p>
-            <a:pPr indent="0" marL="0">
-              <a:lnSpc>
-                <a:spcPct val="115000"/>
-              </a:lnSpc>
-              <a:spcAft>
-                <a:spcPts val="700"/>
-              </a:spcAft>
-              <a:buNone/>
-            </a:pPr>
-            <a:r>
-              <a:rPr lang="en-US" sz="1250" dirty="0">
-                <a:solidFill>
-                  <a:srgbClr val="3C4A50"/>
-                </a:solidFill>
-                <a:latin typeface="Calibri" pitchFamily="34" charset="0"/>
-                <a:ea typeface="Calibri" pitchFamily="34" charset="-122"/>
-                <a:cs typeface="Calibri" pitchFamily="34" charset="-120"/>
-              </a:rPr>
-              <a:t>•  몸통 굽힘을 수직 방향 대비 각도로 계산 → 우리 접근과 같은 계열</a:t>
-            </a:r>
-            <a:endParaRPr lang="en-US" sz="1250" dirty="0"/>
-          </a:p>
-          <a:p>
-            <a:pPr indent="0" marL="0">
-              <a:lnSpc>
-                <a:spcPct val="115000"/>
-              </a:lnSpc>
-              <a:spcAft>
-                <a:spcPts val="700"/>
-              </a:spcAft>
-              <a:buNone/>
-            </a:pPr>
-            <a:r>
-              <a:rPr lang="en-US" sz="1250" dirty="0">
-                <a:solidFill>
-                  <a:srgbClr val="3C4A50"/>
-                </a:solidFill>
-                <a:latin typeface="Calibri" pitchFamily="34" charset="0"/>
-                <a:ea typeface="Calibri" pitchFamily="34" charset="-122"/>
-                <a:cs typeface="Calibri" pitchFamily="34" charset="-120"/>
-              </a:rPr>
-              <a:t>•  RULA는 구간이 넓어 각도 오차 영향이 줄어듦 → 정상/주의/경고 구간 설계의 근거</a:t>
-            </a:r>
-            <a:endParaRPr lang="en-US" sz="1250" dirty="0"/>
-          </a:p>
-          <a:p>
-            <a:pPr indent="0" marL="0">
-              <a:lnSpc>
-                <a:spcPct val="115000"/>
-              </a:lnSpc>
-              <a:spcAft>
-                <a:spcPts val="700"/>
-              </a:spcAft>
-              <a:buNone/>
-            </a:pPr>
-            <a:r>
-              <a:rPr lang="en-US" sz="1250" dirty="0">
-                <a:solidFill>
-                  <a:srgbClr val="3C4A50"/>
-                </a:solidFill>
-                <a:latin typeface="Calibri" pitchFamily="34" charset="0"/>
-                <a:ea typeface="Calibri" pitchFamily="34" charset="-122"/>
-                <a:cs typeface="Calibri" pitchFamily="34" charset="-120"/>
-              </a:rPr>
-              <a:t>•  한계: 배우 1명, 실험실, 가림 없음. 인용된 연구에서 Kinect v2 목 각도 오차 큼 → 거북목 특징 주의</a:t>
-            </a:r>
-            <a:endParaRPr lang="en-US" sz="1250" dirty="0"/>
-          </a:p>
-        </p:txBody>
-      </p:sp>
-      <p:sp>
-        <p:nvSpPr>
-          <p:cNvPr id="9" name="Shape 6"/>
-          <p:cNvSpPr/>
-          <p:nvPr/>
-        </p:nvSpPr>
-        <p:spPr>
-          <a:xfrm>
-            <a:off x="6199632" y="1691640"/>
-            <a:ext cx="5349240" cy="3657600"/>
-          </a:xfrm>
-          <a:prstGeom prst="roundRect">
-            <a:avLst>
-              <a:gd name="adj" fmla="val 3000"/>
-            </a:avLst>
-          </a:prstGeom>
-          <a:solidFill>
-            <a:srgbClr val="FFFFFF"/>
-          </a:solidFill>
-          <a:ln/>
-        </p:spPr>
-      </p:sp>
-      <p:sp>
-        <p:nvSpPr>
-          <p:cNvPr id="10" name="Shape 7"/>
-          <p:cNvSpPr/>
-          <p:nvPr/>
-        </p:nvSpPr>
-        <p:spPr>
-          <a:xfrm>
-            <a:off x="6455664" y="1920240"/>
-            <a:ext cx="548640" cy="548640"/>
-          </a:xfrm>
-          <a:prstGeom prst="ellipse">
-            <a:avLst/>
-          </a:prstGeom>
-          <a:solidFill>
-            <a:srgbClr val="12655A"/>
-          </a:solidFill>
-          <a:ln/>
-        </p:spPr>
-      </p:sp>
-      <p:pic>
-        <p:nvPicPr>
-          <p:cNvPr id="11" name="Image 1" descr="preencoded.png">    </p:cNvPr>
-          <p:cNvPicPr>
-            <a:picLocks noChangeAspect="1"/>
-          </p:cNvPicPr>
-          <p:nvPr/>
-        </p:nvPicPr>
-        <p:blipFill>
-          <a:blip r:embed="rId3"/>
-          <a:stretch>
-            <a:fillRect/>
-          </a:stretch>
-        </p:blipFill>
-        <p:spPr>
-          <a:xfrm>
-            <a:off x="6598310" y="2062886"/>
-            <a:ext cx="263347" cy="263347"/>
-          </a:xfrm>
-          <a:prstGeom prst="rect">
-            <a:avLst/>
-          </a:prstGeom>
-        </p:spPr>
-      </p:pic>
-      <p:sp>
-        <p:nvSpPr>
-          <p:cNvPr id="12" name="Text 8"/>
-          <p:cNvSpPr txBox="1"/>
-          <p:nvPr/>
-        </p:nvSpPr>
-        <p:spPr>
-          <a:xfrm>
-            <a:off x="7159752" y="1920240"/>
-            <a:ext cx="4160520" cy="548640"/>
-          </a:xfrm>
-          <a:prstGeom prst="rect">
-            <a:avLst/>
-          </a:prstGeom>
-          <a:noFill/>
-          <a:ln/>
-        </p:spPr>
-        <p:txBody>
-          <a:bodyPr wrap="square" lIns="0" tIns="0" rIns="0" bIns="0" rtlCol="0" anchor="ctr"/>
-          <a:lstStyle/>
-          <a:p>
-            <a:pPr indent="0" marL="0">
-              <a:buNone/>
-            </a:pPr>
-            <a:r>
-              <a:rPr lang="en-US" sz="1450" b="1" dirty="0">
-                <a:solidFill>
-                  <a:srgbClr val="16262E"/>
-                </a:solidFill>
-                <a:latin typeface="Arial" pitchFamily="34" charset="0"/>
-                <a:ea typeface="Arial" pitchFamily="34" charset="-122"/>
-                <a:cs typeface="Arial" pitchFamily="34" charset="-120"/>
-              </a:rPr>
-              <a:t>Rodrigues 외 (2022) · 3D-AJA</a:t>
-            </a:r>
-            <a:endParaRPr lang="en-US" sz="1450" dirty="0"/>
-          </a:p>
-        </p:txBody>
-      </p:sp>
-      <p:sp>
-        <p:nvSpPr>
-          <p:cNvPr id="13" name="Text 9"/>
-          <p:cNvSpPr txBox="1"/>
-          <p:nvPr/>
-        </p:nvSpPr>
-        <p:spPr>
-          <a:xfrm>
-            <a:off x="6473952" y="2651760"/>
-            <a:ext cx="4800600" cy="2560320"/>
-          </a:xfrm>
-          <a:prstGeom prst="rect">
-            <a:avLst/>
-          </a:prstGeom>
-          <a:noFill/>
-          <a:ln/>
-        </p:spPr>
-        <p:txBody>
-          <a:bodyPr wrap="square" lIns="0" tIns="0" rIns="0" bIns="0" rtlCol="0" anchor="t"/>
-          <a:lstStyle/>
-          <a:p>
-            <a:pPr indent="0" marL="0">
-              <a:lnSpc>
-                <a:spcPct val="115000"/>
-              </a:lnSpc>
-              <a:spcAft>
-                <a:spcPts val="700"/>
-              </a:spcAft>
-              <a:buNone/>
-            </a:pPr>
-            <a:r>
-              <a:rPr lang="en-US" sz="1250" dirty="0">
-                <a:solidFill>
-                  <a:srgbClr val="3C4A50"/>
-                </a:solidFill>
-                <a:latin typeface="Calibri" pitchFamily="34" charset="0"/>
-                <a:ea typeface="Calibri" pitchFamily="34" charset="-122"/>
-                <a:cs typeface="Calibri" pitchFamily="34" charset="-120"/>
-              </a:rPr>
-              <a:t>•  사무직 20명, 6가지 책상 세팅. 각도계 대비 평균 오차 5.6~8.5° (Kinect SDK 8.3~18.2°)</a:t>
-            </a:r>
-            <a:endParaRPr lang="en-US" sz="1250" dirty="0"/>
-          </a:p>
-          <a:p>
-            <a:pPr indent="0" marL="0">
-              <a:lnSpc>
-                <a:spcPct val="115000"/>
-              </a:lnSpc>
-              <a:spcAft>
-                <a:spcPts val="700"/>
-              </a:spcAft>
-              <a:buNone/>
-            </a:pPr>
-            <a:r>
-              <a:rPr lang="en-US" sz="1250" dirty="0">
-                <a:solidFill>
-                  <a:srgbClr val="3C4A50"/>
-                </a:solidFill>
-                <a:latin typeface="Calibri" pitchFamily="34" charset="0"/>
-                <a:ea typeface="Calibri" pitchFamily="34" charset="-122"/>
-                <a:cs typeface="Calibri" pitchFamily="34" charset="-120"/>
-              </a:rPr>
-              <a:t>•  2D keypoint + 깊이로 3D 각도 계산이 SDK 골격보다 정확 → 우리 구성(MoveNet + depth)과 같은 계열</a:t>
-            </a:r>
-            <a:endParaRPr lang="en-US" sz="1250" dirty="0"/>
-          </a:p>
-          <a:p>
-            <a:pPr indent="0" marL="0">
-              <a:lnSpc>
-                <a:spcPct val="115000"/>
-              </a:lnSpc>
-              <a:spcAft>
-                <a:spcPts val="700"/>
-              </a:spcAft>
-              <a:buNone/>
-            </a:pPr>
-            <a:r>
-              <a:rPr lang="en-US" sz="1250" dirty="0">
-                <a:solidFill>
-                  <a:srgbClr val="3C4A50"/>
-                </a:solidFill>
-                <a:latin typeface="Calibri" pitchFamily="34" charset="0"/>
-                <a:ea typeface="Calibri" pitchFamily="34" charset="-122"/>
-                <a:cs typeface="Calibri" pitchFamily="34" charset="-120"/>
-              </a:rPr>
-              <a:t>•  임상 기준(±5°)은 이 논문도 못 넘음 → 우리도 5~8° 수준이 현실적인 기대치</a:t>
-            </a:r>
-            <a:endParaRPr lang="en-US" sz="1250" dirty="0"/>
-          </a:p>
-          <a:p>
-            <a:pPr indent="0" marL="0">
-              <a:lnSpc>
-                <a:spcPct val="115000"/>
-              </a:lnSpc>
-              <a:spcAft>
-                <a:spcPts val="700"/>
-              </a:spcAft>
-              <a:buNone/>
-            </a:pPr>
-            <a:r>
-              <a:rPr lang="en-US" sz="1250" dirty="0">
-                <a:solidFill>
-                  <a:srgbClr val="3C4A50"/>
-                </a:solidFill>
-                <a:latin typeface="Calibri" pitchFamily="34" charset="0"/>
-                <a:ea typeface="Calibri" pitchFamily="34" charset="-122"/>
-                <a:cs typeface="Calibri" pitchFamily="34" charset="-120"/>
-              </a:rPr>
-              <a:t>•  한계: 책상에 가려지면 성능 하락, 체형·성별 차이 분석엔 표본 부족</a:t>
-            </a:r>
-            <a:endParaRPr lang="en-US" sz="1250" dirty="0"/>
-          </a:p>
-        </p:txBody>
-      </p:sp>
-      <p:sp>
-        <p:nvSpPr>
-          <p:cNvPr id="14" name="Shape 10"/>
-          <p:cNvSpPr/>
-          <p:nvPr/>
-        </p:nvSpPr>
-        <p:spPr>
-          <a:xfrm>
-            <a:off x="640080" y="5486400"/>
-            <a:ext cx="10908792" cy="731520"/>
-          </a:xfrm>
-          <a:prstGeom prst="roundRect">
-            <a:avLst>
-              <a:gd name="adj" fmla="val 15000"/>
-            </a:avLst>
-          </a:prstGeom>
-          <a:solidFill>
-            <a:srgbClr val="12655A"/>
-          </a:solidFill>
-          <a:ln/>
-        </p:spPr>
-      </p:sp>
-      <p:sp>
-        <p:nvSpPr>
-          <p:cNvPr id="15" name="Text 11"/>
-          <p:cNvSpPr txBox="1"/>
-          <p:nvPr/>
-        </p:nvSpPr>
-        <p:spPr>
-          <a:xfrm>
-            <a:off x="914400" y="5486400"/>
-            <a:ext cx="10424160" cy="731520"/>
-          </a:xfrm>
-          <a:prstGeom prst="rect">
-            <a:avLst/>
-          </a:prstGeom>
-          <a:noFill/>
-          <a:ln/>
-        </p:spPr>
-        <p:txBody>
-          <a:bodyPr wrap="square" lIns="0" tIns="0" rIns="0" bIns="0" rtlCol="0" anchor="ctr"/>
-          <a:lstStyle/>
-          <a:p>
-            <a:pPr indent="0" marL="0">
-              <a:buNone/>
-            </a:pPr>
-            <a:r>
-              <a:rPr lang="en-US" sz="1250" b="1" dirty="0">
-                <a:solidFill>
-                  <a:srgbClr val="EAF3F1"/>
-                </a:solidFill>
-                <a:latin typeface="Calibri" pitchFamily="34" charset="0"/>
-                <a:ea typeface="Calibri" pitchFamily="34" charset="-122"/>
-                <a:cs typeface="Calibri" pitchFamily="34" charset="-120"/>
-              </a:rPr>
-              <a:t>두 논문 모두 거리 고정·카메라 정면 설치였고, '거리에 불변'과 'IMU로 기울기 보정'은 검증하지 않음 → 이 두 가지는 우리가 직접 실험으로 보일 부분</a:t>
-            </a:r>
-            <a:endParaRPr lang="en-US" sz="1250" dirty="0"/>
-          </a:p>
-        </p:txBody>
-      </p:sp>
-      <p:sp>
-        <p:nvSpPr>
-          <p:cNvPr id="16" name="Text 12"/>
-          <p:cNvSpPr txBox="1"/>
-          <p:nvPr/>
-        </p:nvSpPr>
-        <p:spPr>
-          <a:xfrm>
-            <a:off x="11365992" y="6355080"/>
-            <a:ext cx="548640" cy="320040"/>
-          </a:xfrm>
-          <a:prstGeom prst="rect">
-            <a:avLst/>
-          </a:prstGeom>
-          <a:noFill/>
-          <a:ln/>
-        </p:spPr>
-        <p:txBody>
-          <a:bodyPr wrap="square" lIns="0" tIns="0" rIns="0" bIns="0" rtlCol="0" anchor="ctr"/>
-          <a:lstStyle/>
-          <a:p>
-            <a:pPr algn="r" indent="0" marL="0">
-              <a:buNone/>
-            </a:pPr>
-            <a:r>
-              <a:rPr lang="en-US" sz="1100" dirty="0">
-                <a:solidFill>
-                  <a:srgbClr val="9FB6BC"/>
-                </a:solidFill>
-                <a:latin typeface="Calibri" pitchFamily="34" charset="0"/>
-                <a:ea typeface="Calibri" pitchFamily="34" charset="-122"/>
-                <a:cs typeface="Calibri" pitchFamily="34" charset="-120"/>
-              </a:rPr>
               <a:t>11</a:t>
             </a:r>
             <a:endParaRPr lang="en-US" sz="1100" dirty="0"/>
@@ -5065,7 +6334,7 @@
                 <a:ea typeface="Calibri" pitchFamily="34" charset="-122"/>
                 <a:cs typeface="Calibri" pitchFamily="34" charset="-120"/>
               </a:rPr>
-              <a:t>LIMITS &amp; NEXT</a:t>
+              <a:t>PRIOR WORK</a:t>
             </a:r>
             <a:endParaRPr lang="en-US" sz="1200" dirty="0"/>
           </a:p>
@@ -5104,7 +6373,7 @@
                 <a:ea typeface="Arial" pitchFamily="34" charset="-122"/>
                 <a:cs typeface="Arial" pitchFamily="34" charset="-120"/>
               </a:rPr>
-              <a:t>한계와 카메라 확보 후 할 일</a:t>
+              <a:t>선행연구로 본 근거와 한계</a:t>
             </a:r>
             <a:endParaRPr lang="en-US" sz="2700" dirty="0"/>
           </a:p>
@@ -5119,11 +6388,11 @@
         <p:spPr>
           <a:xfrm>
             <a:off x="640080" y="1691640"/>
-            <a:ext cx="5349240" cy="4434840"/>
+            <a:ext cx="5349240" cy="3657600"/>
           </a:xfrm>
           <a:prstGeom prst="roundRect">
             <a:avLst>
-              <a:gd name="adj" fmla="val 2474"/>
+              <a:gd name="adj" fmla="val 3000"/>
             </a:avLst>
           </a:prstGeom>
           <a:solidFill>
@@ -5209,7 +6478,7 @@
                 <a:ea typeface="Arial" pitchFamily="34" charset="-122"/>
                 <a:cs typeface="Arial" pitchFamily="34" charset="-120"/>
               </a:rPr>
-              <a:t>아직 검증되지 않은 것</a:t>
+              <a:t>Manghisi 외 (2017) · Kinect v2 K2RULA</a:t>
             </a:r>
             <a:endParaRPr lang="en-US" sz="1450" dirty="0"/>
           </a:p>
@@ -5224,7 +6493,7 @@
         <p:spPr>
           <a:xfrm>
             <a:off x="914400" y="2651760"/>
-            <a:ext cx="4846320" cy="3383280"/>
+            <a:ext cx="4800600" cy="2560320"/>
           </a:xfrm>
           <a:prstGeom prst="rect">
             <a:avLst/>
@@ -5246,7 +6515,7 @@
               <a:buNone/>
             </a:pPr>
             <a:r>
-              <a:rPr lang="en-US" sz="1400" dirty="0">
+              <a:rPr lang="en-US" sz="1250" dirty="0">
                 <a:solidFill>
                   <a:srgbClr val="3C4A50"/>
                 </a:solidFill>
@@ -5254,9 +6523,9 @@
                 <a:ea typeface="Calibri" pitchFamily="34" charset="-122"/>
                 <a:cs typeface="Calibri" pitchFamily="34" charset="-120"/>
               </a:rPr>
-              <a:t>•  판정(--judge)의 실제 정확도 — 59장 로그 점검만 했고 5자세 시연 실측 없음</a:t>
-            </a:r>
-            <a:endParaRPr lang="en-US" sz="1400" dirty="0"/>
+              <a:t>•  깊이 카메라로 RULA를 실시간 계산. 광학 모션캡처와 총점 일치 0.97(κ=0.87), RULA 전문가와 0.96(κ=0.84)</a:t>
+            </a:r>
+            <a:endParaRPr lang="en-US" sz="1250" dirty="0"/>
           </a:p>
           <a:p>
             <a:pPr indent="0" marL="0">
@@ -5269,7 +6538,7 @@
               <a:buNone/>
             </a:pPr>
             <a:r>
-              <a:rPr lang="en-US" sz="1400" dirty="0">
+              <a:rPr lang="en-US" sz="1250" dirty="0">
                 <a:solidFill>
                   <a:srgbClr val="3C4A50"/>
                 </a:solidFill>
@@ -5277,9 +6546,9 @@
                 <a:ea typeface="Calibri" pitchFamily="34" charset="-122"/>
                 <a:cs typeface="Calibri" pitchFamily="34" charset="-120"/>
               </a:rPr>
-              <a:t>•  근접 보완의 40cm 미만 구간 정확도</a:t>
-            </a:r>
-            <a:endParaRPr lang="en-US" sz="1400" dirty="0"/>
+              <a:t>•  몸통 굽힘을 수직 방향 대비 각도로 계산 → 우리 접근과 같은 계열</a:t>
+            </a:r>
+            <a:endParaRPr lang="en-US" sz="1250" dirty="0"/>
           </a:p>
           <a:p>
             <a:pPr indent="0" marL="0">
@@ -5292,7 +6561,7 @@
               <a:buNone/>
             </a:pPr>
             <a:r>
-              <a:rPr lang="en-US" sz="1400" dirty="0">
+              <a:rPr lang="en-US" sz="1250" dirty="0">
                 <a:solidFill>
                   <a:srgbClr val="3C4A50"/>
                 </a:solidFill>
@@ -5300,9 +6569,9 @@
                 <a:ea typeface="Calibri" pitchFamily="34" charset="-122"/>
                 <a:cs typeface="Calibri" pitchFamily="34" charset="-120"/>
               </a:rPr>
-              <a:t>•  두 명이 앉은 환경에서의 자동 인식·추적</a:t>
-            </a:r>
-            <a:endParaRPr lang="en-US" sz="1400" dirty="0"/>
+              <a:t>•  RULA는 구간이 넓어 각도 오차 영향이 줄어듦 → 정상/주의/경고 구간 설계의 근거</a:t>
+            </a:r>
+            <a:endParaRPr lang="en-US" sz="1250" dirty="0"/>
           </a:p>
           <a:p>
             <a:pPr indent="0" marL="0">
@@ -5315,7 +6584,7 @@
               <a:buNone/>
             </a:pPr>
             <a:r>
-              <a:rPr lang="en-US" sz="1400" dirty="0">
+              <a:rPr lang="en-US" sz="1250" dirty="0">
                 <a:solidFill>
                   <a:srgbClr val="3C4A50"/>
                 </a:solidFill>
@@ -5323,10 +6592,137 @@
                 <a:ea typeface="Calibri" pitchFamily="34" charset="-122"/>
                 <a:cs typeface="Calibri" pitchFamily="34" charset="-120"/>
               </a:rPr>
-              <a:t>•  depth 필터 프리셋 비교 (카메라가 다른 조에 있음)</a:t>
-            </a:r>
-            <a:endParaRPr lang="en-US" sz="1400" dirty="0"/>
-          </a:p>
+              <a:t>•  한계: 배우 1명, 실험실, 가림 없음. 인용된 연구에서 Kinect v2 목 각도 오차 큼 → 거북목 특징 주의</a:t>
+            </a:r>
+            <a:endParaRPr lang="en-US" sz="1250" dirty="0"/>
+          </a:p>
+        </p:txBody>
+      </p:sp>
+      <p:sp>
+        <p:nvSpPr>
+          <p:cNvPr id="9" name="Shape 6"/>
+          <p:cNvSpPr/>
+          <p:nvPr/>
+        </p:nvSpPr>
+        <p:spPr>
+          <a:xfrm>
+            <a:off x="6199632" y="1691640"/>
+            <a:ext cx="5349240" cy="3657600"/>
+          </a:xfrm>
+          <a:prstGeom prst="roundRect">
+            <a:avLst>
+              <a:gd name="adj" fmla="val 3000"/>
+            </a:avLst>
+          </a:prstGeom>
+          <a:solidFill>
+            <a:srgbClr val="FFFFFF"/>
+          </a:solidFill>
+          <a:ln/>
+        </p:spPr>
+      </p:sp>
+      <p:sp>
+        <p:nvSpPr>
+          <p:cNvPr id="10" name="Shape 7"/>
+          <p:cNvSpPr/>
+          <p:nvPr/>
+        </p:nvSpPr>
+        <p:spPr>
+          <a:xfrm>
+            <a:off x="6455664" y="1920240"/>
+            <a:ext cx="548640" cy="548640"/>
+          </a:xfrm>
+          <a:prstGeom prst="ellipse">
+            <a:avLst/>
+          </a:prstGeom>
+          <a:solidFill>
+            <a:srgbClr val="12655A"/>
+          </a:solidFill>
+          <a:ln/>
+        </p:spPr>
+      </p:sp>
+      <p:pic>
+        <p:nvPicPr>
+          <p:cNvPr id="11" name="Image 1" descr="preencoded.png">    </p:cNvPr>
+          <p:cNvPicPr>
+            <a:picLocks noChangeAspect="1"/>
+          </p:cNvPicPr>
+          <p:nvPr/>
+        </p:nvPicPr>
+        <p:blipFill>
+          <a:blip r:embed="rId3"/>
+          <a:stretch>
+            <a:fillRect/>
+          </a:stretch>
+        </p:blipFill>
+        <p:spPr>
+          <a:xfrm>
+            <a:off x="6598310" y="2062886"/>
+            <a:ext cx="263347" cy="263347"/>
+          </a:xfrm>
+          <a:prstGeom prst="rect">
+            <a:avLst/>
+          </a:prstGeom>
+        </p:spPr>
+      </p:pic>
+      <p:sp>
+        <p:nvSpPr>
+          <p:cNvPr id="12" name="Text 8"/>
+          <p:cNvSpPr txBox="1"/>
+          <p:nvPr/>
+        </p:nvSpPr>
+        <p:spPr>
+          <a:xfrm>
+            <a:off x="7159752" y="1920240"/>
+            <a:ext cx="4160520" cy="548640"/>
+          </a:xfrm>
+          <a:prstGeom prst="rect">
+            <a:avLst/>
+          </a:prstGeom>
+          <a:noFill/>
+          <a:ln/>
+        </p:spPr>
+        <p:txBody>
+          <a:bodyPr wrap="square" lIns="0" tIns="0" rIns="0" bIns="0" rtlCol="0" anchor="ctr"/>
+          <a:lstStyle/>
+          <a:p>
+            <a:pPr indent="0" marL="0">
+              <a:buNone/>
+            </a:pPr>
+            <a:r>
+              <a:rPr lang="en-US" sz="1450" b="1" dirty="0">
+                <a:solidFill>
+                  <a:srgbClr val="16262E"/>
+                </a:solidFill>
+                <a:latin typeface="Arial" pitchFamily="34" charset="0"/>
+                <a:ea typeface="Arial" pitchFamily="34" charset="-122"/>
+                <a:cs typeface="Arial" pitchFamily="34" charset="-120"/>
+              </a:rPr>
+              <a:t>Rodrigues 외 (2022) · 3D-AJA</a:t>
+            </a:r>
+            <a:endParaRPr lang="en-US" sz="1450" dirty="0"/>
+          </a:p>
+        </p:txBody>
+      </p:sp>
+      <p:sp>
+        <p:nvSpPr>
+          <p:cNvPr id="13" name="Text 9"/>
+          <p:cNvSpPr txBox="1"/>
+          <p:nvPr/>
+        </p:nvSpPr>
+        <p:spPr>
+          <a:xfrm>
+            <a:off x="6473952" y="2651760"/>
+            <a:ext cx="4800600" cy="2560320"/>
+          </a:xfrm>
+          <a:prstGeom prst="rect">
+            <a:avLst/>
+          </a:prstGeom>
+          <a:noFill/>
+          <a:ln/>
+        </p:spPr>
+        <p:txBody>
+          <a:bodyPr wrap="square" lIns="0" tIns="0" rIns="0" bIns="0" rtlCol="0" anchor="t"/>
+          <a:lstStyle/>
           <a:p>
             <a:pPr indent="0" marL="0">
               <a:lnSpc>
@@ -5338,7 +6734,7 @@
               <a:buNone/>
             </a:pPr>
             <a:r>
-              <a:rPr lang="en-US" sz="1400" dirty="0">
+              <a:rPr lang="en-US" sz="1250" dirty="0">
                 <a:solidFill>
                   <a:srgbClr val="3C4A50"/>
                 </a:solidFill>
@@ -5346,9 +6742,9 @@
                 <a:ea typeface="Calibri" pitchFamily="34" charset="-122"/>
                 <a:cs typeface="Calibri" pitchFamily="34" charset="-120"/>
               </a:rPr>
-              <a:t>•  절대 특징의 실제 분포·임계값, IMU 연동</a:t>
-            </a:r>
-            <a:endParaRPr lang="en-US" sz="1400" dirty="0"/>
+              <a:t>•  사무직 20명, 6가지 책상 세팅. 각도계 대비 평균 오차 5.6~8.5° (Kinect SDK 8.3~18.2°)</a:t>
+            </a:r>
+            <a:endParaRPr lang="en-US" sz="1250" dirty="0"/>
           </a:p>
           <a:p>
             <a:pPr indent="0" marL="0">
@@ -5361,7 +6757,7 @@
               <a:buNone/>
             </a:pPr>
             <a:r>
-              <a:rPr lang="en-US" sz="1400" dirty="0">
+              <a:rPr lang="en-US" sz="1250" dirty="0">
                 <a:solidFill>
                   <a:srgbClr val="3C4A50"/>
                 </a:solidFill>
@@ -5369,137 +6765,10 @@
                 <a:ea typeface="Calibri" pitchFamily="34" charset="-122"/>
                 <a:cs typeface="Calibri" pitchFamily="34" charset="-120"/>
               </a:rPr>
-              <a:t>•  체형 다양성 — 참가자 2명, 단일 날짜</a:t>
-            </a:r>
-            <a:endParaRPr lang="en-US" sz="1400" dirty="0"/>
-          </a:p>
-        </p:txBody>
-      </p:sp>
-      <p:sp>
-        <p:nvSpPr>
-          <p:cNvPr id="9" name="Shape 6"/>
-          <p:cNvSpPr/>
-          <p:nvPr/>
-        </p:nvSpPr>
-        <p:spPr>
-          <a:xfrm>
-            <a:off x="6199632" y="1691640"/>
-            <a:ext cx="5349240" cy="4434840"/>
-          </a:xfrm>
-          <a:prstGeom prst="roundRect">
-            <a:avLst>
-              <a:gd name="adj" fmla="val 2474"/>
-            </a:avLst>
-          </a:prstGeom>
-          <a:solidFill>
-            <a:srgbClr val="FFFFFF"/>
-          </a:solidFill>
-          <a:ln/>
-        </p:spPr>
-      </p:sp>
-      <p:sp>
-        <p:nvSpPr>
-          <p:cNvPr id="10" name="Shape 7"/>
-          <p:cNvSpPr/>
-          <p:nvPr/>
-        </p:nvSpPr>
-        <p:spPr>
-          <a:xfrm>
-            <a:off x="6455664" y="1920240"/>
-            <a:ext cx="548640" cy="548640"/>
-          </a:xfrm>
-          <a:prstGeom prst="ellipse">
-            <a:avLst/>
-          </a:prstGeom>
-          <a:solidFill>
-            <a:srgbClr val="12655A"/>
-          </a:solidFill>
-          <a:ln/>
-        </p:spPr>
-      </p:sp>
-      <p:pic>
-        <p:nvPicPr>
-          <p:cNvPr id="11" name="Image 1" descr="preencoded.png">    </p:cNvPr>
-          <p:cNvPicPr>
-            <a:picLocks noChangeAspect="1"/>
-          </p:cNvPicPr>
-          <p:nvPr/>
-        </p:nvPicPr>
-        <p:blipFill>
-          <a:blip r:embed="rId3"/>
-          <a:stretch>
-            <a:fillRect/>
-          </a:stretch>
-        </p:blipFill>
-        <p:spPr>
-          <a:xfrm>
-            <a:off x="6598310" y="2062886"/>
-            <a:ext cx="263347" cy="263347"/>
-          </a:xfrm>
-          <a:prstGeom prst="rect">
-            <a:avLst/>
-          </a:prstGeom>
-        </p:spPr>
-      </p:pic>
-      <p:sp>
-        <p:nvSpPr>
-          <p:cNvPr id="12" name="Text 8"/>
-          <p:cNvSpPr txBox="1"/>
-          <p:nvPr/>
-        </p:nvSpPr>
-        <p:spPr>
-          <a:xfrm>
-            <a:off x="7159752" y="1920240"/>
-            <a:ext cx="4160520" cy="548640"/>
-          </a:xfrm>
-          <a:prstGeom prst="rect">
-            <a:avLst/>
-          </a:prstGeom>
-          <a:noFill/>
-          <a:ln/>
-        </p:spPr>
-        <p:txBody>
-          <a:bodyPr wrap="square" lIns="0" tIns="0" rIns="0" bIns="0" rtlCol="0" anchor="ctr"/>
-          <a:lstStyle/>
-          <a:p>
-            <a:pPr indent="0" marL="0">
-              <a:buNone/>
-            </a:pPr>
-            <a:r>
-              <a:rPr lang="en-US" sz="1450" b="1" dirty="0">
-                <a:solidFill>
-                  <a:srgbClr val="16262E"/>
-                </a:solidFill>
-                <a:latin typeface="Arial" pitchFamily="34" charset="0"/>
-                <a:ea typeface="Arial" pitchFamily="34" charset="-122"/>
-                <a:cs typeface="Arial" pitchFamily="34" charset="-120"/>
-              </a:rPr>
-              <a:t>카메라 확보일에 한 번에 (체크리스트 작성 완료)</a:t>
-            </a:r>
-            <a:endParaRPr lang="en-US" sz="1450" dirty="0"/>
-          </a:p>
-        </p:txBody>
-      </p:sp>
-      <p:sp>
-        <p:nvSpPr>
-          <p:cNvPr id="13" name="Text 9"/>
-          <p:cNvSpPr txBox="1"/>
-          <p:nvPr/>
-        </p:nvSpPr>
-        <p:spPr>
-          <a:xfrm>
-            <a:off x="6473952" y="2651760"/>
-            <a:ext cx="4846320" cy="3383280"/>
-          </a:xfrm>
-          <a:prstGeom prst="rect">
-            <a:avLst/>
-          </a:prstGeom>
-          <a:noFill/>
-          <a:ln/>
-        </p:spPr>
-        <p:txBody>
-          <a:bodyPr wrap="square" lIns="0" tIns="0" rIns="0" bIns="0" rtlCol="0" anchor="t"/>
-          <a:lstStyle/>
+              <a:t>•  2D keypoint + 깊이로 3D 각도 계산이 SDK 골격보다 정확 → 우리 구성(MoveNet + depth)과 같은 계열</a:t>
+            </a:r>
+            <a:endParaRPr lang="en-US" sz="1250" dirty="0"/>
+          </a:p>
           <a:p>
             <a:pPr indent="0" marL="0">
               <a:lnSpc>
@@ -5511,7 +6780,7 @@
               <a:buNone/>
             </a:pPr>
             <a:r>
-              <a:rPr lang="en-US" sz="1400" dirty="0">
+              <a:rPr lang="en-US" sz="1250" dirty="0">
                 <a:solidFill>
                   <a:srgbClr val="3C4A50"/>
                 </a:solidFill>
@@ -5519,9 +6788,9 @@
                 <a:ea typeface="Calibri" pitchFamily="34" charset="-122"/>
                 <a:cs typeface="Calibri" pitchFamily="34" charset="-120"/>
               </a:rPr>
-              <a:t>•  depth 필터 7개 프리셋 비교 — 40/60/80cm, 조명별</a:t>
-            </a:r>
-            <a:endParaRPr lang="en-US" sz="1400" dirty="0"/>
+              <a:t>•  임상 기준(±5°)은 이 논문도 못 넘음 → 우리도 5~8° 수준이 현실적인 기대치</a:t>
+            </a:r>
+            <a:endParaRPr lang="en-US" sz="1250" dirty="0"/>
           </a:p>
           <a:p>
             <a:pPr indent="0" marL="0">
@@ -5534,7 +6803,7 @@
               <a:buNone/>
             </a:pPr>
             <a:r>
-              <a:rPr lang="en-US" sz="1400" dirty="0">
+              <a:rPr lang="en-US" sz="1250" dirty="0">
                 <a:solidFill>
                   <a:srgbClr val="3C4A50"/>
                 </a:solidFill>
@@ -5542,107 +6811,76 @@
                 <a:ea typeface="Calibri" pitchFamily="34" charset="-122"/>
                 <a:cs typeface="Calibri" pitchFamily="34" charset="-120"/>
               </a:rPr>
-              <a:t>•  --judge 실측: 5자세, 근접 알림, 쿨다운, ROI 추적, 다인 환경</a:t>
-            </a:r>
-            <a:endParaRPr lang="en-US" sz="1400" dirty="0"/>
-          </a:p>
+              <a:t>•  한계: 책상에 가려지면 성능 하락, 체형·성별 차이 분석엔 표본 부족</a:t>
+            </a:r>
+            <a:endParaRPr lang="en-US" sz="1250" dirty="0"/>
+          </a:p>
+        </p:txBody>
+      </p:sp>
+      <p:sp>
+        <p:nvSpPr>
+          <p:cNvPr id="14" name="Shape 10"/>
+          <p:cNvSpPr/>
+          <p:nvPr/>
+        </p:nvSpPr>
+        <p:spPr>
+          <a:xfrm>
+            <a:off x="640080" y="5486400"/>
+            <a:ext cx="10908792" cy="731520"/>
+          </a:xfrm>
+          <a:prstGeom prst="roundRect">
+            <a:avLst>
+              <a:gd name="adj" fmla="val 15000"/>
+            </a:avLst>
+          </a:prstGeom>
+          <a:solidFill>
+            <a:srgbClr val="12655A"/>
+          </a:solidFill>
+          <a:ln/>
+        </p:spPr>
+      </p:sp>
+      <p:sp>
+        <p:nvSpPr>
+          <p:cNvPr id="15" name="Text 11"/>
+          <p:cNvSpPr txBox="1"/>
+          <p:nvPr/>
+        </p:nvSpPr>
+        <p:spPr>
+          <a:xfrm>
+            <a:off x="914400" y="5486400"/>
+            <a:ext cx="10424160" cy="731520"/>
+          </a:xfrm>
+          <a:prstGeom prst="rect">
+            <a:avLst/>
+          </a:prstGeom>
+          <a:noFill/>
+          <a:ln/>
+        </p:spPr>
+        <p:txBody>
+          <a:bodyPr wrap="square" lIns="0" tIns="0" rIns="0" bIns="0" rtlCol="0" anchor="ctr"/>
+          <a:lstStyle/>
           <a:p>
             <a:pPr indent="0" marL="0">
-              <a:lnSpc>
-                <a:spcPct val="115000"/>
-              </a:lnSpc>
-              <a:spcAft>
-                <a:spcPts val="700"/>
-              </a:spcAft>
-              <a:buNone/>
-            </a:pPr>
-            <a:r>
-              <a:rPr lang="en-US" sz="1400" dirty="0">
-                <a:solidFill>
-                  <a:srgbClr val="3C4A50"/>
+              <a:buNone/>
+            </a:pPr>
+            <a:r>
+              <a:rPr lang="en-US" sz="1250" b="1" dirty="0">
+                <a:solidFill>
+                  <a:srgbClr val="EAF3F1"/>
                 </a:solidFill>
                 <a:latin typeface="Calibri" pitchFamily="34" charset="0"/>
                 <a:ea typeface="Calibri" pitchFamily="34" charset="-122"/>
                 <a:cs typeface="Calibri" pitchFamily="34" charset="-120"/>
               </a:rPr>
-              <a:t>•  IMU 스트림·내부 파라미터 읽기, 새 특징을 캡처 로그에 기록</a:t>
-            </a:r>
-            <a:endParaRPr lang="en-US" sz="1400" dirty="0"/>
-          </a:p>
-          <a:p>
-            <a:pPr indent="0" marL="0">
-              <a:lnSpc>
-                <a:spcPct val="115000"/>
-              </a:lnSpc>
-              <a:spcAft>
-                <a:spcPts val="700"/>
-              </a:spcAft>
-              <a:buNone/>
-            </a:pPr>
-            <a:r>
-              <a:rPr lang="en-US" sz="1400" dirty="0">
-                <a:solidFill>
-                  <a:srgbClr val="3C4A50"/>
-                </a:solidFill>
-                <a:latin typeface="Calibri" pitchFamily="34" charset="0"/>
-                <a:ea typeface="Calibri" pitchFamily="34" charset="-122"/>
-                <a:cs typeface="Calibri" pitchFamily="34" charset="-120"/>
-              </a:rPr>
-              <a:t>•  거리·카메라 기울기 불변성 실험</a:t>
-            </a:r>
-            <a:endParaRPr lang="en-US" sz="1400" dirty="0"/>
-          </a:p>
-          <a:p>
-            <a:pPr indent="0" marL="0">
-              <a:lnSpc>
-                <a:spcPct val="115000"/>
-              </a:lnSpc>
-              <a:spcAft>
-                <a:spcPts val="700"/>
-              </a:spcAft>
-              <a:buNone/>
-            </a:pPr>
-            <a:r>
-              <a:rPr lang="en-US" sz="1400" dirty="0">
-                <a:solidFill>
-                  <a:srgbClr val="3C4A50"/>
-                </a:solidFill>
-                <a:latin typeface="Calibri" pitchFamily="34" charset="0"/>
-                <a:ea typeface="Calibri" pitchFamily="34" charset="-122"/>
-                <a:cs typeface="Calibri" pitchFamily="34" charset="-120"/>
-              </a:rPr>
-              <a:t>•  새 참가자·다른 조명/복장으로 추가 수집</a:t>
-            </a:r>
-            <a:endParaRPr lang="en-US" sz="1400" dirty="0"/>
-          </a:p>
-          <a:p>
-            <a:pPr indent="0" marL="0">
-              <a:lnSpc>
-                <a:spcPct val="115000"/>
-              </a:lnSpc>
-              <a:spcAft>
-                <a:spcPts val="700"/>
-              </a:spcAft>
-              <a:buNone/>
-            </a:pPr>
-            <a:r>
-              <a:rPr lang="en-US" sz="1400" dirty="0">
-                <a:solidFill>
-                  <a:srgbClr val="3C4A50"/>
-                </a:solidFill>
-                <a:latin typeface="Calibri" pitchFamily="34" charset="0"/>
-                <a:ea typeface="Calibri" pitchFamily="34" charset="-122"/>
-                <a:cs typeface="Calibri" pitchFamily="34" charset="-120"/>
-              </a:rPr>
-              <a:t>•  반납 전 로그 커밋 — depth는 사후 복구 불가</a:t>
-            </a:r>
-            <a:endParaRPr lang="en-US" sz="1400" dirty="0"/>
+              <a:t>두 논문 모두 거리 고정·카메라 정면 설치였고, '거리에 불변'과 'IMU로 기울기 보정'은 검증하지 않음 → 이 두 가지는 우리가 직접 실험으로 보일 부분</a:t>
+            </a:r>
+            <a:endParaRPr lang="en-US" sz="1250" dirty="0"/>
           </a:p>
         </p:txBody>
       </p:sp>
       <p:sp>
         <p:nvSpPr>
-          <p:cNvPr id="14" name="Text 10"/>
+          <p:cNvPr id="16" name="Text 12"/>
           <p:cNvSpPr txBox="1"/>
           <p:nvPr/>
         </p:nvSpPr>
@@ -5751,6 +6989,692 @@
                 <a:ea typeface="Calibri" pitchFamily="34" charset="-122"/>
                 <a:cs typeface="Calibri" pitchFamily="34" charset="-120"/>
               </a:rPr>
+              <a:t>LIMITS &amp; NEXT</a:t>
+            </a:r>
+            <a:endParaRPr lang="en-US" sz="1200" dirty="0"/>
+          </a:p>
+        </p:txBody>
+      </p:sp>
+      <p:sp>
+        <p:nvSpPr>
+          <p:cNvPr id="3" name="Text 1"/>
+          <p:cNvSpPr txBox="1"/>
+          <p:nvPr/>
+        </p:nvSpPr>
+        <p:spPr>
+          <a:xfrm>
+            <a:off x="640080" y="685800"/>
+            <a:ext cx="10881360" cy="822960"/>
+          </a:xfrm>
+          <a:prstGeom prst="rect">
+            <a:avLst/>
+          </a:prstGeom>
+          <a:noFill/>
+          <a:ln/>
+        </p:spPr>
+        <p:txBody>
+          <a:bodyPr wrap="square" lIns="0" tIns="0" rIns="0" bIns="0" rtlCol="0" anchor="ctr"/>
+          <a:lstStyle/>
+          <a:p>
+            <a:pPr indent="0" marL="0">
+              <a:buNone/>
+            </a:pPr>
+            <a:r>
+              <a:rPr lang="en-US" sz="2700" b="1" dirty="0">
+                <a:solidFill>
+                  <a:srgbClr val="EAF3F1"/>
+                </a:solidFill>
+                <a:latin typeface="Arial" pitchFamily="34" charset="0"/>
+                <a:ea typeface="Arial" pitchFamily="34" charset="-122"/>
+                <a:cs typeface="Arial" pitchFamily="34" charset="-120"/>
+              </a:rPr>
+              <a:t>한계와 카메라 확보 후 할 일</a:t>
+            </a:r>
+            <a:endParaRPr lang="en-US" sz="2700" dirty="0"/>
+          </a:p>
+        </p:txBody>
+      </p:sp>
+      <p:sp>
+        <p:nvSpPr>
+          <p:cNvPr id="4" name="Shape 2"/>
+          <p:cNvSpPr/>
+          <p:nvPr/>
+        </p:nvSpPr>
+        <p:spPr>
+          <a:xfrm>
+            <a:off x="640080" y="1691640"/>
+            <a:ext cx="5349240" cy="4434840"/>
+          </a:xfrm>
+          <a:prstGeom prst="roundRect">
+            <a:avLst>
+              <a:gd name="adj" fmla="val 2474"/>
+            </a:avLst>
+          </a:prstGeom>
+          <a:solidFill>
+            <a:srgbClr val="FFFFFF"/>
+          </a:solidFill>
+          <a:ln/>
+        </p:spPr>
+      </p:sp>
+      <p:sp>
+        <p:nvSpPr>
+          <p:cNvPr id="5" name="Shape 3"/>
+          <p:cNvSpPr/>
+          <p:nvPr/>
+        </p:nvSpPr>
+        <p:spPr>
+          <a:xfrm>
+            <a:off x="896112" y="1920240"/>
+            <a:ext cx="548640" cy="548640"/>
+          </a:xfrm>
+          <a:prstGeom prst="ellipse">
+            <a:avLst/>
+          </a:prstGeom>
+          <a:solidFill>
+            <a:srgbClr val="12655A"/>
+          </a:solidFill>
+          <a:ln/>
+        </p:spPr>
+      </p:sp>
+      <p:pic>
+        <p:nvPicPr>
+          <p:cNvPr id="6" name="Image 0" descr="preencoded.png">    </p:cNvPr>
+          <p:cNvPicPr>
+            <a:picLocks noChangeAspect="1"/>
+          </p:cNvPicPr>
+          <p:nvPr/>
+        </p:nvPicPr>
+        <p:blipFill>
+          <a:blip r:embed="rId2"/>
+          <a:stretch>
+            <a:fillRect/>
+          </a:stretch>
+        </p:blipFill>
+        <p:spPr>
+          <a:xfrm>
+            <a:off x="1038758" y="2062886"/>
+            <a:ext cx="263347" cy="263347"/>
+          </a:xfrm>
+          <a:prstGeom prst="rect">
+            <a:avLst/>
+          </a:prstGeom>
+        </p:spPr>
+      </p:pic>
+      <p:sp>
+        <p:nvSpPr>
+          <p:cNvPr id="7" name="Text 4"/>
+          <p:cNvSpPr txBox="1"/>
+          <p:nvPr/>
+        </p:nvSpPr>
+        <p:spPr>
+          <a:xfrm>
+            <a:off x="1600200" y="1920240"/>
+            <a:ext cx="4160520" cy="548640"/>
+          </a:xfrm>
+          <a:prstGeom prst="rect">
+            <a:avLst/>
+          </a:prstGeom>
+          <a:noFill/>
+          <a:ln/>
+        </p:spPr>
+        <p:txBody>
+          <a:bodyPr wrap="square" lIns="0" tIns="0" rIns="0" bIns="0" rtlCol="0" anchor="ctr"/>
+          <a:lstStyle/>
+          <a:p>
+            <a:pPr indent="0" marL="0">
+              <a:buNone/>
+            </a:pPr>
+            <a:r>
+              <a:rPr lang="en-US" sz="1450" b="1" dirty="0">
+                <a:solidFill>
+                  <a:srgbClr val="16262E"/>
+                </a:solidFill>
+                <a:latin typeface="Arial" pitchFamily="34" charset="0"/>
+                <a:ea typeface="Arial" pitchFamily="34" charset="-122"/>
+                <a:cs typeface="Arial" pitchFamily="34" charset="-120"/>
+              </a:rPr>
+              <a:t>아직 검증되지 않은 것</a:t>
+            </a:r>
+            <a:endParaRPr lang="en-US" sz="1450" dirty="0"/>
+          </a:p>
+        </p:txBody>
+      </p:sp>
+      <p:sp>
+        <p:nvSpPr>
+          <p:cNvPr id="8" name="Text 5"/>
+          <p:cNvSpPr txBox="1"/>
+          <p:nvPr/>
+        </p:nvSpPr>
+        <p:spPr>
+          <a:xfrm>
+            <a:off x="914400" y="2651760"/>
+            <a:ext cx="4846320" cy="3383280"/>
+          </a:xfrm>
+          <a:prstGeom prst="rect">
+            <a:avLst/>
+          </a:prstGeom>
+          <a:noFill/>
+          <a:ln/>
+        </p:spPr>
+        <p:txBody>
+          <a:bodyPr wrap="square" lIns="0" tIns="0" rIns="0" bIns="0" rtlCol="0" anchor="t"/>
+          <a:lstStyle/>
+          <a:p>
+            <a:pPr indent="0" marL="0">
+              <a:lnSpc>
+                <a:spcPct val="115000"/>
+              </a:lnSpc>
+              <a:spcAft>
+                <a:spcPts val="700"/>
+              </a:spcAft>
+              <a:buNone/>
+            </a:pPr>
+            <a:r>
+              <a:rPr lang="en-US" sz="1400" dirty="0">
+                <a:solidFill>
+                  <a:srgbClr val="3C4A50"/>
+                </a:solidFill>
+                <a:latin typeface="Calibri" pitchFamily="34" charset="0"/>
+                <a:ea typeface="Calibri" pitchFamily="34" charset="-122"/>
+                <a:cs typeface="Calibri" pitchFamily="34" charset="-120"/>
+              </a:rPr>
+              <a:t>•  판정(--judge) 기준값 — 1인·자세당 1회 실측, 참가자·앉는 거리·카메라 각도 확대 필요</a:t>
+            </a:r>
+            <a:endParaRPr lang="en-US" sz="1400" dirty="0"/>
+          </a:p>
+          <a:p>
+            <a:pPr indent="0" marL="0">
+              <a:lnSpc>
+                <a:spcPct val="115000"/>
+              </a:lnSpc>
+              <a:spcAft>
+                <a:spcPts val="700"/>
+              </a:spcAft>
+              <a:buNone/>
+            </a:pPr>
+            <a:r>
+              <a:rPr lang="en-US" sz="1400" dirty="0">
+                <a:solidFill>
+                  <a:srgbClr val="3C4A50"/>
+                </a:solidFill>
+                <a:latin typeface="Calibri" pitchFamily="34" charset="0"/>
+                <a:ea typeface="Calibri" pitchFamily="34" charset="-122"/>
+                <a:cs typeface="Calibri" pitchFamily="34" charset="-120"/>
+              </a:rPr>
+              <a:t>•  근접 보완의 40cm 미만 구간 정확도</a:t>
+            </a:r>
+            <a:endParaRPr lang="en-US" sz="1400" dirty="0"/>
+          </a:p>
+          <a:p>
+            <a:pPr indent="0" marL="0">
+              <a:lnSpc>
+                <a:spcPct val="115000"/>
+              </a:lnSpc>
+              <a:spcAft>
+                <a:spcPts val="700"/>
+              </a:spcAft>
+              <a:buNone/>
+            </a:pPr>
+            <a:r>
+              <a:rPr lang="en-US" sz="1400" dirty="0">
+                <a:solidFill>
+                  <a:srgbClr val="3C4A50"/>
+                </a:solidFill>
+                <a:latin typeface="Calibri" pitchFamily="34" charset="0"/>
+                <a:ea typeface="Calibri" pitchFamily="34" charset="-122"/>
+                <a:cs typeface="Calibri" pitchFamily="34" charset="-120"/>
+              </a:rPr>
+              <a:t>•  두 명이 앉은 환경에서의 자동 인식·추적</a:t>
+            </a:r>
+            <a:endParaRPr lang="en-US" sz="1400" dirty="0"/>
+          </a:p>
+          <a:p>
+            <a:pPr indent="0" marL="0">
+              <a:lnSpc>
+                <a:spcPct val="115000"/>
+              </a:lnSpc>
+              <a:spcAft>
+                <a:spcPts val="700"/>
+              </a:spcAft>
+              <a:buNone/>
+            </a:pPr>
+            <a:r>
+              <a:rPr lang="en-US" sz="1400" dirty="0">
+                <a:solidFill>
+                  <a:srgbClr val="3C4A50"/>
+                </a:solidFill>
+                <a:latin typeface="Calibri" pitchFamily="34" charset="0"/>
+                <a:ea typeface="Calibri" pitchFamily="34" charset="-122"/>
+                <a:cs typeface="Calibri" pitchFamily="34" charset="-120"/>
+              </a:rPr>
+              <a:t>•  허리가 책상에 가려질 때 허리 depth 기반 판정 불가 — 머리−가슴 depth 차로 보완(1인 기준값)</a:t>
+            </a:r>
+            <a:endParaRPr lang="en-US" sz="1400" dirty="0"/>
+          </a:p>
+          <a:p>
+            <a:pPr indent="0" marL="0">
+              <a:lnSpc>
+                <a:spcPct val="115000"/>
+              </a:lnSpc>
+              <a:spcAft>
+                <a:spcPts val="700"/>
+              </a:spcAft>
+              <a:buNone/>
+            </a:pPr>
+            <a:r>
+              <a:rPr lang="en-US" sz="1400" dirty="0">
+                <a:solidFill>
+                  <a:srgbClr val="3C4A50"/>
+                </a:solidFill>
+                <a:latin typeface="Calibri" pitchFamily="34" charset="0"/>
+                <a:ea typeface="Calibri" pitchFamily="34" charset="-122"/>
+                <a:cs typeface="Calibri" pitchFamily="34" charset="-120"/>
+              </a:rPr>
+              <a:t>•  절대 특징의 실제 분포·임계값, IMU 연동</a:t>
+            </a:r>
+            <a:endParaRPr lang="en-US" sz="1400" dirty="0"/>
+          </a:p>
+          <a:p>
+            <a:pPr indent="0" marL="0">
+              <a:lnSpc>
+                <a:spcPct val="115000"/>
+              </a:lnSpc>
+              <a:spcAft>
+                <a:spcPts val="700"/>
+              </a:spcAft>
+              <a:buNone/>
+            </a:pPr>
+            <a:r>
+              <a:rPr lang="en-US" sz="1400" dirty="0">
+                <a:solidFill>
+                  <a:srgbClr val="3C4A50"/>
+                </a:solidFill>
+                <a:latin typeface="Calibri" pitchFamily="34" charset="0"/>
+                <a:ea typeface="Calibri" pitchFamily="34" charset="-122"/>
+                <a:cs typeface="Calibri" pitchFamily="34" charset="-120"/>
+              </a:rPr>
+              <a:t>•  체형 다양성 — 참가자 2명, 단일 날짜</a:t>
+            </a:r>
+            <a:endParaRPr lang="en-US" sz="1400" dirty="0"/>
+          </a:p>
+        </p:txBody>
+      </p:sp>
+      <p:sp>
+        <p:nvSpPr>
+          <p:cNvPr id="9" name="Shape 6"/>
+          <p:cNvSpPr/>
+          <p:nvPr/>
+        </p:nvSpPr>
+        <p:spPr>
+          <a:xfrm>
+            <a:off x="6199632" y="1691640"/>
+            <a:ext cx="5349240" cy="4434840"/>
+          </a:xfrm>
+          <a:prstGeom prst="roundRect">
+            <a:avLst>
+              <a:gd name="adj" fmla="val 2474"/>
+            </a:avLst>
+          </a:prstGeom>
+          <a:solidFill>
+            <a:srgbClr val="FFFFFF"/>
+          </a:solidFill>
+          <a:ln/>
+        </p:spPr>
+      </p:sp>
+      <p:sp>
+        <p:nvSpPr>
+          <p:cNvPr id="10" name="Shape 7"/>
+          <p:cNvSpPr/>
+          <p:nvPr/>
+        </p:nvSpPr>
+        <p:spPr>
+          <a:xfrm>
+            <a:off x="6455664" y="1920240"/>
+            <a:ext cx="548640" cy="548640"/>
+          </a:xfrm>
+          <a:prstGeom prst="ellipse">
+            <a:avLst/>
+          </a:prstGeom>
+          <a:solidFill>
+            <a:srgbClr val="12655A"/>
+          </a:solidFill>
+          <a:ln/>
+        </p:spPr>
+      </p:sp>
+      <p:pic>
+        <p:nvPicPr>
+          <p:cNvPr id="11" name="Image 1" descr="preencoded.png">    </p:cNvPr>
+          <p:cNvPicPr>
+            <a:picLocks noChangeAspect="1"/>
+          </p:cNvPicPr>
+          <p:nvPr/>
+        </p:nvPicPr>
+        <p:blipFill>
+          <a:blip r:embed="rId3"/>
+          <a:stretch>
+            <a:fillRect/>
+          </a:stretch>
+        </p:blipFill>
+        <p:spPr>
+          <a:xfrm>
+            <a:off x="6598310" y="2062886"/>
+            <a:ext cx="263347" cy="263347"/>
+          </a:xfrm>
+          <a:prstGeom prst="rect">
+            <a:avLst/>
+          </a:prstGeom>
+        </p:spPr>
+      </p:pic>
+      <p:sp>
+        <p:nvSpPr>
+          <p:cNvPr id="12" name="Text 8"/>
+          <p:cNvSpPr txBox="1"/>
+          <p:nvPr/>
+        </p:nvSpPr>
+        <p:spPr>
+          <a:xfrm>
+            <a:off x="7159752" y="1920240"/>
+            <a:ext cx="4160520" cy="548640"/>
+          </a:xfrm>
+          <a:prstGeom prst="rect">
+            <a:avLst/>
+          </a:prstGeom>
+          <a:noFill/>
+          <a:ln/>
+        </p:spPr>
+        <p:txBody>
+          <a:bodyPr wrap="square" lIns="0" tIns="0" rIns="0" bIns="0" rtlCol="0" anchor="ctr"/>
+          <a:lstStyle/>
+          <a:p>
+            <a:pPr indent="0" marL="0">
+              <a:buNone/>
+            </a:pPr>
+            <a:r>
+              <a:rPr lang="en-US" sz="1450" b="1" dirty="0">
+                <a:solidFill>
+                  <a:srgbClr val="16262E"/>
+                </a:solidFill>
+                <a:latin typeface="Arial" pitchFamily="34" charset="0"/>
+                <a:ea typeface="Arial" pitchFamily="34" charset="-122"/>
+                <a:cs typeface="Arial" pitchFamily="34" charset="-120"/>
+              </a:rPr>
+              <a:t>카메라 확보 상태에서 남은 실측 (체크리스트)</a:t>
+            </a:r>
+            <a:endParaRPr lang="en-US" sz="1450" dirty="0"/>
+          </a:p>
+        </p:txBody>
+      </p:sp>
+      <p:sp>
+        <p:nvSpPr>
+          <p:cNvPr id="13" name="Text 9"/>
+          <p:cNvSpPr txBox="1"/>
+          <p:nvPr/>
+        </p:nvSpPr>
+        <p:spPr>
+          <a:xfrm>
+            <a:off x="6473952" y="2651760"/>
+            <a:ext cx="4846320" cy="3383280"/>
+          </a:xfrm>
+          <a:prstGeom prst="rect">
+            <a:avLst/>
+          </a:prstGeom>
+          <a:noFill/>
+          <a:ln/>
+        </p:spPr>
+        <p:txBody>
+          <a:bodyPr wrap="square" lIns="0" tIns="0" rIns="0" bIns="0" rtlCol="0" anchor="t"/>
+          <a:lstStyle/>
+          <a:p>
+            <a:pPr indent="0" marL="0">
+              <a:lnSpc>
+                <a:spcPct val="115000"/>
+              </a:lnSpc>
+              <a:spcAft>
+                <a:spcPts val="700"/>
+              </a:spcAft>
+              <a:buNone/>
+            </a:pPr>
+            <a:r>
+              <a:rPr lang="en-US" sz="1400" dirty="0">
+                <a:solidFill>
+                  <a:srgbClr val="3C4A50"/>
+                </a:solidFill>
+                <a:latin typeface="Calibri" pitchFamily="34" charset="0"/>
+                <a:ea typeface="Calibri" pitchFamily="34" charset="-122"/>
+                <a:cs typeface="Calibri" pitchFamily="34" charset="-120"/>
+              </a:rPr>
+              <a:t>•  알림 쿨다운 시간 확인(60초/300초), 40cm 미만 근접, ROI 추적, 다인 환경</a:t>
+            </a:r>
+            <a:endParaRPr lang="en-US" sz="1400" dirty="0"/>
+          </a:p>
+          <a:p>
+            <a:pPr indent="0" marL="0">
+              <a:lnSpc>
+                <a:spcPct val="115000"/>
+              </a:lnSpc>
+              <a:spcAft>
+                <a:spcPts val="700"/>
+              </a:spcAft>
+              <a:buNone/>
+            </a:pPr>
+            <a:r>
+              <a:rPr lang="en-US" sz="1400" dirty="0">
+                <a:solidFill>
+                  <a:srgbClr val="3C4A50"/>
+                </a:solidFill>
+                <a:latin typeface="Calibri" pitchFamily="34" charset="0"/>
+                <a:ea typeface="Calibri" pitchFamily="34" charset="-122"/>
+                <a:cs typeface="Calibri" pitchFamily="34" charset="-120"/>
+              </a:rPr>
+              <a:t>•  참가자·거리·카메라 각도를 바꿔 --judge 로그 재측정, 기준값 재보정</a:t>
+            </a:r>
+            <a:endParaRPr lang="en-US" sz="1400" dirty="0"/>
+          </a:p>
+          <a:p>
+            <a:pPr indent="0" marL="0">
+              <a:lnSpc>
+                <a:spcPct val="115000"/>
+              </a:lnSpc>
+              <a:spcAft>
+                <a:spcPts val="700"/>
+              </a:spcAft>
+              <a:buNone/>
+            </a:pPr>
+            <a:r>
+              <a:rPr lang="en-US" sz="1400" dirty="0">
+                <a:solidFill>
+                  <a:srgbClr val="3C4A50"/>
+                </a:solidFill>
+                <a:latin typeface="Calibri" pitchFamily="34" charset="0"/>
+                <a:ea typeface="Calibri" pitchFamily="34" charset="-122"/>
+                <a:cs typeface="Calibri" pitchFamily="34" charset="-120"/>
+              </a:rPr>
+              <a:t>•  IMU 스트림·내부 파라미터 읽기, 새 특징을 캡처 로그에 기록</a:t>
+            </a:r>
+            <a:endParaRPr lang="en-US" sz="1400" dirty="0"/>
+          </a:p>
+          <a:p>
+            <a:pPr indent="0" marL="0">
+              <a:lnSpc>
+                <a:spcPct val="115000"/>
+              </a:lnSpc>
+              <a:spcAft>
+                <a:spcPts val="700"/>
+              </a:spcAft>
+              <a:buNone/>
+            </a:pPr>
+            <a:r>
+              <a:rPr lang="en-US" sz="1400" dirty="0">
+                <a:solidFill>
+                  <a:srgbClr val="3C4A50"/>
+                </a:solidFill>
+                <a:latin typeface="Calibri" pitchFamily="34" charset="0"/>
+                <a:ea typeface="Calibri" pitchFamily="34" charset="-122"/>
+                <a:cs typeface="Calibri" pitchFamily="34" charset="-120"/>
+              </a:rPr>
+              <a:t>•  거리·카메라 기울기 불변성 실험</a:t>
+            </a:r>
+            <a:endParaRPr lang="en-US" sz="1400" dirty="0"/>
+          </a:p>
+          <a:p>
+            <a:pPr indent="0" marL="0">
+              <a:lnSpc>
+                <a:spcPct val="115000"/>
+              </a:lnSpc>
+              <a:spcAft>
+                <a:spcPts val="700"/>
+              </a:spcAft>
+              <a:buNone/>
+            </a:pPr>
+            <a:r>
+              <a:rPr lang="en-US" sz="1400" dirty="0">
+                <a:solidFill>
+                  <a:srgbClr val="3C4A50"/>
+                </a:solidFill>
+                <a:latin typeface="Calibri" pitchFamily="34" charset="0"/>
+                <a:ea typeface="Calibri" pitchFamily="34" charset="-122"/>
+                <a:cs typeface="Calibri" pitchFamily="34" charset="-120"/>
+              </a:rPr>
+              <a:t>•  새 참가자·다른 조명/복장으로 추가 수집</a:t>
+            </a:r>
+            <a:endParaRPr lang="en-US" sz="1400" dirty="0"/>
+          </a:p>
+          <a:p>
+            <a:pPr indent="0" marL="0">
+              <a:lnSpc>
+                <a:spcPct val="115000"/>
+              </a:lnSpc>
+              <a:spcAft>
+                <a:spcPts val="700"/>
+              </a:spcAft>
+              <a:buNone/>
+            </a:pPr>
+            <a:r>
+              <a:rPr lang="en-US" sz="1400" dirty="0">
+                <a:solidFill>
+                  <a:srgbClr val="3C4A50"/>
+                </a:solidFill>
+                <a:latin typeface="Calibri" pitchFamily="34" charset="0"/>
+                <a:ea typeface="Calibri" pitchFamily="34" charset="-122"/>
+                <a:cs typeface="Calibri" pitchFamily="34" charset="-120"/>
+              </a:rPr>
+              <a:t>•  반납 전 로그 커밋 — depth는 사후 복구 불가</a:t>
+            </a:r>
+            <a:endParaRPr lang="en-US" sz="1400" dirty="0"/>
+          </a:p>
+        </p:txBody>
+      </p:sp>
+      <p:sp>
+        <p:nvSpPr>
+          <p:cNvPr id="14" name="Text 10"/>
+          <p:cNvSpPr txBox="1"/>
+          <p:nvPr/>
+        </p:nvSpPr>
+        <p:spPr>
+          <a:xfrm>
+            <a:off x="11365992" y="6355080"/>
+            <a:ext cx="548640" cy="320040"/>
+          </a:xfrm>
+          <a:prstGeom prst="rect">
+            <a:avLst/>
+          </a:prstGeom>
+          <a:noFill/>
+          <a:ln/>
+        </p:spPr>
+        <p:txBody>
+          <a:bodyPr wrap="square" lIns="0" tIns="0" rIns="0" bIns="0" rtlCol="0" anchor="ctr"/>
+          <a:lstStyle/>
+          <a:p>
+            <a:pPr algn="r" indent="0" marL="0">
+              <a:buNone/>
+            </a:pPr>
+            <a:r>
+              <a:rPr lang="en-US" sz="1100" dirty="0">
+                <a:solidFill>
+                  <a:srgbClr val="9FB6BC"/>
+                </a:solidFill>
+                <a:latin typeface="Calibri" pitchFamily="34" charset="0"/>
+                <a:ea typeface="Calibri" pitchFamily="34" charset="-122"/>
+                <a:cs typeface="Calibri" pitchFamily="34" charset="-120"/>
+              </a:rPr>
+              <a:t>13</a:t>
+            </a:r>
+            <a:endParaRPr lang="en-US" sz="1100" dirty="0"/>
+          </a:p>
+        </p:txBody>
+      </p:sp>
+    </p:spTree>
+  </p:cSld>
+  <p:clrMapOvr>
+    <a:masterClrMapping/>
+  </p:clrMapOvr>
+</p:sld>
+</file>
+
+<file path=ppt/slides/slide14.xml><?xml version="1.0" encoding="utf-8"?>
+<p:sld xmlns:a="http://schemas.openxmlformats.org/drawingml/2006/main" xmlns:r="http://schemas.openxmlformats.org/officeDocument/2006/relationships" xmlns:p="http://schemas.openxmlformats.org/presentationml/2006/main">
+  <p:cSld name="Slide 14">
+    <p:bg>
+      <p:bgPr>
+        <a:blipFill dpi="0" rotWithShape="1">
+          <a:blip r:embed="rId1">
+            <a:lum/>
+          </a:blip>
+          <a:srcRect/>
+          <a:stretch>
+            <a:fillRect/>
+          </a:stretch>
+        </a:blipFill>
+        <a:effectLst/>
+      </p:bgPr>
+    </p:bg>
+    <p:spTree>
+      <p:nvGrpSpPr>
+        <p:cNvPr id="1" name=""/>
+        <p:cNvGrpSpPr/>
+        <p:nvPr/>
+      </p:nvGrpSpPr>
+      <p:grpSpPr>
+        <a:xfrm>
+          <a:off x="0" y="0"/>
+          <a:ext cx="0" cy="0"/>
+          <a:chOff x="0" y="0"/>
+          <a:chExt cx="0" cy="0"/>
+        </a:xfrm>
+      </p:grpSpPr>
+      <p:sp>
+        <p:nvSpPr>
+          <p:cNvPr id="2" name="Text 0"/>
+          <p:cNvSpPr txBox="1"/>
+          <p:nvPr/>
+        </p:nvSpPr>
+        <p:spPr>
+          <a:xfrm>
+            <a:off x="640080" y="384048"/>
+            <a:ext cx="8229600" cy="320040"/>
+          </a:xfrm>
+          <a:prstGeom prst="rect">
+            <a:avLst/>
+          </a:prstGeom>
+          <a:noFill/>
+          <a:ln/>
+        </p:spPr>
+        <p:txBody>
+          <a:bodyPr wrap="square" lIns="0" tIns="0" rIns="0" bIns="0" rtlCol="0" anchor="ctr"/>
+          <a:lstStyle/>
+          <a:p>
+            <a:pPr indent="0" marL="0">
+              <a:buNone/>
+            </a:pPr>
+            <a:r>
+              <a:rPr lang="en-US" sz="1200" b="1" spc="200" kern="0" dirty="0">
+                <a:solidFill>
+                  <a:srgbClr val="2FE0C4"/>
+                </a:solidFill>
+                <a:latin typeface="Calibri" pitchFamily="34" charset="0"/>
+                <a:ea typeface="Calibri" pitchFamily="34" charset="-122"/>
+                <a:cs typeface="Calibri" pitchFamily="34" charset="-120"/>
+              </a:rPr>
               <a:t>NEXT WEEK</a:t>
             </a:r>
             <a:endParaRPr lang="en-US" sz="1200" dirty="0"/>
@@ -5915,7 +7839,7 @@
                 <a:ea typeface="Calibri" pitchFamily="34" charset="-122"/>
                 <a:cs typeface="Calibri" pitchFamily="34" charset="-120"/>
               </a:rPr>
-              <a:t>카메라 확보 시: 필터 튜닝·판정 실측·절대 특징 실험 (체크리스트대로)</a:t>
+              <a:t>판정 기준 다인·다거리 재보정, 절대 특징 실험(IMU·불변성), 알림 쿨다운 확인</a:t>
             </a:r>
             <a:endParaRPr lang="en-US" sz="1500" dirty="0"/>
           </a:p>
@@ -6298,58 +8222,14 @@
       </p:sp>
       <p:sp>
         <p:nvSpPr>
-          <p:cNvPr id="20" name="Shape 18"/>
-          <p:cNvSpPr/>
-          <p:nvPr/>
-        </p:nvSpPr>
-        <p:spPr>
-          <a:xfrm>
-            <a:off x="640080" y="5102352"/>
-            <a:ext cx="10908792" cy="731520"/>
-          </a:xfrm>
-          <a:prstGeom prst="roundRect">
-            <a:avLst>
-              <a:gd name="adj" fmla="val 15000"/>
-            </a:avLst>
-          </a:prstGeom>
-          <a:solidFill>
-            <a:srgbClr val="FFFFFF"/>
-          </a:solidFill>
-          <a:ln/>
-        </p:spPr>
-      </p:sp>
-      <p:sp>
-        <p:nvSpPr>
-          <p:cNvPr id="21" name="Shape 19"/>
-          <p:cNvSpPr/>
-          <p:nvPr/>
-        </p:nvSpPr>
-        <p:spPr>
-          <a:xfrm>
-            <a:off x="822960" y="5285232"/>
-            <a:ext cx="502920" cy="365760"/>
-          </a:xfrm>
-          <a:prstGeom prst="roundRect">
-            <a:avLst>
-              <a:gd name="adj" fmla="val 20000"/>
-            </a:avLst>
-          </a:prstGeom>
-          <a:solidFill>
-            <a:srgbClr val="E9FBF7"/>
-          </a:solidFill>
-          <a:ln/>
-        </p:spPr>
-      </p:sp>
-      <p:sp>
-        <p:nvSpPr>
-          <p:cNvPr id="22" name="Text 20"/>
+          <p:cNvPr id="20" name="Text 18"/>
           <p:cNvSpPr txBox="1"/>
           <p:nvPr/>
         </p:nvSpPr>
         <p:spPr>
           <a:xfrm>
-            <a:off x="822960" y="5285232"/>
-            <a:ext cx="502920" cy="365760"/>
+            <a:off x="640080" y="6172200"/>
+            <a:ext cx="10908792" cy="365760"/>
           </a:xfrm>
           <a:prstGeom prst="rect">
             <a:avLst/>
@@ -6365,30 +8245,30 @@
               <a:buNone/>
             </a:pPr>
             <a:r>
-              <a:rPr lang="en-US" sz="1100" b="1" dirty="0">
-                <a:solidFill>
-                  <a:srgbClr val="12655A"/>
+              <a:rPr lang="en-US" sz="1300" i="1" dirty="0">
+                <a:solidFill>
+                  <a:srgbClr val="9FB6BC"/>
                 </a:solidFill>
                 <a:latin typeface="Calibri" pitchFamily="34" charset="0"/>
                 <a:ea typeface="Calibri" pitchFamily="34" charset="-122"/>
                 <a:cs typeface="Calibri" pitchFamily="34" charset="-120"/>
               </a:rPr>
-              <a:t>5</a:t>
-            </a:r>
-            <a:endParaRPr lang="en-US" sz="1100" dirty="0"/>
+              <a:t>이상으로 5주차 발표를 마치겠습니다. 질문 받겠습니다.</a:t>
+            </a:r>
+            <a:endParaRPr lang="en-US" sz="1300" dirty="0"/>
           </a:p>
         </p:txBody>
       </p:sp>
       <p:sp>
         <p:nvSpPr>
-          <p:cNvPr id="23" name="Text 21"/>
+          <p:cNvPr id="21" name="Text 19"/>
           <p:cNvSpPr txBox="1"/>
           <p:nvPr/>
         </p:nvSpPr>
         <p:spPr>
           <a:xfrm>
-            <a:off x="1508760" y="5102352"/>
-            <a:ext cx="9875520" cy="731520"/>
+            <a:off x="11365992" y="6355080"/>
+            <a:ext cx="548640" cy="320040"/>
           </a:xfrm>
           <a:prstGeom prst="rect">
             <a:avLst/>
@@ -6400,100 +8280,19 @@
           <a:bodyPr wrap="square" lIns="0" tIns="0" rIns="0" bIns="0" rtlCol="0" anchor="ctr"/>
           <a:lstStyle/>
           <a:p>
-            <a:pPr indent="0" marL="0">
-              <a:lnSpc>
-                <a:spcPct val="110000"/>
-              </a:lnSpc>
-              <a:buNone/>
-            </a:pPr>
-            <a:r>
-              <a:rPr lang="en-US" sz="1500" dirty="0">
-                <a:solidFill>
-                  <a:srgbClr val="16262E"/>
+            <a:pPr algn="r" indent="0" marL="0">
+              <a:buNone/>
+            </a:pPr>
+            <a:r>
+              <a:rPr lang="en-US" sz="1100" dirty="0">
+                <a:solidFill>
+                  <a:srgbClr val="9FB6BC"/>
                 </a:solidFill>
                 <a:latin typeface="Calibri" pitchFamily="34" charset="0"/>
                 <a:ea typeface="Calibri" pitchFamily="34" charset="-122"/>
                 <a:cs typeface="Calibri" pitchFamily="34" charset="-120"/>
               </a:rPr>
-              <a:t>논문: Related Work 마무리, System Architecture 초안 (선행연구 2편 반영)</a:t>
-            </a:r>
-            <a:endParaRPr lang="en-US" sz="1500" dirty="0"/>
-          </a:p>
-        </p:txBody>
-      </p:sp>
-      <p:sp>
-        <p:nvSpPr>
-          <p:cNvPr id="24" name="Text 22"/>
-          <p:cNvSpPr txBox="1"/>
-          <p:nvPr/>
-        </p:nvSpPr>
-        <p:spPr>
-          <a:xfrm>
-            <a:off x="640080" y="6172200"/>
-            <a:ext cx="10908792" cy="365760"/>
-          </a:xfrm>
-          <a:prstGeom prst="rect">
-            <a:avLst/>
-          </a:prstGeom>
-          <a:noFill/>
-          <a:ln/>
-        </p:spPr>
-        <p:txBody>
-          <a:bodyPr wrap="square" lIns="0" tIns="0" rIns="0" bIns="0" rtlCol="0" anchor="ctr"/>
-          <a:lstStyle/>
-          <a:p>
-            <a:pPr algn="ctr" indent="0" marL="0">
-              <a:buNone/>
-            </a:pPr>
-            <a:r>
-              <a:rPr lang="en-US" sz="1300" i="1" dirty="0">
-                <a:solidFill>
-                  <a:srgbClr val="9FB6BC"/>
-                </a:solidFill>
-                <a:latin typeface="Calibri" pitchFamily="34" charset="0"/>
-                <a:ea typeface="Calibri" pitchFamily="34" charset="-122"/>
-                <a:cs typeface="Calibri" pitchFamily="34" charset="-120"/>
-              </a:rPr>
-              <a:t>이상으로 5주차 발표를 마치겠습니다. 질문 받겠습니다.</a:t>
-            </a:r>
-            <a:endParaRPr lang="en-US" sz="1300" dirty="0"/>
-          </a:p>
-        </p:txBody>
-      </p:sp>
-      <p:sp>
-        <p:nvSpPr>
-          <p:cNvPr id="25" name="Text 23"/>
-          <p:cNvSpPr txBox="1"/>
-          <p:nvPr/>
-        </p:nvSpPr>
-        <p:spPr>
-          <a:xfrm>
-            <a:off x="11365992" y="6355080"/>
-            <a:ext cx="548640" cy="320040"/>
-          </a:xfrm>
-          <a:prstGeom prst="rect">
-            <a:avLst/>
-          </a:prstGeom>
-          <a:noFill/>
-          <a:ln/>
-        </p:spPr>
-        <p:txBody>
-          <a:bodyPr wrap="square" lIns="0" tIns="0" rIns="0" bIns="0" rtlCol="0" anchor="ctr"/>
-          <a:lstStyle/>
-          <a:p>
-            <a:pPr algn="r" indent="0" marL="0">
-              <a:buNone/>
-            </a:pPr>
-            <a:r>
-              <a:rPr lang="en-US" sz="1100" dirty="0">
-                <a:solidFill>
-                  <a:srgbClr val="9FB6BC"/>
-                </a:solidFill>
-                <a:latin typeface="Calibri" pitchFamily="34" charset="0"/>
-                <a:ea typeface="Calibri" pitchFamily="34" charset="-122"/>
-                <a:cs typeface="Calibri" pitchFamily="34" charset="-120"/>
-              </a:rPr>
-              <a:t>13</a:t>
+              <a:t>14</a:t>
             </a:r>
             <a:endParaRPr lang="en-US" sz="1100" dirty="0"/>
           </a:p>
@@ -6854,7 +8653,7 @@
                 <a:ea typeface="Calibri" pitchFamily="34" charset="-122"/>
                 <a:cs typeface="Calibri" pitchFamily="34" charset="-120"/>
               </a:rPr>
-              <a:t>04   판정 로직 1차 통합 · 근접 사각지대 보완</a:t>
+              <a:t>04   판정 로직 · 근접 보완 · 카메라 실측</a:t>
             </a:r>
             <a:endParaRPr lang="en-US" sz="1350" dirty="0"/>
           </a:p>
@@ -7792,7 +9591,7 @@
                           <a:ea typeface="Calibri" pitchFamily="34" charset="-122"/>
                           <a:cs typeface="Calibri" pitchFamily="34" charset="-120"/>
                         </a:rPr>
-                        <a:t>자세·근접 판정, 알림 상태머신 (--judge)</a:t>
+                        <a:t>자세·근접 판정, 알림 상태머신 (--judge) — 실시간 실측으로 기준 재보정</a:t>
                       </a:r>
                       <a:endParaRPr lang="en-US" sz="1150" dirty="0">
                         <a:latin typeface="Calibri" charset="0"/>
@@ -7998,7 +9797,7 @@
                           <a:ea typeface="Calibri" pitchFamily="34" charset="-122"/>
                           <a:cs typeface="Calibri" pitchFamily="34" charset="-120"/>
                         </a:rPr>
-                        <a:t>어깨너비 기반 거리 역산 — 실측 검증 대기</a:t>
+                        <a:t>어깨너비 역산 + 얼굴 depth 무효 시 근접 판정(실측 확인). 40cm 미만 정확도는 미검증</a:t>
                       </a:r>
                       <a:endParaRPr lang="en-US" sz="1150" dirty="0">
                         <a:latin typeface="Calibri" charset="0"/>
@@ -8130,13 +9929,13 @@
                       <a:r>
                         <a:rPr lang="en-US" sz="1150" b="1" dirty="0">
                           <a:solidFill>
-                            <a:srgbClr val="9A3F1F"/>
+                            <a:srgbClr val="12655A"/>
                           </a:solidFill>
                           <a:latin typeface="Calibri" pitchFamily="34" charset="0"/>
                           <a:ea typeface="Calibri" pitchFamily="34" charset="-122"/>
                           <a:cs typeface="Calibri" pitchFamily="34" charset="-120"/>
                         </a:rPr>
-                        <a:t>도구 완료</a:t>
+                        <a:t>완료</a:t>
                       </a:r>
                       <a:endParaRPr lang="en-US" sz="1150" dirty="0">
                         <a:latin typeface="Calibri" charset="0"/>
@@ -8183,7 +9982,7 @@
                       <a:tailEnd type="none" w="med" len="med"/>
                     </a:lnB>
                     <a:solidFill>
-                      <a:srgbClr val="FDEFE8"/>
+                      <a:srgbClr val="E9FBF7"/>
                     </a:solidFill>
                   </a:tcPr>
                 </a:tc>
@@ -8204,7 +10003,7 @@
                           <a:ea typeface="Calibri" pitchFamily="34" charset="-122"/>
                           <a:cs typeface="Calibri" pitchFamily="34" charset="-120"/>
                         </a:rPr>
-                        <a:t>비교 도구 구현·테스트. 카메라 반납 상태로 실측 미실시</a:t>
+                        <a:t>45/60/80cm 실측 → SDK 기본 + 구멍 메우기 ON 확정</a:t>
                       </a:r>
                       <a:endParaRPr lang="en-US" sz="1150" dirty="0">
                         <a:latin typeface="Calibri" charset="0"/>
@@ -8480,7 +10279,7 @@
                           <a:ea typeface="Calibri" pitchFamily="34" charset="-122"/>
                           <a:cs typeface="Calibri" pitchFamily="34" charset="-120"/>
                         </a:rPr>
-                        <a:t>논문 Related Work·System Architecture 초안</a:t>
+                        <a:t>카메라 수령 후 --judge 실측</a:t>
                       </a:r>
                       <a:endParaRPr lang="en-US" sz="1150" dirty="0">
                         <a:latin typeface="Calibri" charset="0"/>
@@ -8548,7 +10347,7 @@
                           <a:ea typeface="Calibri" pitchFamily="34" charset="-122"/>
                           <a:cs typeface="Calibri" pitchFamily="34" charset="-120"/>
                         </a:rPr>
-                        <a:t>진행 중</a:t>
+                        <a:t>1인 완료</a:t>
                       </a:r>
                       <a:endParaRPr lang="en-US" sz="1150" dirty="0">
                         <a:latin typeface="Calibri" charset="0"/>
@@ -8616,7 +10415,7 @@
                           <a:ea typeface="Calibri" pitchFamily="34" charset="-122"/>
                           <a:cs typeface="Calibri" pitchFamily="34" charset="-120"/>
                         </a:rPr>
-                        <a:t>선행연구 2편 정독 완료, 문서화 남음</a:t>
+                        <a:t>5자세 판정·알림 확인, 한 명 기준이라 참가자·거리 확대 필요</a:t>
                       </a:r>
                       <a:endParaRPr lang="en-US" sz="1150" dirty="0">
                         <a:latin typeface="Calibri" charset="0"/>
@@ -8705,7 +10504,7 @@
                 <a:ea typeface="Calibri" pitchFamily="34" charset="-122"/>
                 <a:cs typeface="Calibri" pitchFamily="34" charset="-120"/>
               </a:rPr>
-              <a:t>계획에 없던 것: 다인 환경 대응(자동 사용자 인식·추적), 라벨링 교차검증 도구, 교수님 피드백 반영 설계</a:t>
+              <a:t>계획에 없던 것: 다인 환경 대응(자동 사용자 인식·추적), 라벨링 교차검증 도구, 교수님 피드백 반영 설계, 실측에서 나온 문제 4건 수정</a:t>
             </a:r>
             <a:endParaRPr lang="en-US" sz="1200" dirty="0"/>
           </a:p>
@@ -10058,7 +11857,7 @@
                 <a:ea typeface="Calibri" pitchFamily="34" charset="-122"/>
                 <a:cs typeface="Calibri" pitchFamily="34" charset="-120"/>
               </a:rPr>
-              <a:t>•  대응: depth 필터 비교 도구를 만들어 구멍메우기 on/off 비교로 원인 확정 예정</a:t>
+              <a:t>•  대응: 필터 비교 도구로 45/60/80cm 실측 — 재현되지 않음(일회성). 단일 픽셀 조회가 배경을 집을 가능성은 남아 keypoint 주변 패치 조회를 검토</a:t>
             </a:r>
             <a:endParaRPr lang="en-US" sz="1350" dirty="0"/>
           </a:p>
@@ -11292,7 +13091,7 @@
                 <a:ea typeface="Calibri" pitchFamily="34" charset="-122"/>
                 <a:cs typeface="Calibri" pitchFamily="34" charset="-120"/>
               </a:rPr>
-              <a:t>자세(정상/주의/경고)와 화면 근접을 따로 판정해 OR로 결합 — 임계값은 1차 수집분 depth 중앙값 기반 잠정값(6주차 확정)</a:t>
+              <a:t>자세(정상/주의/경고)와 화면 근접을 따로 판정해 OR로 결합 — 임계값은 10/6 실측 로그(1인) 기반 잠정값 — 6주차에 참가자를 늘려 확정</a:t>
             </a:r>
             <a:endParaRPr lang="en-US" sz="1300" dirty="0"/>
           </a:p>
@@ -11685,7 +13484,7 @@
                           <a:ea typeface="Calibri" pitchFamily="34" charset="-122"/>
                           <a:cs typeface="Calibri" pitchFamily="34" charset="-120"/>
                         </a:rPr>
-                        <a:t>정상 머리 ≥ 0.44m, 숙임 0.34~0.39m</a:t>
+                        <a:t>정상 머리 0.43m, 앞숙임 0.35m (실측)</a:t>
                       </a:r>
                       <a:endParaRPr lang="en-US" sz="1150" dirty="0">
                         <a:latin typeface="Calibri" charset="0"/>
@@ -11823,7 +13622,7 @@
                           <a:ea typeface="Calibri" pitchFamily="34" charset="-122"/>
                           <a:cs typeface="Calibri" pitchFamily="34" charset="-120"/>
                         </a:rPr>
-                        <a:t>엉덩이−가슴 depth 차 &gt; +0.10m / &lt; −0.10m</a:t>
+                        <a:t>엉덩이−가슴 차 &gt; +0.10 / &lt; −0.11m, 또는 머리−가슴 차 ≤ 0.07m(기댐)</a:t>
                       </a:r>
                       <a:endParaRPr lang="en-US" sz="1150" dirty="0">
                         <a:latin typeface="Calibri" charset="0"/>
@@ -11891,7 +13690,7 @@
                           <a:ea typeface="Calibri" pitchFamily="34" charset="-122"/>
                           <a:cs typeface="Calibri" pitchFamily="34" charset="-120"/>
                         </a:rPr>
-                        <a:t>정상 −0.05, 숙임 +0.17, 기댐 −0.16</a:t>
+                        <a:t>정상 +0.05 / 기댐 −0.12, 머리−가슴 0.15 → 0.06</a:t>
                       </a:r>
                       <a:endParaRPr lang="en-US" sz="1150" dirty="0">
                         <a:latin typeface="Calibri" charset="0"/>
@@ -12097,7 +13896,7 @@
                           <a:ea typeface="Calibri" pitchFamily="34" charset="-122"/>
                           <a:cs typeface="Calibri" pitchFamily="34" charset="-120"/>
                         </a:rPr>
-                        <a:t>미검증 (keypoint만 사용)</a:t>
+                        <a:t>실측에서 정상 인식 (수치 미보정)</a:t>
                       </a:r>
                       <a:endParaRPr lang="en-US" sz="1150" dirty="0">
                         <a:latin typeface="Calibri" charset="0"/>
@@ -12547,7 +14346,7 @@
                 <a:ea typeface="Calibri" pitchFamily="34" charset="-122"/>
                 <a:cs typeface="Calibri" pitchFamily="34" charset="-120"/>
               </a:rPr>
-              <a:t>사진 59장의 depth 로그로 점검: 정상은 모두 정상, 숙임·기댐도 구분됨. 다만 일부 사진은 depth가 비어 판정 불가였고, 235장 전체는 depth가 사진에 안 남아 재계산이 불가능 — 앉아서 5자세를 시연하는 실측 검증이 필요합니다.</a:t>
+              <a:t>카메라 수령 후 실시간 실측(10/6, 1인): 정상 유지, 뒤로 기댐·앞숙임·좌우 기울임 판정 확인. 235장 전체는 depth가 사진에 안 남아 재계산이 불가능하고, 기준값은 한 명 기준이라 참가자·거리를 늘려 다시 보정해야 합니다.</a:t>
             </a:r>
             <a:endParaRPr lang="en-US" sz="1200" dirty="0"/>
           </a:p>
@@ -13134,7 +14933,7 @@
                 <a:ea typeface="Calibri" pitchFamily="34" charset="-122"/>
                 <a:cs typeface="Calibri" pitchFamily="34" charset="-120"/>
               </a:rPr>
-              <a:t>•  40cm 미만에서의 정확도는 미검증 (카메라 필요)</a:t>
+              <a:t>•  40cm 미만 어깨너비 추정의 정확도는 미검증. 대신 얼굴 depth가 무효가 되는 것 자체를 근접 신호로 써서 실측 확인 (다음 슬라이드)</a:t>
             </a:r>
             <a:endParaRPr lang="en-US" sz="1400" dirty="0"/>
           </a:p>
@@ -13274,7 +15073,7 @@
                 <a:ea typeface="Calibri" pitchFamily="34" charset="-122"/>
                 <a:cs typeface="Calibri" pitchFamily="34" charset="-120"/>
               </a:rPr>
-              <a:t>FEEDBACK MAPPING</a:t>
+              <a:t>LIVE TEST FINDINGS</a:t>
             </a:r>
             <a:endParaRPr lang="en-US" sz="1200" dirty="0"/>
           </a:p>
@@ -13313,1694 +15112,860 @@
                 <a:ea typeface="Arial" pitchFamily="34" charset="-122"/>
                 <a:cs typeface="Arial" pitchFamily="34" charset="-120"/>
               </a:rPr>
-              <a:t>교수님 피드백과 우리 상태</a:t>
+              <a:t>카메라 실측으로 드러난 문제와 대응</a:t>
             </a:r>
             <a:endParaRPr lang="en-US" sz="2700" dirty="0"/>
           </a:p>
         </p:txBody>
       </p:sp>
-      <p:graphicFrame>
-        <p:nvGraphicFramePr>
-          <p:cNvPr id="10" name="Table 0"/>
-          <p:cNvGraphicFramePr>
-            <a:graphicFrameLocks noGrp="1"/>
-          </p:cNvGraphicFramePr>
-          <p:nvPr>
-            <p:extLst>
-              <p:ext uri="{D42A27DB-BD31-4B8C-83A1-F6EECF244321}">
-                <p14:modId xmlns:p14="http://schemas.microsoft.com/office/powerpoint/2010/main" val="1579011935"/>
-              </p:ext>
-            </p:extLst>
-          </p:nvPr>
-        </p:nvGraphicFramePr>
-        <p:xfrm>
-          <a:off x="640080" y="1691640"/>
-          <a:ext cx="10908792" cy="914400"/>
-        </p:xfrm>
-        <a:graphic>
-          <a:graphicData uri="http://schemas.openxmlformats.org/drawingml/2006/table">
-            <a:tbl>
-              <a:tblPr/>
-              <a:tblGrid>
-                <a:gridCol w="3657600"/>
-                <a:gridCol w="1371600"/>
-                <a:gridCol w="5879592"/>
-              </a:tblGrid>
-              <a:tr h="566928">
-                <a:tc>
-                  <a:txBody>
-                    <a:bodyPr/>
-                    <a:lstStyle/>
-                    <a:p>
-                      <a:pPr indent="0" marL="0">
-                        <a:buNone/>
-                      </a:pPr>
-                      <a:r>
-                        <a:rPr lang="en-US" sz="1150" b="1" dirty="0">
-                          <a:solidFill>
-                            <a:srgbClr val="EAF3F1"/>
-                          </a:solidFill>
-                          <a:latin typeface="Calibri" pitchFamily="34" charset="0"/>
-                          <a:ea typeface="Calibri" pitchFamily="34" charset="-122"/>
-                          <a:cs typeface="Calibri" pitchFamily="34" charset="-120"/>
-                        </a:rPr>
-                        <a:t>피드백</a:t>
-                      </a:r>
-                      <a:endParaRPr lang="en-US" sz="1150" dirty="0">
-                        <a:latin typeface="Calibri" charset="0"/>
-                        <a:ea typeface="Calibri" charset="0"/>
-                        <a:cs typeface="Calibri" charset="0"/>
-                      </a:endParaRPr>
-                    </a:p>
-                  </a:txBody>
-                  <a:tcPr marL="91440" marR="91440" marT="45720" marB="45720" anchor="ctr">
-                    <a:lnL w="19050" cap="flat" cmpd="sng" algn="ctr">
-                      <a:solidFill>
-                        <a:srgbClr val="0B1A26"/>
-                      </a:solidFill>
-                      <a:prstDash val="solid"/>
-                      <a:round/>
-                      <a:headEnd type="none" w="med" len="med"/>
-                      <a:tailEnd type="none" w="med" len="med"/>
-                    </a:lnL>
-                    <a:lnR w="19050" cap="flat" cmpd="sng" algn="ctr">
-                      <a:solidFill>
-                        <a:srgbClr val="0B1A26"/>
-                      </a:solidFill>
-                      <a:prstDash val="solid"/>
-                      <a:round/>
-                      <a:headEnd type="none" w="med" len="med"/>
-                      <a:tailEnd type="none" w="med" len="med"/>
-                    </a:lnR>
-                    <a:lnT w="19050" cap="flat" cmpd="sng" algn="ctr">
-                      <a:solidFill>
-                        <a:srgbClr val="0B1A26"/>
-                      </a:solidFill>
-                      <a:prstDash val="solid"/>
-                      <a:round/>
-                      <a:headEnd type="none" w="med" len="med"/>
-                      <a:tailEnd type="none" w="med" len="med"/>
-                    </a:lnT>
-                    <a:lnB w="19050" cap="flat" cmpd="sng" algn="ctr">
-                      <a:solidFill>
-                        <a:srgbClr val="0B1A26"/>
-                      </a:solidFill>
-                      <a:prstDash val="solid"/>
-                      <a:round/>
-                      <a:headEnd type="none" w="med" len="med"/>
-                      <a:tailEnd type="none" w="med" len="med"/>
-                    </a:lnB>
-                    <a:solidFill>
-                      <a:srgbClr val="12655A"/>
-                    </a:solidFill>
-                  </a:tcPr>
-                </a:tc>
-                <a:tc>
-                  <a:txBody>
-                    <a:bodyPr/>
-                    <a:lstStyle/>
-                    <a:p>
-                      <a:pPr indent="0" marL="0">
-                        <a:buNone/>
-                      </a:pPr>
-                      <a:r>
-                        <a:rPr lang="en-US" sz="1150" b="1" dirty="0">
-                          <a:solidFill>
-                            <a:srgbClr val="EAF3F1"/>
-                          </a:solidFill>
-                          <a:latin typeface="Calibri" pitchFamily="34" charset="0"/>
-                          <a:ea typeface="Calibri" pitchFamily="34" charset="-122"/>
-                          <a:cs typeface="Calibri" pitchFamily="34" charset="-120"/>
-                        </a:rPr>
-                        <a:t>현재 상태</a:t>
-                      </a:r>
-                      <a:endParaRPr lang="en-US" sz="1150" dirty="0">
-                        <a:latin typeface="Calibri" charset="0"/>
-                        <a:ea typeface="Calibri" charset="0"/>
-                        <a:cs typeface="Calibri" charset="0"/>
-                      </a:endParaRPr>
-                    </a:p>
-                  </a:txBody>
-                  <a:tcPr marL="91440" marR="91440" marT="45720" marB="45720" anchor="ctr">
-                    <a:lnL w="19050" cap="flat" cmpd="sng" algn="ctr">
-                      <a:solidFill>
-                        <a:srgbClr val="0B1A26"/>
-                      </a:solidFill>
-                      <a:prstDash val="solid"/>
-                      <a:round/>
-                      <a:headEnd type="none" w="med" len="med"/>
-                      <a:tailEnd type="none" w="med" len="med"/>
-                    </a:lnL>
-                    <a:lnR w="19050" cap="flat" cmpd="sng" algn="ctr">
-                      <a:solidFill>
-                        <a:srgbClr val="0B1A26"/>
-                      </a:solidFill>
-                      <a:prstDash val="solid"/>
-                      <a:round/>
-                      <a:headEnd type="none" w="med" len="med"/>
-                      <a:tailEnd type="none" w="med" len="med"/>
-                    </a:lnR>
-                    <a:lnT w="19050" cap="flat" cmpd="sng" algn="ctr">
-                      <a:solidFill>
-                        <a:srgbClr val="0B1A26"/>
-                      </a:solidFill>
-                      <a:prstDash val="solid"/>
-                      <a:round/>
-                      <a:headEnd type="none" w="med" len="med"/>
-                      <a:tailEnd type="none" w="med" len="med"/>
-                    </a:lnT>
-                    <a:lnB w="19050" cap="flat" cmpd="sng" algn="ctr">
-                      <a:solidFill>
-                        <a:srgbClr val="0B1A26"/>
-                      </a:solidFill>
-                      <a:prstDash val="solid"/>
-                      <a:round/>
-                      <a:headEnd type="none" w="med" len="med"/>
-                      <a:tailEnd type="none" w="med" len="med"/>
-                    </a:lnB>
-                    <a:solidFill>
-                      <a:srgbClr val="12655A"/>
-                    </a:solidFill>
-                  </a:tcPr>
-                </a:tc>
-                <a:tc>
-                  <a:txBody>
-                    <a:bodyPr/>
-                    <a:lstStyle/>
-                    <a:p>
-                      <a:pPr indent="0" marL="0">
-                        <a:buNone/>
-                      </a:pPr>
-                      <a:r>
-                        <a:rPr lang="en-US" sz="1150" b="1" dirty="0">
-                          <a:solidFill>
-                            <a:srgbClr val="EAF3F1"/>
-                          </a:solidFill>
-                          <a:latin typeface="Calibri" pitchFamily="34" charset="0"/>
-                          <a:ea typeface="Calibri" pitchFamily="34" charset="-122"/>
-                          <a:cs typeface="Calibri" pitchFamily="34" charset="-120"/>
-                        </a:rPr>
-                        <a:t>대응</a:t>
-                      </a:r>
-                      <a:endParaRPr lang="en-US" sz="1150" dirty="0">
-                        <a:latin typeface="Calibri" charset="0"/>
-                        <a:ea typeface="Calibri" charset="0"/>
-                        <a:cs typeface="Calibri" charset="0"/>
-                      </a:endParaRPr>
-                    </a:p>
-                  </a:txBody>
-                  <a:tcPr marL="91440" marR="91440" marT="45720" marB="45720" anchor="ctr">
-                    <a:lnL w="19050" cap="flat" cmpd="sng" algn="ctr">
-                      <a:solidFill>
-                        <a:srgbClr val="0B1A26"/>
-                      </a:solidFill>
-                      <a:prstDash val="solid"/>
-                      <a:round/>
-                      <a:headEnd type="none" w="med" len="med"/>
-                      <a:tailEnd type="none" w="med" len="med"/>
-                    </a:lnL>
-                    <a:lnR w="19050" cap="flat" cmpd="sng" algn="ctr">
-                      <a:solidFill>
-                        <a:srgbClr val="0B1A26"/>
-                      </a:solidFill>
-                      <a:prstDash val="solid"/>
-                      <a:round/>
-                      <a:headEnd type="none" w="med" len="med"/>
-                      <a:tailEnd type="none" w="med" len="med"/>
-                    </a:lnR>
-                    <a:lnT w="19050" cap="flat" cmpd="sng" algn="ctr">
-                      <a:solidFill>
-                        <a:srgbClr val="0B1A26"/>
-                      </a:solidFill>
-                      <a:prstDash val="solid"/>
-                      <a:round/>
-                      <a:headEnd type="none" w="med" len="med"/>
-                      <a:tailEnd type="none" w="med" len="med"/>
-                    </a:lnT>
-                    <a:lnB w="19050" cap="flat" cmpd="sng" algn="ctr">
-                      <a:solidFill>
-                        <a:srgbClr val="0B1A26"/>
-                      </a:solidFill>
-                      <a:prstDash val="solid"/>
-                      <a:round/>
-                      <a:headEnd type="none" w="med" len="med"/>
-                      <a:tailEnd type="none" w="med" len="med"/>
-                    </a:lnB>
-                    <a:solidFill>
-                      <a:srgbClr val="12655A"/>
-                    </a:solidFill>
-                  </a:tcPr>
-                </a:tc>
-              </a:tr>
-              <a:tr h="566928">
-                <a:tc>
-                  <a:txBody>
-                    <a:bodyPr/>
-                    <a:lstStyle/>
-                    <a:p>
-                      <a:pPr indent="0" marL="0">
-                        <a:buNone/>
-                      </a:pPr>
-                      <a:r>
-                        <a:rPr lang="en-US" sz="1150" dirty="0">
-                          <a:solidFill>
-                            <a:srgbClr val="16262E"/>
-                          </a:solidFill>
-                          <a:latin typeface="Calibri" pitchFamily="34" charset="0"/>
-                          <a:ea typeface="Calibri" pitchFamily="34" charset="-122"/>
-                          <a:cs typeface="Calibri" pitchFamily="34" charset="-120"/>
-                        </a:rPr>
-                        <a:t>목표를 최소 fps가 아닌 최대 fps로</a:t>
-                      </a:r>
-                      <a:endParaRPr lang="en-US" sz="1150" dirty="0">
-                        <a:latin typeface="Calibri" charset="0"/>
-                        <a:ea typeface="Calibri" charset="0"/>
-                        <a:cs typeface="Calibri" charset="0"/>
-                      </a:endParaRPr>
-                    </a:p>
-                  </a:txBody>
-                  <a:tcPr marL="91440" marR="91440" marT="45720" marB="45720" anchor="ctr">
-                    <a:lnL w="19050" cap="flat" cmpd="sng" algn="ctr">
-                      <a:solidFill>
-                        <a:srgbClr val="0B1A26"/>
-                      </a:solidFill>
-                      <a:prstDash val="solid"/>
-                      <a:round/>
-                      <a:headEnd type="none" w="med" len="med"/>
-                      <a:tailEnd type="none" w="med" len="med"/>
-                    </a:lnL>
-                    <a:lnR w="19050" cap="flat" cmpd="sng" algn="ctr">
-                      <a:solidFill>
-                        <a:srgbClr val="0B1A26"/>
-                      </a:solidFill>
-                      <a:prstDash val="solid"/>
-                      <a:round/>
-                      <a:headEnd type="none" w="med" len="med"/>
-                      <a:tailEnd type="none" w="med" len="med"/>
-                    </a:lnR>
-                    <a:lnT w="19050" cap="flat" cmpd="sng" algn="ctr">
-                      <a:solidFill>
-                        <a:srgbClr val="0B1A26"/>
-                      </a:solidFill>
-                      <a:prstDash val="solid"/>
-                      <a:round/>
-                      <a:headEnd type="none" w="med" len="med"/>
-                      <a:tailEnd type="none" w="med" len="med"/>
-                    </a:lnT>
-                    <a:lnB w="19050" cap="flat" cmpd="sng" algn="ctr">
-                      <a:solidFill>
-                        <a:srgbClr val="0B1A26"/>
-                      </a:solidFill>
-                      <a:prstDash val="solid"/>
-                      <a:round/>
-                      <a:headEnd type="none" w="med" len="med"/>
-                      <a:tailEnd type="none" w="med" len="med"/>
-                    </a:lnB>
-                    <a:solidFill>
-                      <a:srgbClr val="FFFFFF"/>
-                    </a:solidFill>
-                  </a:tcPr>
-                </a:tc>
-                <a:tc>
-                  <a:txBody>
-                    <a:bodyPr/>
-                    <a:lstStyle/>
-                    <a:p>
-                      <a:pPr indent="0" marL="0">
-                        <a:buNone/>
-                      </a:pPr>
-                      <a:r>
-                        <a:rPr lang="en-US" sz="1150" b="1" dirty="0">
-                          <a:solidFill>
-                            <a:srgbClr val="9A3F1F"/>
-                          </a:solidFill>
-                          <a:latin typeface="Calibri" pitchFamily="34" charset="0"/>
-                          <a:ea typeface="Calibri" pitchFamily="34" charset="-122"/>
-                          <a:cs typeface="Calibri" pitchFamily="34" charset="-120"/>
-                        </a:rPr>
-                        <a:t>방향 수정</a:t>
-                      </a:r>
-                      <a:endParaRPr lang="en-US" sz="1150" dirty="0">
-                        <a:latin typeface="Calibri" charset="0"/>
-                        <a:ea typeface="Calibri" charset="0"/>
-                        <a:cs typeface="Calibri" charset="0"/>
-                      </a:endParaRPr>
-                    </a:p>
-                  </a:txBody>
-                  <a:tcPr marL="91440" marR="91440" marT="45720" marB="45720" anchor="ctr">
-                    <a:lnL w="19050" cap="flat" cmpd="sng" algn="ctr">
-                      <a:solidFill>
-                        <a:srgbClr val="0B1A26"/>
-                      </a:solidFill>
-                      <a:prstDash val="solid"/>
-                      <a:round/>
-                      <a:headEnd type="none" w="med" len="med"/>
-                      <a:tailEnd type="none" w="med" len="med"/>
-                    </a:lnL>
-                    <a:lnR w="19050" cap="flat" cmpd="sng" algn="ctr">
-                      <a:solidFill>
-                        <a:srgbClr val="0B1A26"/>
-                      </a:solidFill>
-                      <a:prstDash val="solid"/>
-                      <a:round/>
-                      <a:headEnd type="none" w="med" len="med"/>
-                      <a:tailEnd type="none" w="med" len="med"/>
-                    </a:lnR>
-                    <a:lnT w="19050" cap="flat" cmpd="sng" algn="ctr">
-                      <a:solidFill>
-                        <a:srgbClr val="0B1A26"/>
-                      </a:solidFill>
-                      <a:prstDash val="solid"/>
-                      <a:round/>
-                      <a:headEnd type="none" w="med" len="med"/>
-                      <a:tailEnd type="none" w="med" len="med"/>
-                    </a:lnT>
-                    <a:lnB w="19050" cap="flat" cmpd="sng" algn="ctr">
-                      <a:solidFill>
-                        <a:srgbClr val="0B1A26"/>
-                      </a:solidFill>
-                      <a:prstDash val="solid"/>
-                      <a:round/>
-                      <a:headEnd type="none" w="med" len="med"/>
-                      <a:tailEnd type="none" w="med" len="med"/>
-                    </a:lnB>
-                    <a:solidFill>
-                      <a:srgbClr val="FDEFE8"/>
-                    </a:solidFill>
-                  </a:tcPr>
-                </a:tc>
-                <a:tc>
-                  <a:txBody>
-                    <a:bodyPr/>
-                    <a:lstStyle/>
-                    <a:p>
-                      <a:pPr indent="0" marL="0">
-                        <a:buNone/>
-                      </a:pPr>
-                      <a:r>
-                        <a:rPr lang="en-US" sz="1150" dirty="0">
-                          <a:solidFill>
-                            <a:srgbClr val="16262E"/>
-                          </a:solidFill>
-                          <a:latin typeface="Calibri" pitchFamily="34" charset="0"/>
-                          <a:ea typeface="Calibri" pitchFamily="34" charset="-122"/>
-                          <a:cs typeface="Calibri" pitchFamily="34" charset="-120"/>
-                        </a:rPr>
-                        <a:t>캡처 29.4fps 실측 있음 → 추론·마스킹 포함 전체 파이프라인 fps를 재측정</a:t>
-                      </a:r>
-                      <a:endParaRPr lang="en-US" sz="1150" dirty="0">
-                        <a:latin typeface="Calibri" charset="0"/>
-                        <a:ea typeface="Calibri" charset="0"/>
-                        <a:cs typeface="Calibri" charset="0"/>
-                      </a:endParaRPr>
-                    </a:p>
-                  </a:txBody>
-                  <a:tcPr marL="91440" marR="91440" marT="45720" marB="45720" anchor="ctr">
-                    <a:lnL w="19050" cap="flat" cmpd="sng" algn="ctr">
-                      <a:solidFill>
-                        <a:srgbClr val="0B1A26"/>
-                      </a:solidFill>
-                      <a:prstDash val="solid"/>
-                      <a:round/>
-                      <a:headEnd type="none" w="med" len="med"/>
-                      <a:tailEnd type="none" w="med" len="med"/>
-                    </a:lnL>
-                    <a:lnR w="19050" cap="flat" cmpd="sng" algn="ctr">
-                      <a:solidFill>
-                        <a:srgbClr val="0B1A26"/>
-                      </a:solidFill>
-                      <a:prstDash val="solid"/>
-                      <a:round/>
-                      <a:headEnd type="none" w="med" len="med"/>
-                      <a:tailEnd type="none" w="med" len="med"/>
-                    </a:lnR>
-                    <a:lnT w="19050" cap="flat" cmpd="sng" algn="ctr">
-                      <a:solidFill>
-                        <a:srgbClr val="0B1A26"/>
-                      </a:solidFill>
-                      <a:prstDash val="solid"/>
-                      <a:round/>
-                      <a:headEnd type="none" w="med" len="med"/>
-                      <a:tailEnd type="none" w="med" len="med"/>
-                    </a:lnT>
-                    <a:lnB w="19050" cap="flat" cmpd="sng" algn="ctr">
-                      <a:solidFill>
-                        <a:srgbClr val="0B1A26"/>
-                      </a:solidFill>
-                      <a:prstDash val="solid"/>
-                      <a:round/>
-                      <a:headEnd type="none" w="med" len="med"/>
-                      <a:tailEnd type="none" w="med" len="med"/>
-                    </a:lnB>
-                    <a:solidFill>
-                      <a:srgbClr val="FFFFFF"/>
-                    </a:solidFill>
-                  </a:tcPr>
-                </a:tc>
-              </a:tr>
-              <a:tr h="566928">
-                <a:tc>
-                  <a:txBody>
-                    <a:bodyPr/>
-                    <a:lstStyle/>
-                    <a:p>
-                      <a:pPr indent="0" marL="0">
-                        <a:buNone/>
-                      </a:pPr>
-                      <a:r>
-                        <a:rPr lang="en-US" sz="1150" dirty="0">
-                          <a:solidFill>
-                            <a:srgbClr val="16262E"/>
-                          </a:solidFill>
-                          <a:latin typeface="Calibri" pitchFamily="34" charset="0"/>
-                          <a:ea typeface="Calibri" pitchFamily="34" charset="-122"/>
-                          <a:cs typeface="Calibri" pitchFamily="34" charset="-120"/>
-                        </a:rPr>
-                        <a:t>허리 위치 추정</a:t>
-                      </a:r>
-                      <a:endParaRPr lang="en-US" sz="1150" dirty="0">
-                        <a:latin typeface="Calibri" charset="0"/>
-                        <a:ea typeface="Calibri" charset="0"/>
-                        <a:cs typeface="Calibri" charset="0"/>
-                      </a:endParaRPr>
-                    </a:p>
-                  </a:txBody>
-                  <a:tcPr marL="91440" marR="91440" marT="45720" marB="45720" anchor="ctr">
-                    <a:lnL w="19050" cap="flat" cmpd="sng" algn="ctr">
-                      <a:solidFill>
-                        <a:srgbClr val="0B1A26"/>
-                      </a:solidFill>
-                      <a:prstDash val="solid"/>
-                      <a:round/>
-                      <a:headEnd type="none" w="med" len="med"/>
-                      <a:tailEnd type="none" w="med" len="med"/>
-                    </a:lnL>
-                    <a:lnR w="19050" cap="flat" cmpd="sng" algn="ctr">
-                      <a:solidFill>
-                        <a:srgbClr val="0B1A26"/>
-                      </a:solidFill>
-                      <a:prstDash val="solid"/>
-                      <a:round/>
-                      <a:headEnd type="none" w="med" len="med"/>
-                      <a:tailEnd type="none" w="med" len="med"/>
-                    </a:lnR>
-                    <a:lnT w="19050" cap="flat" cmpd="sng" algn="ctr">
-                      <a:solidFill>
-                        <a:srgbClr val="0B1A26"/>
-                      </a:solidFill>
-                      <a:prstDash val="solid"/>
-                      <a:round/>
-                      <a:headEnd type="none" w="med" len="med"/>
-                      <a:tailEnd type="none" w="med" len="med"/>
-                    </a:lnT>
-                    <a:lnB w="19050" cap="flat" cmpd="sng" algn="ctr">
-                      <a:solidFill>
-                        <a:srgbClr val="0B1A26"/>
-                      </a:solidFill>
-                      <a:prstDash val="solid"/>
-                      <a:round/>
-                      <a:headEnd type="none" w="med" len="med"/>
-                      <a:tailEnd type="none" w="med" len="med"/>
-                    </a:lnB>
-                    <a:solidFill>
-                      <a:srgbClr val="FFFFFF"/>
-                    </a:solidFill>
-                  </a:tcPr>
-                </a:tc>
-                <a:tc>
-                  <a:txBody>
-                    <a:bodyPr/>
-                    <a:lstStyle/>
-                    <a:p>
-                      <a:pPr indent="0" marL="0">
-                        <a:buNone/>
-                      </a:pPr>
-                      <a:r>
-                        <a:rPr lang="en-US" sz="1150" b="1" dirty="0">
-                          <a:solidFill>
-                            <a:srgbClr val="12655A"/>
-                          </a:solidFill>
-                          <a:latin typeface="Calibri" pitchFamily="34" charset="0"/>
-                          <a:ea typeface="Calibri" pitchFamily="34" charset="-122"/>
-                          <a:cs typeface="Calibri" pitchFamily="34" charset="-120"/>
-                        </a:rPr>
-                        <a:t>반영됨</a:t>
-                      </a:r>
-                      <a:endParaRPr lang="en-US" sz="1150" dirty="0">
-                        <a:latin typeface="Calibri" charset="0"/>
-                        <a:ea typeface="Calibri" charset="0"/>
-                        <a:cs typeface="Calibri" charset="0"/>
-                      </a:endParaRPr>
-                    </a:p>
-                  </a:txBody>
-                  <a:tcPr marL="91440" marR="91440" marT="45720" marB="45720" anchor="ctr">
-                    <a:lnL w="19050" cap="flat" cmpd="sng" algn="ctr">
-                      <a:solidFill>
-                        <a:srgbClr val="0B1A26"/>
-                      </a:solidFill>
-                      <a:prstDash val="solid"/>
-                      <a:round/>
-                      <a:headEnd type="none" w="med" len="med"/>
-                      <a:tailEnd type="none" w="med" len="med"/>
-                    </a:lnL>
-                    <a:lnR w="19050" cap="flat" cmpd="sng" algn="ctr">
-                      <a:solidFill>
-                        <a:srgbClr val="0B1A26"/>
-                      </a:solidFill>
-                      <a:prstDash val="solid"/>
-                      <a:round/>
-                      <a:headEnd type="none" w="med" len="med"/>
-                      <a:tailEnd type="none" w="med" len="med"/>
-                    </a:lnR>
-                    <a:lnT w="19050" cap="flat" cmpd="sng" algn="ctr">
-                      <a:solidFill>
-                        <a:srgbClr val="0B1A26"/>
-                      </a:solidFill>
-                      <a:prstDash val="solid"/>
-                      <a:round/>
-                      <a:headEnd type="none" w="med" len="med"/>
-                      <a:tailEnd type="none" w="med" len="med"/>
-                    </a:lnT>
-                    <a:lnB w="19050" cap="flat" cmpd="sng" algn="ctr">
-                      <a:solidFill>
-                        <a:srgbClr val="0B1A26"/>
-                      </a:solidFill>
-                      <a:prstDash val="solid"/>
-                      <a:round/>
-                      <a:headEnd type="none" w="med" len="med"/>
-                      <a:tailEnd type="none" w="med" len="med"/>
-                    </a:lnB>
-                    <a:solidFill>
-                      <a:srgbClr val="E9FBF7"/>
-                    </a:solidFill>
-                  </a:tcPr>
-                </a:tc>
-                <a:tc>
-                  <a:txBody>
-                    <a:bodyPr/>
-                    <a:lstStyle/>
-                    <a:p>
-                      <a:pPr indent="0" marL="0">
-                        <a:buNone/>
-                      </a:pPr>
-                      <a:r>
-                        <a:rPr lang="en-US" sz="1150" dirty="0">
-                          <a:solidFill>
-                            <a:srgbClr val="16262E"/>
-                          </a:solidFill>
-                          <a:latin typeface="Calibri" pitchFamily="34" charset="0"/>
-                          <a:ea typeface="Calibri" pitchFamily="34" charset="-122"/>
-                          <a:cs typeface="Calibri" pitchFamily="34" charset="-120"/>
-                        </a:rPr>
-                        <a:t>가림 보정 스무딩 + 엉덩이−가슴 depth 차</a:t>
-                      </a:r>
-                      <a:endParaRPr lang="en-US" sz="1150" dirty="0">
-                        <a:latin typeface="Calibri" charset="0"/>
-                        <a:ea typeface="Calibri" charset="0"/>
-                        <a:cs typeface="Calibri" charset="0"/>
-                      </a:endParaRPr>
-                    </a:p>
-                  </a:txBody>
-                  <a:tcPr marL="91440" marR="91440" marT="45720" marB="45720" anchor="ctr">
-                    <a:lnL w="19050" cap="flat" cmpd="sng" algn="ctr">
-                      <a:solidFill>
-                        <a:srgbClr val="0B1A26"/>
-                      </a:solidFill>
-                      <a:prstDash val="solid"/>
-                      <a:round/>
-                      <a:headEnd type="none" w="med" len="med"/>
-                      <a:tailEnd type="none" w="med" len="med"/>
-                    </a:lnL>
-                    <a:lnR w="19050" cap="flat" cmpd="sng" algn="ctr">
-                      <a:solidFill>
-                        <a:srgbClr val="0B1A26"/>
-                      </a:solidFill>
-                      <a:prstDash val="solid"/>
-                      <a:round/>
-                      <a:headEnd type="none" w="med" len="med"/>
-                      <a:tailEnd type="none" w="med" len="med"/>
-                    </a:lnR>
-                    <a:lnT w="19050" cap="flat" cmpd="sng" algn="ctr">
-                      <a:solidFill>
-                        <a:srgbClr val="0B1A26"/>
-                      </a:solidFill>
-                      <a:prstDash val="solid"/>
-                      <a:round/>
-                      <a:headEnd type="none" w="med" len="med"/>
-                      <a:tailEnd type="none" w="med" len="med"/>
-                    </a:lnT>
-                    <a:lnB w="19050" cap="flat" cmpd="sng" algn="ctr">
-                      <a:solidFill>
-                        <a:srgbClr val="0B1A26"/>
-                      </a:solidFill>
-                      <a:prstDash val="solid"/>
-                      <a:round/>
-                      <a:headEnd type="none" w="med" len="med"/>
-                      <a:tailEnd type="none" w="med" len="med"/>
-                    </a:lnB>
-                    <a:solidFill>
-                      <a:srgbClr val="FFFFFF"/>
-                    </a:solidFill>
-                  </a:tcPr>
-                </a:tc>
-              </a:tr>
-              <a:tr h="566928">
-                <a:tc>
-                  <a:txBody>
-                    <a:bodyPr/>
-                    <a:lstStyle/>
-                    <a:p>
-                      <a:pPr indent="0" marL="0">
-                        <a:buNone/>
-                      </a:pPr>
-                      <a:r>
-                        <a:rPr lang="en-US" sz="1150" dirty="0">
-                          <a:solidFill>
-                            <a:srgbClr val="16262E"/>
-                          </a:solidFill>
-                          <a:latin typeface="Calibri" pitchFamily="34" charset="0"/>
-                          <a:ea typeface="Calibri" pitchFamily="34" charset="-122"/>
-                          <a:cs typeface="Calibri" pitchFamily="34" charset="-120"/>
-                        </a:rPr>
-                        <a:t>정면 depth로 측면 자세 추정</a:t>
-                      </a:r>
-                      <a:endParaRPr lang="en-US" sz="1150" dirty="0">
-                        <a:latin typeface="Calibri" charset="0"/>
-                        <a:ea typeface="Calibri" charset="0"/>
-                        <a:cs typeface="Calibri" charset="0"/>
-                      </a:endParaRPr>
-                    </a:p>
-                  </a:txBody>
-                  <a:tcPr marL="91440" marR="91440" marT="45720" marB="45720" anchor="ctr">
-                    <a:lnL w="19050" cap="flat" cmpd="sng" algn="ctr">
-                      <a:solidFill>
-                        <a:srgbClr val="0B1A26"/>
-                      </a:solidFill>
-                      <a:prstDash val="solid"/>
-                      <a:round/>
-                      <a:headEnd type="none" w="med" len="med"/>
-                      <a:tailEnd type="none" w="med" len="med"/>
-                    </a:lnL>
-                    <a:lnR w="19050" cap="flat" cmpd="sng" algn="ctr">
-                      <a:solidFill>
-                        <a:srgbClr val="0B1A26"/>
-                      </a:solidFill>
-                      <a:prstDash val="solid"/>
-                      <a:round/>
-                      <a:headEnd type="none" w="med" len="med"/>
-                      <a:tailEnd type="none" w="med" len="med"/>
-                    </a:lnR>
-                    <a:lnT w="19050" cap="flat" cmpd="sng" algn="ctr">
-                      <a:solidFill>
-                        <a:srgbClr val="0B1A26"/>
-                      </a:solidFill>
-                      <a:prstDash val="solid"/>
-                      <a:round/>
-                      <a:headEnd type="none" w="med" len="med"/>
-                      <a:tailEnd type="none" w="med" len="med"/>
-                    </a:lnT>
-                    <a:lnB w="19050" cap="flat" cmpd="sng" algn="ctr">
-                      <a:solidFill>
-                        <a:srgbClr val="0B1A26"/>
-                      </a:solidFill>
-                      <a:prstDash val="solid"/>
-                      <a:round/>
-                      <a:headEnd type="none" w="med" len="med"/>
-                      <a:tailEnd type="none" w="med" len="med"/>
-                    </a:lnB>
-                    <a:solidFill>
-                      <a:srgbClr val="FFFFFF"/>
-                    </a:solidFill>
-                  </a:tcPr>
-                </a:tc>
-                <a:tc>
-                  <a:txBody>
-                    <a:bodyPr/>
-                    <a:lstStyle/>
-                    <a:p>
-                      <a:pPr indent="0" marL="0">
-                        <a:buNone/>
-                      </a:pPr>
-                      <a:r>
-                        <a:rPr lang="en-US" sz="1150" b="1" dirty="0">
-                          <a:solidFill>
-                            <a:srgbClr val="12655A"/>
-                          </a:solidFill>
-                          <a:latin typeface="Calibri" pitchFamily="34" charset="0"/>
-                          <a:ea typeface="Calibri" pitchFamily="34" charset="-122"/>
-                          <a:cs typeface="Calibri" pitchFamily="34" charset="-120"/>
-                        </a:rPr>
-                        <a:t>반영됨</a:t>
-                      </a:r>
-                      <a:endParaRPr lang="en-US" sz="1150" dirty="0">
-                        <a:latin typeface="Calibri" charset="0"/>
-                        <a:ea typeface="Calibri" charset="0"/>
-                        <a:cs typeface="Calibri" charset="0"/>
-                      </a:endParaRPr>
-                    </a:p>
-                  </a:txBody>
-                  <a:tcPr marL="91440" marR="91440" marT="45720" marB="45720" anchor="ctr">
-                    <a:lnL w="19050" cap="flat" cmpd="sng" algn="ctr">
-                      <a:solidFill>
-                        <a:srgbClr val="0B1A26"/>
-                      </a:solidFill>
-                      <a:prstDash val="solid"/>
-                      <a:round/>
-                      <a:headEnd type="none" w="med" len="med"/>
-                      <a:tailEnd type="none" w="med" len="med"/>
-                    </a:lnL>
-                    <a:lnR w="19050" cap="flat" cmpd="sng" algn="ctr">
-                      <a:solidFill>
-                        <a:srgbClr val="0B1A26"/>
-                      </a:solidFill>
-                      <a:prstDash val="solid"/>
-                      <a:round/>
-                      <a:headEnd type="none" w="med" len="med"/>
-                      <a:tailEnd type="none" w="med" len="med"/>
-                    </a:lnR>
-                    <a:lnT w="19050" cap="flat" cmpd="sng" algn="ctr">
-                      <a:solidFill>
-                        <a:srgbClr val="0B1A26"/>
-                      </a:solidFill>
-                      <a:prstDash val="solid"/>
-                      <a:round/>
-                      <a:headEnd type="none" w="med" len="med"/>
-                      <a:tailEnd type="none" w="med" len="med"/>
-                    </a:lnT>
-                    <a:lnB w="19050" cap="flat" cmpd="sng" algn="ctr">
-                      <a:solidFill>
-                        <a:srgbClr val="0B1A26"/>
-                      </a:solidFill>
-                      <a:prstDash val="solid"/>
-                      <a:round/>
-                      <a:headEnd type="none" w="med" len="med"/>
-                      <a:tailEnd type="none" w="med" len="med"/>
-                    </a:lnB>
-                    <a:solidFill>
-                      <a:srgbClr val="E9FBF7"/>
-                    </a:solidFill>
-                  </a:tcPr>
-                </a:tc>
-                <a:tc>
-                  <a:txBody>
-                    <a:bodyPr/>
-                    <a:lstStyle/>
-                    <a:p>
-                      <a:pPr indent="0" marL="0">
-                        <a:buNone/>
-                      </a:pPr>
-                      <a:r>
-                        <a:rPr lang="en-US" sz="1150" dirty="0">
-                          <a:solidFill>
-                            <a:srgbClr val="16262E"/>
-                          </a:solidFill>
-                          <a:latin typeface="Calibri" pitchFamily="34" charset="0"/>
-                          <a:ea typeface="Calibri" pitchFamily="34" charset="-122"/>
-                          <a:cs typeface="Calibri" pitchFamily="34" charset="-120"/>
-                        </a:rPr>
-                        <a:t>숙임·기댐이 depth 차로 분리됨 (정상 −0.05 / 숙임 +0.17 / 기댐 −0.16m)</a:t>
-                      </a:r>
-                      <a:endParaRPr lang="en-US" sz="1150" dirty="0">
-                        <a:latin typeface="Calibri" charset="0"/>
-                        <a:ea typeface="Calibri" charset="0"/>
-                        <a:cs typeface="Calibri" charset="0"/>
-                      </a:endParaRPr>
-                    </a:p>
-                  </a:txBody>
-                  <a:tcPr marL="91440" marR="91440" marT="45720" marB="45720" anchor="ctr">
-                    <a:lnL w="19050" cap="flat" cmpd="sng" algn="ctr">
-                      <a:solidFill>
-                        <a:srgbClr val="0B1A26"/>
-                      </a:solidFill>
-                      <a:prstDash val="solid"/>
-                      <a:round/>
-                      <a:headEnd type="none" w="med" len="med"/>
-                      <a:tailEnd type="none" w="med" len="med"/>
-                    </a:lnL>
-                    <a:lnR w="19050" cap="flat" cmpd="sng" algn="ctr">
-                      <a:solidFill>
-                        <a:srgbClr val="0B1A26"/>
-                      </a:solidFill>
-                      <a:prstDash val="solid"/>
-                      <a:round/>
-                      <a:headEnd type="none" w="med" len="med"/>
-                      <a:tailEnd type="none" w="med" len="med"/>
-                    </a:lnR>
-                    <a:lnT w="19050" cap="flat" cmpd="sng" algn="ctr">
-                      <a:solidFill>
-                        <a:srgbClr val="0B1A26"/>
-                      </a:solidFill>
-                      <a:prstDash val="solid"/>
-                      <a:round/>
-                      <a:headEnd type="none" w="med" len="med"/>
-                      <a:tailEnd type="none" w="med" len="med"/>
-                    </a:lnT>
-                    <a:lnB w="19050" cap="flat" cmpd="sng" algn="ctr">
-                      <a:solidFill>
-                        <a:srgbClr val="0B1A26"/>
-                      </a:solidFill>
-                      <a:prstDash val="solid"/>
-                      <a:round/>
-                      <a:headEnd type="none" w="med" len="med"/>
-                      <a:tailEnd type="none" w="med" len="med"/>
-                    </a:lnB>
-                    <a:solidFill>
-                      <a:srgbClr val="FFFFFF"/>
-                    </a:solidFill>
-                  </a:tcPr>
-                </a:tc>
-              </a:tr>
-              <a:tr h="566928">
-                <a:tc>
-                  <a:txBody>
-                    <a:bodyPr/>
-                    <a:lstStyle/>
-                    <a:p>
-                      <a:pPr indent="0" marL="0">
-                        <a:buNone/>
-                      </a:pPr>
-                      <a:r>
-                        <a:rPr lang="en-US" sz="1150" dirty="0">
-                          <a:solidFill>
-                            <a:srgbClr val="16262E"/>
-                          </a:solidFill>
-                          <a:latin typeface="Calibri" pitchFamily="34" charset="0"/>
-                          <a:ea typeface="Calibri" pitchFamily="34" charset="-122"/>
-                          <a:cs typeface="Calibri" pitchFamily="34" charset="-120"/>
-                        </a:rPr>
-                        <a:t>앉을 때마다 기준점이 필요한가 → 절대값으로</a:t>
-                      </a:r>
-                      <a:endParaRPr lang="en-US" sz="1150" dirty="0">
-                        <a:latin typeface="Calibri" charset="0"/>
-                        <a:ea typeface="Calibri" charset="0"/>
-                        <a:cs typeface="Calibri" charset="0"/>
-                      </a:endParaRPr>
-                    </a:p>
-                  </a:txBody>
-                  <a:tcPr marL="91440" marR="91440" marT="45720" marB="45720" anchor="ctr">
-                    <a:lnL w="19050" cap="flat" cmpd="sng" algn="ctr">
-                      <a:solidFill>
-                        <a:srgbClr val="0B1A26"/>
-                      </a:solidFill>
-                      <a:prstDash val="solid"/>
-                      <a:round/>
-                      <a:headEnd type="none" w="med" len="med"/>
-                      <a:tailEnd type="none" w="med" len="med"/>
-                    </a:lnL>
-                    <a:lnR w="19050" cap="flat" cmpd="sng" algn="ctr">
-                      <a:solidFill>
-                        <a:srgbClr val="0B1A26"/>
-                      </a:solidFill>
-                      <a:prstDash val="solid"/>
-                      <a:round/>
-                      <a:headEnd type="none" w="med" len="med"/>
-                      <a:tailEnd type="none" w="med" len="med"/>
-                    </a:lnR>
-                    <a:lnT w="19050" cap="flat" cmpd="sng" algn="ctr">
-                      <a:solidFill>
-                        <a:srgbClr val="0B1A26"/>
-                      </a:solidFill>
-                      <a:prstDash val="solid"/>
-                      <a:round/>
-                      <a:headEnd type="none" w="med" len="med"/>
-                      <a:tailEnd type="none" w="med" len="med"/>
-                    </a:lnT>
-                    <a:lnB w="19050" cap="flat" cmpd="sng" algn="ctr">
-                      <a:solidFill>
-                        <a:srgbClr val="0B1A26"/>
-                      </a:solidFill>
-                      <a:prstDash val="solid"/>
-                      <a:round/>
-                      <a:headEnd type="none" w="med" len="med"/>
-                      <a:tailEnd type="none" w="med" len="med"/>
-                    </a:lnB>
-                    <a:solidFill>
-                      <a:srgbClr val="FFFFFF"/>
-                    </a:solidFill>
-                  </a:tcPr>
-                </a:tc>
-                <a:tc>
-                  <a:txBody>
-                    <a:bodyPr/>
-                    <a:lstStyle/>
-                    <a:p>
-                      <a:pPr indent="0" marL="0">
-                        <a:buNone/>
-                      </a:pPr>
-                      <a:r>
-                        <a:rPr lang="en-US" sz="1150" b="1" dirty="0">
-                          <a:solidFill>
-                            <a:srgbClr val="9A3F1F"/>
-                          </a:solidFill>
-                          <a:latin typeface="Calibri" pitchFamily="34" charset="0"/>
-                          <a:ea typeface="Calibri" pitchFamily="34" charset="-122"/>
-                          <a:cs typeface="Calibri" pitchFamily="34" charset="-120"/>
-                        </a:rPr>
-                        <a:t>설계함</a:t>
-                      </a:r>
-                      <a:endParaRPr lang="en-US" sz="1150" dirty="0">
-                        <a:latin typeface="Calibri" charset="0"/>
-                        <a:ea typeface="Calibri" charset="0"/>
-                        <a:cs typeface="Calibri" charset="0"/>
-                      </a:endParaRPr>
-                    </a:p>
-                  </a:txBody>
-                  <a:tcPr marL="91440" marR="91440" marT="45720" marB="45720" anchor="ctr">
-                    <a:lnL w="19050" cap="flat" cmpd="sng" algn="ctr">
-                      <a:solidFill>
-                        <a:srgbClr val="0B1A26"/>
-                      </a:solidFill>
-                      <a:prstDash val="solid"/>
-                      <a:round/>
-                      <a:headEnd type="none" w="med" len="med"/>
-                      <a:tailEnd type="none" w="med" len="med"/>
-                    </a:lnL>
-                    <a:lnR w="19050" cap="flat" cmpd="sng" algn="ctr">
-                      <a:solidFill>
-                        <a:srgbClr val="0B1A26"/>
-                      </a:solidFill>
-                      <a:prstDash val="solid"/>
-                      <a:round/>
-                      <a:headEnd type="none" w="med" len="med"/>
-                      <a:tailEnd type="none" w="med" len="med"/>
-                    </a:lnR>
-                    <a:lnT w="19050" cap="flat" cmpd="sng" algn="ctr">
-                      <a:solidFill>
-                        <a:srgbClr val="0B1A26"/>
-                      </a:solidFill>
-                      <a:prstDash val="solid"/>
-                      <a:round/>
-                      <a:headEnd type="none" w="med" len="med"/>
-                      <a:tailEnd type="none" w="med" len="med"/>
-                    </a:lnT>
-                    <a:lnB w="19050" cap="flat" cmpd="sng" algn="ctr">
-                      <a:solidFill>
-                        <a:srgbClr val="0B1A26"/>
-                      </a:solidFill>
-                      <a:prstDash val="solid"/>
-                      <a:round/>
-                      <a:headEnd type="none" w="med" len="med"/>
-                      <a:tailEnd type="none" w="med" len="med"/>
-                    </a:lnB>
-                    <a:solidFill>
-                      <a:srgbClr val="FDEFE8"/>
-                    </a:solidFill>
-                  </a:tcPr>
-                </a:tc>
-                <a:tc>
-                  <a:txBody>
-                    <a:bodyPr/>
-                    <a:lstStyle/>
-                    <a:p>
-                      <a:pPr indent="0" marL="0">
-                        <a:buNone/>
-                      </a:pPr>
-                      <a:r>
-                        <a:rPr lang="en-US" sz="1150" dirty="0">
-                          <a:solidFill>
-                            <a:srgbClr val="16262E"/>
-                          </a:solidFill>
-                          <a:latin typeface="Calibri" pitchFamily="34" charset="0"/>
-                          <a:ea typeface="Calibri" pitchFamily="34" charset="-122"/>
-                          <a:cs typeface="Calibri" pitchFamily="34" charset="-120"/>
-                        </a:rPr>
-                        <a:t>중력 기준 각도 + 어깨너비 비율 (다음 슬라이드)</a:t>
-                      </a:r>
-                      <a:endParaRPr lang="en-US" sz="1150" dirty="0">
-                        <a:latin typeface="Calibri" charset="0"/>
-                        <a:ea typeface="Calibri" charset="0"/>
-                        <a:cs typeface="Calibri" charset="0"/>
-                      </a:endParaRPr>
-                    </a:p>
-                  </a:txBody>
-                  <a:tcPr marL="91440" marR="91440" marT="45720" marB="45720" anchor="ctr">
-                    <a:lnL w="19050" cap="flat" cmpd="sng" algn="ctr">
-                      <a:solidFill>
-                        <a:srgbClr val="0B1A26"/>
-                      </a:solidFill>
-                      <a:prstDash val="solid"/>
-                      <a:round/>
-                      <a:headEnd type="none" w="med" len="med"/>
-                      <a:tailEnd type="none" w="med" len="med"/>
-                    </a:lnL>
-                    <a:lnR w="19050" cap="flat" cmpd="sng" algn="ctr">
-                      <a:solidFill>
-                        <a:srgbClr val="0B1A26"/>
-                      </a:solidFill>
-                      <a:prstDash val="solid"/>
-                      <a:round/>
-                      <a:headEnd type="none" w="med" len="med"/>
-                      <a:tailEnd type="none" w="med" len="med"/>
-                    </a:lnR>
-                    <a:lnT w="19050" cap="flat" cmpd="sng" algn="ctr">
-                      <a:solidFill>
-                        <a:srgbClr val="0B1A26"/>
-                      </a:solidFill>
-                      <a:prstDash val="solid"/>
-                      <a:round/>
-                      <a:headEnd type="none" w="med" len="med"/>
-                      <a:tailEnd type="none" w="med" len="med"/>
-                    </a:lnT>
-                    <a:lnB w="19050" cap="flat" cmpd="sng" algn="ctr">
-                      <a:solidFill>
-                        <a:srgbClr val="0B1A26"/>
-                      </a:solidFill>
-                      <a:prstDash val="solid"/>
-                      <a:round/>
-                      <a:headEnd type="none" w="med" len="med"/>
-                      <a:tailEnd type="none" w="med" len="med"/>
-                    </a:lnB>
-                    <a:solidFill>
-                      <a:srgbClr val="FFFFFF"/>
-                    </a:solidFill>
-                  </a:tcPr>
-                </a:tc>
-              </a:tr>
-              <a:tr h="566928">
-                <a:tc>
-                  <a:txBody>
-                    <a:bodyPr/>
-                    <a:lstStyle/>
-                    <a:p>
-                      <a:pPr indent="0" marL="0">
-                        <a:buNone/>
-                      </a:pPr>
-                      <a:r>
-                        <a:rPr lang="en-US" sz="1150" dirty="0">
-                          <a:solidFill>
-                            <a:srgbClr val="16262E"/>
-                          </a:solidFill>
-                          <a:latin typeface="Calibri" pitchFamily="34" charset="0"/>
-                          <a:ea typeface="Calibri" pitchFamily="34" charset="-122"/>
-                          <a:cs typeface="Calibri" pitchFamily="34" charset="-120"/>
-                        </a:rPr>
-                        <a:t>체형(복부·여성 체형 등) 두께 차이</a:t>
-                      </a:r>
-                      <a:endParaRPr lang="en-US" sz="1150" dirty="0">
-                        <a:latin typeface="Calibri" charset="0"/>
-                        <a:ea typeface="Calibri" charset="0"/>
-                        <a:cs typeface="Calibri" charset="0"/>
-                      </a:endParaRPr>
-                    </a:p>
-                  </a:txBody>
-                  <a:tcPr marL="91440" marR="91440" marT="45720" marB="45720" anchor="ctr">
-                    <a:lnL w="19050" cap="flat" cmpd="sng" algn="ctr">
-                      <a:solidFill>
-                        <a:srgbClr val="0B1A26"/>
-                      </a:solidFill>
-                      <a:prstDash val="solid"/>
-                      <a:round/>
-                      <a:headEnd type="none" w="med" len="med"/>
-                      <a:tailEnd type="none" w="med" len="med"/>
-                    </a:lnL>
-                    <a:lnR w="19050" cap="flat" cmpd="sng" algn="ctr">
-                      <a:solidFill>
-                        <a:srgbClr val="0B1A26"/>
-                      </a:solidFill>
-                      <a:prstDash val="solid"/>
-                      <a:round/>
-                      <a:headEnd type="none" w="med" len="med"/>
-                      <a:tailEnd type="none" w="med" len="med"/>
-                    </a:lnR>
-                    <a:lnT w="19050" cap="flat" cmpd="sng" algn="ctr">
-                      <a:solidFill>
-                        <a:srgbClr val="0B1A26"/>
-                      </a:solidFill>
-                      <a:prstDash val="solid"/>
-                      <a:round/>
-                      <a:headEnd type="none" w="med" len="med"/>
-                      <a:tailEnd type="none" w="med" len="med"/>
-                    </a:lnT>
-                    <a:lnB w="19050" cap="flat" cmpd="sng" algn="ctr">
-                      <a:solidFill>
-                        <a:srgbClr val="0B1A26"/>
-                      </a:solidFill>
-                      <a:prstDash val="solid"/>
-                      <a:round/>
-                      <a:headEnd type="none" w="med" len="med"/>
-                      <a:tailEnd type="none" w="med" len="med"/>
-                    </a:lnB>
-                    <a:solidFill>
-                      <a:srgbClr val="FFFFFF"/>
-                    </a:solidFill>
-                  </a:tcPr>
-                </a:tc>
-                <a:tc>
-                  <a:txBody>
-                    <a:bodyPr/>
-                    <a:lstStyle/>
-                    <a:p>
-                      <a:pPr indent="0" marL="0">
-                        <a:buNone/>
-                      </a:pPr>
-                      <a:r>
-                        <a:rPr lang="en-US" sz="1150" b="1" dirty="0">
-                          <a:solidFill>
-                            <a:srgbClr val="9A3F1F"/>
-                          </a:solidFill>
-                          <a:latin typeface="Calibri" pitchFamily="34" charset="0"/>
-                          <a:ea typeface="Calibri" pitchFamily="34" charset="-122"/>
-                          <a:cs typeface="Calibri" pitchFamily="34" charset="-120"/>
-                        </a:rPr>
-                        <a:t>미해결</a:t>
-                      </a:r>
-                      <a:endParaRPr lang="en-US" sz="1150" dirty="0">
-                        <a:latin typeface="Calibri" charset="0"/>
-                        <a:ea typeface="Calibri" charset="0"/>
-                        <a:cs typeface="Calibri" charset="0"/>
-                      </a:endParaRPr>
-                    </a:p>
-                  </a:txBody>
-                  <a:tcPr marL="91440" marR="91440" marT="45720" marB="45720" anchor="ctr">
-                    <a:lnL w="19050" cap="flat" cmpd="sng" algn="ctr">
-                      <a:solidFill>
-                        <a:srgbClr val="0B1A26"/>
-                      </a:solidFill>
-                      <a:prstDash val="solid"/>
-                      <a:round/>
-                      <a:headEnd type="none" w="med" len="med"/>
-                      <a:tailEnd type="none" w="med" len="med"/>
-                    </a:lnL>
-                    <a:lnR w="19050" cap="flat" cmpd="sng" algn="ctr">
-                      <a:solidFill>
-                        <a:srgbClr val="0B1A26"/>
-                      </a:solidFill>
-                      <a:prstDash val="solid"/>
-                      <a:round/>
-                      <a:headEnd type="none" w="med" len="med"/>
-                      <a:tailEnd type="none" w="med" len="med"/>
-                    </a:lnR>
-                    <a:lnT w="19050" cap="flat" cmpd="sng" algn="ctr">
-                      <a:solidFill>
-                        <a:srgbClr val="0B1A26"/>
-                      </a:solidFill>
-                      <a:prstDash val="solid"/>
-                      <a:round/>
-                      <a:headEnd type="none" w="med" len="med"/>
-                      <a:tailEnd type="none" w="med" len="med"/>
-                    </a:lnT>
-                    <a:lnB w="19050" cap="flat" cmpd="sng" algn="ctr">
-                      <a:solidFill>
-                        <a:srgbClr val="0B1A26"/>
-                      </a:solidFill>
-                      <a:prstDash val="solid"/>
-                      <a:round/>
-                      <a:headEnd type="none" w="med" len="med"/>
-                      <a:tailEnd type="none" w="med" len="med"/>
-                    </a:lnB>
-                    <a:solidFill>
-                      <a:srgbClr val="FDEFE8"/>
-                    </a:solidFill>
-                  </a:tcPr>
-                </a:tc>
-                <a:tc>
-                  <a:txBody>
-                    <a:bodyPr/>
-                    <a:lstStyle/>
-                    <a:p>
-                      <a:pPr indent="0" marL="0">
-                        <a:buNone/>
-                      </a:pPr>
-                      <a:r>
-                        <a:rPr lang="en-US" sz="1150" dirty="0">
-                          <a:solidFill>
-                            <a:srgbClr val="16262E"/>
-                          </a:solidFill>
-                          <a:latin typeface="Calibri" pitchFamily="34" charset="0"/>
-                          <a:ea typeface="Calibri" pitchFamily="34" charset="-122"/>
-                          <a:cs typeface="Calibri" pitchFamily="34" charset="-120"/>
-                        </a:rPr>
-                        <a:t>비율로 줄이되 한계 인정, 체형 다양한 참가자 확보</a:t>
-                      </a:r>
-                      <a:endParaRPr lang="en-US" sz="1150" dirty="0">
-                        <a:latin typeface="Calibri" charset="0"/>
-                        <a:ea typeface="Calibri" charset="0"/>
-                        <a:cs typeface="Calibri" charset="0"/>
-                      </a:endParaRPr>
-                    </a:p>
-                  </a:txBody>
-                  <a:tcPr marL="91440" marR="91440" marT="45720" marB="45720" anchor="ctr">
-                    <a:lnL w="19050" cap="flat" cmpd="sng" algn="ctr">
-                      <a:solidFill>
-                        <a:srgbClr val="0B1A26"/>
-                      </a:solidFill>
-                      <a:prstDash val="solid"/>
-                      <a:round/>
-                      <a:headEnd type="none" w="med" len="med"/>
-                      <a:tailEnd type="none" w="med" len="med"/>
-                    </a:lnL>
-                    <a:lnR w="19050" cap="flat" cmpd="sng" algn="ctr">
-                      <a:solidFill>
-                        <a:srgbClr val="0B1A26"/>
-                      </a:solidFill>
-                      <a:prstDash val="solid"/>
-                      <a:round/>
-                      <a:headEnd type="none" w="med" len="med"/>
-                      <a:tailEnd type="none" w="med" len="med"/>
-                    </a:lnR>
-                    <a:lnT w="19050" cap="flat" cmpd="sng" algn="ctr">
-                      <a:solidFill>
-                        <a:srgbClr val="0B1A26"/>
-                      </a:solidFill>
-                      <a:prstDash val="solid"/>
-                      <a:round/>
-                      <a:headEnd type="none" w="med" len="med"/>
-                      <a:tailEnd type="none" w="med" len="med"/>
-                    </a:lnT>
-                    <a:lnB w="19050" cap="flat" cmpd="sng" algn="ctr">
-                      <a:solidFill>
-                        <a:srgbClr val="0B1A26"/>
-                      </a:solidFill>
-                      <a:prstDash val="solid"/>
-                      <a:round/>
-                      <a:headEnd type="none" w="med" len="med"/>
-                      <a:tailEnd type="none" w="med" len="med"/>
-                    </a:lnB>
-                    <a:solidFill>
-                      <a:srgbClr val="FFFFFF"/>
-                    </a:solidFill>
-                  </a:tcPr>
-                </a:tc>
-              </a:tr>
-              <a:tr h="566928">
-                <a:tc>
-                  <a:txBody>
-                    <a:bodyPr/>
-                    <a:lstStyle/>
-                    <a:p>
-                      <a:pPr indent="0" marL="0">
-                        <a:buNone/>
-                      </a:pPr>
-                      <a:r>
-                        <a:rPr lang="en-US" sz="1150" dirty="0">
-                          <a:solidFill>
-                            <a:srgbClr val="16262E"/>
-                          </a:solidFill>
-                          <a:latin typeface="Calibri" pitchFamily="34" charset="0"/>
-                          <a:ea typeface="Calibri" pitchFamily="34" charset="-122"/>
-                          <a:cs typeface="Calibri" pitchFamily="34" charset="-120"/>
-                        </a:rPr>
-                        <a:t>거북목, 허리받침에서 엉덩이가 뜬 자세</a:t>
-                      </a:r>
-                      <a:endParaRPr lang="en-US" sz="1150" dirty="0">
-                        <a:latin typeface="Calibri" charset="0"/>
-                        <a:ea typeface="Calibri" charset="0"/>
-                        <a:cs typeface="Calibri" charset="0"/>
-                      </a:endParaRPr>
-                    </a:p>
-                  </a:txBody>
-                  <a:tcPr marL="91440" marR="91440" marT="45720" marB="45720" anchor="ctr">
-                    <a:lnL w="19050" cap="flat" cmpd="sng" algn="ctr">
-                      <a:solidFill>
-                        <a:srgbClr val="0B1A26"/>
-                      </a:solidFill>
-                      <a:prstDash val="solid"/>
-                      <a:round/>
-                      <a:headEnd type="none" w="med" len="med"/>
-                      <a:tailEnd type="none" w="med" len="med"/>
-                    </a:lnL>
-                    <a:lnR w="19050" cap="flat" cmpd="sng" algn="ctr">
-                      <a:solidFill>
-                        <a:srgbClr val="0B1A26"/>
-                      </a:solidFill>
-                      <a:prstDash val="solid"/>
-                      <a:round/>
-                      <a:headEnd type="none" w="med" len="med"/>
-                      <a:tailEnd type="none" w="med" len="med"/>
-                    </a:lnR>
-                    <a:lnT w="19050" cap="flat" cmpd="sng" algn="ctr">
-                      <a:solidFill>
-                        <a:srgbClr val="0B1A26"/>
-                      </a:solidFill>
-                      <a:prstDash val="solid"/>
-                      <a:round/>
-                      <a:headEnd type="none" w="med" len="med"/>
-                      <a:tailEnd type="none" w="med" len="med"/>
-                    </a:lnT>
-                    <a:lnB w="19050" cap="flat" cmpd="sng" algn="ctr">
-                      <a:solidFill>
-                        <a:srgbClr val="0B1A26"/>
-                      </a:solidFill>
-                      <a:prstDash val="solid"/>
-                      <a:round/>
-                      <a:headEnd type="none" w="med" len="med"/>
-                      <a:tailEnd type="none" w="med" len="med"/>
-                    </a:lnB>
-                    <a:solidFill>
-                      <a:srgbClr val="FFFFFF"/>
-                    </a:solidFill>
-                  </a:tcPr>
-                </a:tc>
-                <a:tc>
-                  <a:txBody>
-                    <a:bodyPr/>
-                    <a:lstStyle/>
-                    <a:p>
-                      <a:pPr indent="0" marL="0">
-                        <a:buNone/>
-                      </a:pPr>
-                      <a:r>
-                        <a:rPr lang="en-US" sz="1150" b="1" dirty="0">
-                          <a:solidFill>
-                            <a:srgbClr val="9A3F1F"/>
-                          </a:solidFill>
-                          <a:latin typeface="Calibri" pitchFamily="34" charset="0"/>
-                          <a:ea typeface="Calibri" pitchFamily="34" charset="-122"/>
-                          <a:cs typeface="Calibri" pitchFamily="34" charset="-120"/>
-                        </a:rPr>
-                        <a:t>설계함</a:t>
-                      </a:r>
-                      <a:endParaRPr lang="en-US" sz="1150" dirty="0">
-                        <a:latin typeface="Calibri" charset="0"/>
-                        <a:ea typeface="Calibri" charset="0"/>
-                        <a:cs typeface="Calibri" charset="0"/>
-                      </a:endParaRPr>
-                    </a:p>
-                  </a:txBody>
-                  <a:tcPr marL="91440" marR="91440" marT="45720" marB="45720" anchor="ctr">
-                    <a:lnL w="19050" cap="flat" cmpd="sng" algn="ctr">
-                      <a:solidFill>
-                        <a:srgbClr val="0B1A26"/>
-                      </a:solidFill>
-                      <a:prstDash val="solid"/>
-                      <a:round/>
-                      <a:headEnd type="none" w="med" len="med"/>
-                      <a:tailEnd type="none" w="med" len="med"/>
-                    </a:lnL>
-                    <a:lnR w="19050" cap="flat" cmpd="sng" algn="ctr">
-                      <a:solidFill>
-                        <a:srgbClr val="0B1A26"/>
-                      </a:solidFill>
-                      <a:prstDash val="solid"/>
-                      <a:round/>
-                      <a:headEnd type="none" w="med" len="med"/>
-                      <a:tailEnd type="none" w="med" len="med"/>
-                    </a:lnR>
-                    <a:lnT w="19050" cap="flat" cmpd="sng" algn="ctr">
-                      <a:solidFill>
-                        <a:srgbClr val="0B1A26"/>
-                      </a:solidFill>
-                      <a:prstDash val="solid"/>
-                      <a:round/>
-                      <a:headEnd type="none" w="med" len="med"/>
-                      <a:tailEnd type="none" w="med" len="med"/>
-                    </a:lnT>
-                    <a:lnB w="19050" cap="flat" cmpd="sng" algn="ctr">
-                      <a:solidFill>
-                        <a:srgbClr val="0B1A26"/>
-                      </a:solidFill>
-                      <a:prstDash val="solid"/>
-                      <a:round/>
-                      <a:headEnd type="none" w="med" len="med"/>
-                      <a:tailEnd type="none" w="med" len="med"/>
-                    </a:lnB>
-                    <a:solidFill>
-                      <a:srgbClr val="FDEFE8"/>
-                    </a:solidFill>
-                  </a:tcPr>
-                </a:tc>
-                <a:tc>
-                  <a:txBody>
-                    <a:bodyPr/>
-                    <a:lstStyle/>
-                    <a:p>
-                      <a:pPr indent="0" marL="0">
-                        <a:buNone/>
-                      </a:pPr>
-                      <a:r>
-                        <a:rPr lang="en-US" sz="1150" dirty="0">
-                          <a:solidFill>
-                            <a:srgbClr val="16262E"/>
-                          </a:solidFill>
-                          <a:latin typeface="Calibri" pitchFamily="34" charset="0"/>
-                          <a:ea typeface="Calibri" pitchFamily="34" charset="-122"/>
-                          <a:cs typeface="Calibri" pitchFamily="34" charset="-120"/>
-                        </a:rPr>
-                        <a:t>head_forward_ratio, torso_pitch로 측정 — 클래스 정의는 6주차 논의</a:t>
-                      </a:r>
-                      <a:endParaRPr lang="en-US" sz="1150" dirty="0">
-                        <a:latin typeface="Calibri" charset="0"/>
-                        <a:ea typeface="Calibri" charset="0"/>
-                        <a:cs typeface="Calibri" charset="0"/>
-                      </a:endParaRPr>
-                    </a:p>
-                  </a:txBody>
-                  <a:tcPr marL="91440" marR="91440" marT="45720" marB="45720" anchor="ctr">
-                    <a:lnL w="19050" cap="flat" cmpd="sng" algn="ctr">
-                      <a:solidFill>
-                        <a:srgbClr val="0B1A26"/>
-                      </a:solidFill>
-                      <a:prstDash val="solid"/>
-                      <a:round/>
-                      <a:headEnd type="none" w="med" len="med"/>
-                      <a:tailEnd type="none" w="med" len="med"/>
-                    </a:lnL>
-                    <a:lnR w="19050" cap="flat" cmpd="sng" algn="ctr">
-                      <a:solidFill>
-                        <a:srgbClr val="0B1A26"/>
-                      </a:solidFill>
-                      <a:prstDash val="solid"/>
-                      <a:round/>
-                      <a:headEnd type="none" w="med" len="med"/>
-                      <a:tailEnd type="none" w="med" len="med"/>
-                    </a:lnR>
-                    <a:lnT w="19050" cap="flat" cmpd="sng" algn="ctr">
-                      <a:solidFill>
-                        <a:srgbClr val="0B1A26"/>
-                      </a:solidFill>
-                      <a:prstDash val="solid"/>
-                      <a:round/>
-                      <a:headEnd type="none" w="med" len="med"/>
-                      <a:tailEnd type="none" w="med" len="med"/>
-                    </a:lnT>
-                    <a:lnB w="19050" cap="flat" cmpd="sng" algn="ctr">
-                      <a:solidFill>
-                        <a:srgbClr val="0B1A26"/>
-                      </a:solidFill>
-                      <a:prstDash val="solid"/>
-                      <a:round/>
-                      <a:headEnd type="none" w="med" len="med"/>
-                      <a:tailEnd type="none" w="med" len="med"/>
-                    </a:lnB>
-                    <a:solidFill>
-                      <a:srgbClr val="FFFFFF"/>
-                    </a:solidFill>
-                  </a:tcPr>
-                </a:tc>
-              </a:tr>
-              <a:tr h="566928">
-                <a:tc>
-                  <a:txBody>
-                    <a:bodyPr/>
-                    <a:lstStyle/>
-                    <a:p>
-                      <a:pPr indent="0" marL="0">
-                        <a:buNone/>
-                      </a:pPr>
-                      <a:r>
-                        <a:rPr lang="en-US" sz="1150" dirty="0">
-                          <a:solidFill>
-                            <a:srgbClr val="16262E"/>
-                          </a:solidFill>
-                          <a:latin typeface="Calibri" pitchFamily="34" charset="0"/>
-                          <a:ea typeface="Calibri" pitchFamily="34" charset="-122"/>
-                          <a:cs typeface="Calibri" pitchFamily="34" charset="-120"/>
-                        </a:rPr>
-                        <a:t>팔 위치·책상 높이 고려</a:t>
-                      </a:r>
-                      <a:endParaRPr lang="en-US" sz="1150" dirty="0">
-                        <a:latin typeface="Calibri" charset="0"/>
-                        <a:ea typeface="Calibri" charset="0"/>
-                        <a:cs typeface="Calibri" charset="0"/>
-                      </a:endParaRPr>
-                    </a:p>
-                  </a:txBody>
-                  <a:tcPr marL="91440" marR="91440" marT="45720" marB="45720" anchor="ctr">
-                    <a:lnL w="19050" cap="flat" cmpd="sng" algn="ctr">
-                      <a:solidFill>
-                        <a:srgbClr val="0B1A26"/>
-                      </a:solidFill>
-                      <a:prstDash val="solid"/>
-                      <a:round/>
-                      <a:headEnd type="none" w="med" len="med"/>
-                      <a:tailEnd type="none" w="med" len="med"/>
-                    </a:lnL>
-                    <a:lnR w="19050" cap="flat" cmpd="sng" algn="ctr">
-                      <a:solidFill>
-                        <a:srgbClr val="0B1A26"/>
-                      </a:solidFill>
-                      <a:prstDash val="solid"/>
-                      <a:round/>
-                      <a:headEnd type="none" w="med" len="med"/>
-                      <a:tailEnd type="none" w="med" len="med"/>
-                    </a:lnR>
-                    <a:lnT w="19050" cap="flat" cmpd="sng" algn="ctr">
-                      <a:solidFill>
-                        <a:srgbClr val="0B1A26"/>
-                      </a:solidFill>
-                      <a:prstDash val="solid"/>
-                      <a:round/>
-                      <a:headEnd type="none" w="med" len="med"/>
-                      <a:tailEnd type="none" w="med" len="med"/>
-                    </a:lnT>
-                    <a:lnB w="19050" cap="flat" cmpd="sng" algn="ctr">
-                      <a:solidFill>
-                        <a:srgbClr val="0B1A26"/>
-                      </a:solidFill>
-                      <a:prstDash val="solid"/>
-                      <a:round/>
-                      <a:headEnd type="none" w="med" len="med"/>
-                      <a:tailEnd type="none" w="med" len="med"/>
-                    </a:lnB>
-                    <a:solidFill>
-                      <a:srgbClr val="FFFFFF"/>
-                    </a:solidFill>
-                  </a:tcPr>
-                </a:tc>
-                <a:tc>
-                  <a:txBody>
-                    <a:bodyPr/>
-                    <a:lstStyle/>
-                    <a:p>
-                      <a:pPr indent="0" marL="0">
-                        <a:buNone/>
-                      </a:pPr>
-                      <a:r>
-                        <a:rPr lang="en-US" sz="1150" b="1" dirty="0">
-                          <a:solidFill>
-                            <a:srgbClr val="9A3F1F"/>
-                          </a:solidFill>
-                          <a:latin typeface="Calibri" pitchFamily="34" charset="0"/>
-                          <a:ea typeface="Calibri" pitchFamily="34" charset="-122"/>
-                          <a:cs typeface="Calibri" pitchFamily="34" charset="-120"/>
-                        </a:rPr>
-                        <a:t>미착수</a:t>
-                      </a:r>
-                      <a:endParaRPr lang="en-US" sz="1150" dirty="0">
-                        <a:latin typeface="Calibri" charset="0"/>
-                        <a:ea typeface="Calibri" charset="0"/>
-                        <a:cs typeface="Calibri" charset="0"/>
-                      </a:endParaRPr>
-                    </a:p>
-                  </a:txBody>
-                  <a:tcPr marL="91440" marR="91440" marT="45720" marB="45720" anchor="ctr">
-                    <a:lnL w="19050" cap="flat" cmpd="sng" algn="ctr">
-                      <a:solidFill>
-                        <a:srgbClr val="0B1A26"/>
-                      </a:solidFill>
-                      <a:prstDash val="solid"/>
-                      <a:round/>
-                      <a:headEnd type="none" w="med" len="med"/>
-                      <a:tailEnd type="none" w="med" len="med"/>
-                    </a:lnL>
-                    <a:lnR w="19050" cap="flat" cmpd="sng" algn="ctr">
-                      <a:solidFill>
-                        <a:srgbClr val="0B1A26"/>
-                      </a:solidFill>
-                      <a:prstDash val="solid"/>
-                      <a:round/>
-                      <a:headEnd type="none" w="med" len="med"/>
-                      <a:tailEnd type="none" w="med" len="med"/>
-                    </a:lnR>
-                    <a:lnT w="19050" cap="flat" cmpd="sng" algn="ctr">
-                      <a:solidFill>
-                        <a:srgbClr val="0B1A26"/>
-                      </a:solidFill>
-                      <a:prstDash val="solid"/>
-                      <a:round/>
-                      <a:headEnd type="none" w="med" len="med"/>
-                      <a:tailEnd type="none" w="med" len="med"/>
-                    </a:lnT>
-                    <a:lnB w="19050" cap="flat" cmpd="sng" algn="ctr">
-                      <a:solidFill>
-                        <a:srgbClr val="0B1A26"/>
-                      </a:solidFill>
-                      <a:prstDash val="solid"/>
-                      <a:round/>
-                      <a:headEnd type="none" w="med" len="med"/>
-                      <a:tailEnd type="none" w="med" len="med"/>
-                    </a:lnB>
-                    <a:solidFill>
-                      <a:srgbClr val="FDEFE8"/>
-                    </a:solidFill>
-                  </a:tcPr>
-                </a:tc>
-                <a:tc>
-                  <a:txBody>
-                    <a:bodyPr/>
-                    <a:lstStyle/>
-                    <a:p>
-                      <a:pPr indent="0" marL="0">
-                        <a:buNone/>
-                      </a:pPr>
-                      <a:r>
-                        <a:rPr lang="en-US" sz="1150" dirty="0">
-                          <a:solidFill>
-                            <a:srgbClr val="16262E"/>
-                          </a:solidFill>
-                          <a:latin typeface="Calibri" pitchFamily="34" charset="0"/>
-                          <a:ea typeface="Calibri" pitchFamily="34" charset="-122"/>
-                          <a:cs typeface="Calibri" pitchFamily="34" charset="-120"/>
-                        </a:rPr>
-                        <a:t>어깨-팔꿈치-손목 keypoint로 6주차 이후 검토</a:t>
-                      </a:r>
-                      <a:endParaRPr lang="en-US" sz="1150" dirty="0">
-                        <a:latin typeface="Calibri" charset="0"/>
-                        <a:ea typeface="Calibri" charset="0"/>
-                        <a:cs typeface="Calibri" charset="0"/>
-                      </a:endParaRPr>
-                    </a:p>
-                  </a:txBody>
-                  <a:tcPr marL="91440" marR="91440" marT="45720" marB="45720" anchor="ctr">
-                    <a:lnL w="19050" cap="flat" cmpd="sng" algn="ctr">
-                      <a:solidFill>
-                        <a:srgbClr val="0B1A26"/>
-                      </a:solidFill>
-                      <a:prstDash val="solid"/>
-                      <a:round/>
-                      <a:headEnd type="none" w="med" len="med"/>
-                      <a:tailEnd type="none" w="med" len="med"/>
-                    </a:lnL>
-                    <a:lnR w="19050" cap="flat" cmpd="sng" algn="ctr">
-                      <a:solidFill>
-                        <a:srgbClr val="0B1A26"/>
-                      </a:solidFill>
-                      <a:prstDash val="solid"/>
-                      <a:round/>
-                      <a:headEnd type="none" w="med" len="med"/>
-                      <a:tailEnd type="none" w="med" len="med"/>
-                    </a:lnR>
-                    <a:lnT w="19050" cap="flat" cmpd="sng" algn="ctr">
-                      <a:solidFill>
-                        <a:srgbClr val="0B1A26"/>
-                      </a:solidFill>
-                      <a:prstDash val="solid"/>
-                      <a:round/>
-                      <a:headEnd type="none" w="med" len="med"/>
-                      <a:tailEnd type="none" w="med" len="med"/>
-                    </a:lnT>
-                    <a:lnB w="19050" cap="flat" cmpd="sng" algn="ctr">
-                      <a:solidFill>
-                        <a:srgbClr val="0B1A26"/>
-                      </a:solidFill>
-                      <a:prstDash val="solid"/>
-                      <a:round/>
-                      <a:headEnd type="none" w="med" len="med"/>
-                      <a:tailEnd type="none" w="med" len="med"/>
-                    </a:lnB>
-                    <a:solidFill>
-                      <a:srgbClr val="FFFFFF"/>
-                    </a:solidFill>
-                  </a:tcPr>
-                </a:tc>
-              </a:tr>
-            </a:tbl>
-          </a:graphicData>
-        </a:graphic>
-      </p:graphicFrame>
-      <p:sp>
-        <p:nvSpPr>
-          <p:cNvPr id="5" name="Text 2"/>
+      <p:sp>
+        <p:nvSpPr>
+          <p:cNvPr id="4" name="Shape 2"/>
+          <p:cNvSpPr/>
+          <p:nvPr/>
+        </p:nvSpPr>
+        <p:spPr>
+          <a:xfrm>
+            <a:off x="640080" y="1691640"/>
+            <a:ext cx="2596896" cy="3840480"/>
+          </a:xfrm>
+          <a:prstGeom prst="roundRect">
+            <a:avLst>
+              <a:gd name="adj" fmla="val 4225"/>
+            </a:avLst>
+          </a:prstGeom>
+          <a:solidFill>
+            <a:srgbClr val="FFFFFF"/>
+          </a:solidFill>
+          <a:ln/>
+        </p:spPr>
+      </p:sp>
+      <p:sp>
+        <p:nvSpPr>
+          <p:cNvPr id="5" name="Shape 3"/>
+          <p:cNvSpPr/>
+          <p:nvPr/>
+        </p:nvSpPr>
+        <p:spPr>
+          <a:xfrm>
+            <a:off x="896112" y="1920240"/>
+            <a:ext cx="548640" cy="548640"/>
+          </a:xfrm>
+          <a:prstGeom prst="ellipse">
+            <a:avLst/>
+          </a:prstGeom>
+          <a:solidFill>
+            <a:srgbClr val="12655A"/>
+          </a:solidFill>
+          <a:ln/>
+        </p:spPr>
+      </p:sp>
+      <p:pic>
+        <p:nvPicPr>
+          <p:cNvPr id="6" name="Image 0" descr="preencoded.png">    </p:cNvPr>
+          <p:cNvPicPr>
+            <a:picLocks noChangeAspect="1"/>
+          </p:cNvPicPr>
+          <p:nvPr/>
+        </p:nvPicPr>
+        <p:blipFill>
+          <a:blip r:embed="rId2"/>
+          <a:stretch>
+            <a:fillRect/>
+          </a:stretch>
+        </p:blipFill>
+        <p:spPr>
+          <a:xfrm>
+            <a:off x="1038758" y="2062886"/>
+            <a:ext cx="263347" cy="263347"/>
+          </a:xfrm>
+          <a:prstGeom prst="rect">
+            <a:avLst/>
+          </a:prstGeom>
+        </p:spPr>
+      </p:pic>
+      <p:sp>
+        <p:nvSpPr>
+          <p:cNvPr id="7" name="Text 4"/>
+          <p:cNvSpPr txBox="1"/>
+          <p:nvPr/>
+        </p:nvSpPr>
+        <p:spPr>
+          <a:xfrm>
+            <a:off x="1600200" y="1920240"/>
+            <a:ext cx="1408176" cy="548640"/>
+          </a:xfrm>
+          <a:prstGeom prst="rect">
+            <a:avLst/>
+          </a:prstGeom>
+          <a:noFill/>
+          <a:ln/>
+        </p:spPr>
+        <p:txBody>
+          <a:bodyPr wrap="square" lIns="0" tIns="0" rIns="0" bIns="0" rtlCol="0" anchor="ctr"/>
+          <a:lstStyle/>
+          <a:p>
+            <a:pPr indent="0" marL="0">
+              <a:buNone/>
+            </a:pPr>
+            <a:r>
+              <a:rPr lang="en-US" sz="1450" b="1" dirty="0">
+                <a:solidFill>
+                  <a:srgbClr val="16262E"/>
+                </a:solidFill>
+                <a:latin typeface="Arial" pitchFamily="34" charset="0"/>
+                <a:ea typeface="Arial" pitchFamily="34" charset="-122"/>
+                <a:cs typeface="Arial" pitchFamily="34" charset="-120"/>
+              </a:rPr>
+              <a:t>얼굴 마스킹 · 화면 까매짐</a:t>
+            </a:r>
+            <a:endParaRPr lang="en-US" sz="1450" dirty="0"/>
+          </a:p>
+        </p:txBody>
+      </p:sp>
+      <p:sp>
+        <p:nvSpPr>
+          <p:cNvPr id="8" name="Text 5"/>
+          <p:cNvSpPr txBox="1"/>
+          <p:nvPr/>
+        </p:nvSpPr>
+        <p:spPr>
+          <a:xfrm>
+            <a:off x="841248" y="2697480"/>
+            <a:ext cx="2194560" cy="2697480"/>
+          </a:xfrm>
+          <a:prstGeom prst="rect">
+            <a:avLst/>
+          </a:prstGeom>
+          <a:noFill/>
+          <a:ln/>
+        </p:spPr>
+        <p:txBody>
+          <a:bodyPr wrap="square" lIns="0" tIns="0" rIns="0" bIns="0" rtlCol="0" anchor="t"/>
+          <a:lstStyle/>
+          <a:p>
+            <a:pPr indent="0" marL="0">
+              <a:lnSpc>
+                <a:spcPct val="115000"/>
+              </a:lnSpc>
+              <a:spcAft>
+                <a:spcPts val="700"/>
+              </a:spcAft>
+              <a:buNone/>
+            </a:pPr>
+            <a:r>
+              <a:rPr lang="en-US" sz="1150" dirty="0">
+                <a:solidFill>
+                  <a:srgbClr val="3C4A50"/>
+                </a:solidFill>
+                <a:latin typeface="Calibri" pitchFamily="34" charset="0"/>
+                <a:ea typeface="Calibri" pitchFamily="34" charset="-122"/>
+                <a:cs typeface="Calibri" pitchFamily="34" charset="-120"/>
+              </a:rPr>
+              <a:t>•  얼굴이 가까워지면 전경 마스크가 얼굴을 지워 사람 인식이 끊김</a:t>
+            </a:r>
+            <a:endParaRPr lang="en-US" sz="1150" dirty="0"/>
+          </a:p>
+          <a:p>
+            <a:pPr indent="0" marL="0">
+              <a:lnSpc>
+                <a:spcPct val="115000"/>
+              </a:lnSpc>
+              <a:spcAft>
+                <a:spcPts val="700"/>
+              </a:spcAft>
+              <a:buNone/>
+            </a:pPr>
+            <a:r>
+              <a:rPr lang="en-US" sz="1150" dirty="0">
+                <a:solidFill>
+                  <a:srgbClr val="3C4A50"/>
+                </a:solidFill>
+                <a:latin typeface="Calibri" pitchFamily="34" charset="0"/>
+                <a:ea typeface="Calibri" pitchFamily="34" charset="-122"/>
+                <a:cs typeface="Calibri" pitchFamily="34" charset="-120"/>
+              </a:rPr>
+              <a:t>•  원인: 구멍 메우기(SDK 기본, 먼 값)가 근접 무효 영역을 배경 거리로 채움</a:t>
+            </a:r>
+            <a:endParaRPr lang="en-US" sz="1150" dirty="0"/>
+          </a:p>
+          <a:p>
+            <a:pPr indent="0" marL="0">
+              <a:lnSpc>
+                <a:spcPct val="115000"/>
+              </a:lnSpc>
+              <a:spcAft>
+                <a:spcPts val="700"/>
+              </a:spcAft>
+              <a:buNone/>
+            </a:pPr>
+            <a:r>
+              <a:rPr lang="en-US" sz="1150" dirty="0">
+                <a:solidFill>
+                  <a:srgbClr val="3C4A50"/>
+                </a:solidFill>
+                <a:latin typeface="Calibri" pitchFamily="34" charset="0"/>
+                <a:ea typeface="Calibri" pitchFamily="34" charset="-122"/>
+                <a:cs typeface="Calibri" pitchFamily="34" charset="-120"/>
+              </a:rPr>
+              <a:t>•  대응: 가까운 값 모드, 최소 거리 0.05m, 마스크 닫힘 연산</a:t>
+            </a:r>
+            <a:endParaRPr lang="en-US" sz="1150" dirty="0"/>
+          </a:p>
+        </p:txBody>
+      </p:sp>
+      <p:sp>
+        <p:nvSpPr>
+          <p:cNvPr id="9" name="Shape 6"/>
+          <p:cNvSpPr/>
+          <p:nvPr/>
+        </p:nvSpPr>
+        <p:spPr>
+          <a:xfrm>
+            <a:off x="3410712" y="1691640"/>
+            <a:ext cx="2596896" cy="3840480"/>
+          </a:xfrm>
+          <a:prstGeom prst="roundRect">
+            <a:avLst>
+              <a:gd name="adj" fmla="val 4225"/>
+            </a:avLst>
+          </a:prstGeom>
+          <a:solidFill>
+            <a:srgbClr val="FFFFFF"/>
+          </a:solidFill>
+          <a:ln/>
+        </p:spPr>
+      </p:sp>
+      <p:sp>
+        <p:nvSpPr>
+          <p:cNvPr id="10" name="Shape 7"/>
+          <p:cNvSpPr/>
+          <p:nvPr/>
+        </p:nvSpPr>
+        <p:spPr>
+          <a:xfrm>
+            <a:off x="3666744" y="1920240"/>
+            <a:ext cx="548640" cy="548640"/>
+          </a:xfrm>
+          <a:prstGeom prst="ellipse">
+            <a:avLst/>
+          </a:prstGeom>
+          <a:solidFill>
+            <a:srgbClr val="12655A"/>
+          </a:solidFill>
+          <a:ln/>
+        </p:spPr>
+      </p:sp>
+      <p:pic>
+        <p:nvPicPr>
+          <p:cNvPr id="11" name="Image 1" descr="preencoded.png">    </p:cNvPr>
+          <p:cNvPicPr>
+            <a:picLocks noChangeAspect="1"/>
+          </p:cNvPicPr>
+          <p:nvPr/>
+        </p:nvPicPr>
+        <p:blipFill>
+          <a:blip r:embed="rId3"/>
+          <a:stretch>
+            <a:fillRect/>
+          </a:stretch>
+        </p:blipFill>
+        <p:spPr>
+          <a:xfrm>
+            <a:off x="3809390" y="2062886"/>
+            <a:ext cx="263347" cy="263347"/>
+          </a:xfrm>
+          <a:prstGeom prst="rect">
+            <a:avLst/>
+          </a:prstGeom>
+        </p:spPr>
+      </p:pic>
+      <p:sp>
+        <p:nvSpPr>
+          <p:cNvPr id="12" name="Text 8"/>
+          <p:cNvSpPr txBox="1"/>
+          <p:nvPr/>
+        </p:nvSpPr>
+        <p:spPr>
+          <a:xfrm>
+            <a:off x="4370832" y="1920240"/>
+            <a:ext cx="1408176" cy="548640"/>
+          </a:xfrm>
+          <a:prstGeom prst="rect">
+            <a:avLst/>
+          </a:prstGeom>
+          <a:noFill/>
+          <a:ln/>
+        </p:spPr>
+        <p:txBody>
+          <a:bodyPr wrap="square" lIns="0" tIns="0" rIns="0" bIns="0" rtlCol="0" anchor="ctr"/>
+          <a:lstStyle/>
+          <a:p>
+            <a:pPr indent="0" marL="0">
+              <a:buNone/>
+            </a:pPr>
+            <a:r>
+              <a:rPr lang="en-US" sz="1450" b="1" dirty="0">
+                <a:solidFill>
+                  <a:srgbClr val="16262E"/>
+                </a:solidFill>
+                <a:latin typeface="Arial" pitchFamily="34" charset="0"/>
+                <a:ea typeface="Arial" pitchFamily="34" charset="-122"/>
+                <a:cs typeface="Arial" pitchFamily="34" charset="-120"/>
+              </a:rPr>
+              <a:t>책상이 허리를 가림</a:t>
+            </a:r>
+            <a:endParaRPr lang="en-US" sz="1450" dirty="0"/>
+          </a:p>
+        </p:txBody>
+      </p:sp>
+      <p:sp>
+        <p:nvSpPr>
+          <p:cNvPr id="13" name="Text 9"/>
+          <p:cNvSpPr txBox="1"/>
+          <p:nvPr/>
+        </p:nvSpPr>
+        <p:spPr>
+          <a:xfrm>
+            <a:off x="3611880" y="2697480"/>
+            <a:ext cx="2194560" cy="2697480"/>
+          </a:xfrm>
+          <a:prstGeom prst="rect">
+            <a:avLst/>
+          </a:prstGeom>
+          <a:noFill/>
+          <a:ln/>
+        </p:spPr>
+        <p:txBody>
+          <a:bodyPr wrap="square" lIns="0" tIns="0" rIns="0" bIns="0" rtlCol="0" anchor="t"/>
+          <a:lstStyle/>
+          <a:p>
+            <a:pPr indent="0" marL="0">
+              <a:lnSpc>
+                <a:spcPct val="115000"/>
+              </a:lnSpc>
+              <a:spcAft>
+                <a:spcPts val="700"/>
+              </a:spcAft>
+              <a:buNone/>
+            </a:pPr>
+            <a:r>
+              <a:rPr lang="en-US" sz="1150" dirty="0">
+                <a:solidFill>
+                  <a:srgbClr val="3C4A50"/>
+                </a:solidFill>
+                <a:latin typeface="Calibri" pitchFamily="34" charset="0"/>
+                <a:ea typeface="Calibri" pitchFamily="34" charset="-122"/>
+                <a:cs typeface="Calibri" pitchFamily="34" charset="-120"/>
+              </a:rPr>
+              <a:t>•  엉덩이가 책상 위치로 추측돼 책상 depth를 읽음 → 정상도 slouch_back 오탐</a:t>
+            </a:r>
+            <a:endParaRPr lang="en-US" sz="1150" dirty="0"/>
+          </a:p>
+          <a:p>
+            <a:pPr indent="0" marL="0">
+              <a:lnSpc>
+                <a:spcPct val="115000"/>
+              </a:lnSpc>
+              <a:spcAft>
+                <a:spcPts val="700"/>
+              </a:spcAft>
+              <a:buNone/>
+            </a:pPr>
+            <a:r>
+              <a:rPr lang="en-US" sz="1150" dirty="0">
+                <a:solidFill>
+                  <a:srgbClr val="3C4A50"/>
+                </a:solidFill>
+                <a:latin typeface="Calibri" pitchFamily="34" charset="0"/>
+                <a:ea typeface="Calibri" pitchFamily="34" charset="-122"/>
+                <a:cs typeface="Calibri" pitchFamily="34" charset="-120"/>
+              </a:rPr>
+              <a:t>•  엉덩이 점수가 0.5 근처라 허리 depth가 켜졌다 꺼짐(정상↔주의 깜빡임)</a:t>
+            </a:r>
+            <a:endParaRPr lang="en-US" sz="1150" dirty="0"/>
+          </a:p>
+          <a:p>
+            <a:pPr indent="0" marL="0">
+              <a:lnSpc>
+                <a:spcPct val="115000"/>
+              </a:lnSpc>
+              <a:spcAft>
+                <a:spcPts val="700"/>
+              </a:spcAft>
+              <a:buNone/>
+            </a:pPr>
+            <a:r>
+              <a:rPr lang="en-US" sz="1150" dirty="0">
+                <a:solidFill>
+                  <a:srgbClr val="3C4A50"/>
+                </a:solidFill>
+                <a:latin typeface="Calibri" pitchFamily="34" charset="0"/>
+                <a:ea typeface="Calibri" pitchFamily="34" charset="-122"/>
+                <a:cs typeface="Calibri" pitchFamily="34" charset="-120"/>
+              </a:rPr>
+              <a:t>•  대응: 엉덩이 confidence ≥ 0.5일 때만 사용, 머리−가슴 depth 차를 보조 신호로</a:t>
+            </a:r>
+            <a:endParaRPr lang="en-US" sz="1150" dirty="0"/>
+          </a:p>
+        </p:txBody>
+      </p:sp>
+      <p:sp>
+        <p:nvSpPr>
+          <p:cNvPr id="14" name="Shape 10"/>
+          <p:cNvSpPr/>
+          <p:nvPr/>
+        </p:nvSpPr>
+        <p:spPr>
+          <a:xfrm>
+            <a:off x="6181344" y="1691640"/>
+            <a:ext cx="2596896" cy="3840480"/>
+          </a:xfrm>
+          <a:prstGeom prst="roundRect">
+            <a:avLst>
+              <a:gd name="adj" fmla="val 4225"/>
+            </a:avLst>
+          </a:prstGeom>
+          <a:solidFill>
+            <a:srgbClr val="FFFFFF"/>
+          </a:solidFill>
+          <a:ln/>
+        </p:spPr>
+      </p:sp>
+      <p:sp>
+        <p:nvSpPr>
+          <p:cNvPr id="15" name="Shape 11"/>
+          <p:cNvSpPr/>
+          <p:nvPr/>
+        </p:nvSpPr>
+        <p:spPr>
+          <a:xfrm>
+            <a:off x="6437376" y="1920240"/>
+            <a:ext cx="548640" cy="548640"/>
+          </a:xfrm>
+          <a:prstGeom prst="ellipse">
+            <a:avLst/>
+          </a:prstGeom>
+          <a:solidFill>
+            <a:srgbClr val="12655A"/>
+          </a:solidFill>
+          <a:ln/>
+        </p:spPr>
+      </p:sp>
+      <p:pic>
+        <p:nvPicPr>
+          <p:cNvPr id="16" name="Image 2" descr="preencoded.png">    </p:cNvPr>
+          <p:cNvPicPr>
+            <a:picLocks noChangeAspect="1"/>
+          </p:cNvPicPr>
+          <p:nvPr/>
+        </p:nvPicPr>
+        <p:blipFill>
+          <a:blip r:embed="rId4"/>
+          <a:stretch>
+            <a:fillRect/>
+          </a:stretch>
+        </p:blipFill>
+        <p:spPr>
+          <a:xfrm>
+            <a:off x="6580022" y="2062886"/>
+            <a:ext cx="263347" cy="263347"/>
+          </a:xfrm>
+          <a:prstGeom prst="rect">
+            <a:avLst/>
+          </a:prstGeom>
+        </p:spPr>
+      </p:pic>
+      <p:sp>
+        <p:nvSpPr>
+          <p:cNvPr id="17" name="Text 12"/>
+          <p:cNvSpPr txBox="1"/>
+          <p:nvPr/>
+        </p:nvSpPr>
+        <p:spPr>
+          <a:xfrm>
+            <a:off x="7141464" y="1920240"/>
+            <a:ext cx="1408176" cy="548640"/>
+          </a:xfrm>
+          <a:prstGeom prst="rect">
+            <a:avLst/>
+          </a:prstGeom>
+          <a:noFill/>
+          <a:ln/>
+        </p:spPr>
+        <p:txBody>
+          <a:bodyPr wrap="square" lIns="0" tIns="0" rIns="0" bIns="0" rtlCol="0" anchor="ctr"/>
+          <a:lstStyle/>
+          <a:p>
+            <a:pPr indent="0" marL="0">
+              <a:buNone/>
+            </a:pPr>
+            <a:r>
+              <a:rPr lang="en-US" sz="1450" b="1" dirty="0">
+                <a:solidFill>
+                  <a:srgbClr val="16262E"/>
+                </a:solidFill>
+                <a:latin typeface="Arial" pitchFamily="34" charset="0"/>
+                <a:ea typeface="Arial" pitchFamily="34" charset="-122"/>
+                <a:cs typeface="Arial" pitchFamily="34" charset="-120"/>
+              </a:rPr>
+              <a:t>앞으로 숙이면 depth 무효</a:t>
+            </a:r>
+            <a:endParaRPr lang="en-US" sz="1450" dirty="0"/>
+          </a:p>
+        </p:txBody>
+      </p:sp>
+      <p:sp>
+        <p:nvSpPr>
+          <p:cNvPr id="18" name="Text 13"/>
+          <p:cNvSpPr txBox="1"/>
+          <p:nvPr/>
+        </p:nvSpPr>
+        <p:spPr>
+          <a:xfrm>
+            <a:off x="6382512" y="2697480"/>
+            <a:ext cx="2194560" cy="2697480"/>
+          </a:xfrm>
+          <a:prstGeom prst="rect">
+            <a:avLst/>
+          </a:prstGeom>
+          <a:noFill/>
+          <a:ln/>
+        </p:spPr>
+        <p:txBody>
+          <a:bodyPr wrap="square" lIns="0" tIns="0" rIns="0" bIns="0" rtlCol="0" anchor="t"/>
+          <a:lstStyle/>
+          <a:p>
+            <a:pPr indent="0" marL="0">
+              <a:lnSpc>
+                <a:spcPct val="115000"/>
+              </a:lnSpc>
+              <a:spcAft>
+                <a:spcPts val="700"/>
+              </a:spcAft>
+              <a:buNone/>
+            </a:pPr>
+            <a:r>
+              <a:rPr lang="en-US" sz="1150" dirty="0">
+                <a:solidFill>
+                  <a:srgbClr val="3C4A50"/>
+                </a:solidFill>
+                <a:latin typeface="Calibri" pitchFamily="34" charset="0"/>
+                <a:ea typeface="Calibri" pitchFamily="34" charset="-122"/>
+                <a:cs typeface="Calibri" pitchFamily="34" charset="-120"/>
+              </a:rPr>
+              <a:t>•  얼굴이 약 30cm 안으로 들어와 머리·가슴 depth가 비면 판정 근거가 사라짐</a:t>
+            </a:r>
+            <a:endParaRPr lang="en-US" sz="1150" dirty="0"/>
+          </a:p>
+          <a:p>
+            <a:pPr indent="0" marL="0">
+              <a:lnSpc>
+                <a:spcPct val="115000"/>
+              </a:lnSpc>
+              <a:spcAft>
+                <a:spcPts val="700"/>
+              </a:spcAft>
+              <a:buNone/>
+            </a:pPr>
+            <a:r>
+              <a:rPr lang="en-US" sz="1150" dirty="0">
+                <a:solidFill>
+                  <a:srgbClr val="3C4A50"/>
+                </a:solidFill>
+                <a:latin typeface="Calibri" pitchFamily="34" charset="0"/>
+                <a:ea typeface="Calibri" pitchFamily="34" charset="-122"/>
+                <a:cs typeface="Calibri" pitchFamily="34" charset="-120"/>
+              </a:rPr>
+              <a:t>•  대응: 코는 보이는데 머리 depth만 무효 → 근접 + 앞숙임 판정</a:t>
+            </a:r>
+            <a:endParaRPr lang="en-US" sz="1150" dirty="0"/>
+          </a:p>
+          <a:p>
+            <a:pPr indent="0" marL="0">
+              <a:lnSpc>
+                <a:spcPct val="115000"/>
+              </a:lnSpc>
+              <a:spcAft>
+                <a:spcPts val="700"/>
+              </a:spcAft>
+              <a:buNone/>
+            </a:pPr>
+            <a:r>
+              <a:rPr lang="en-US" sz="1150" dirty="0">
+                <a:solidFill>
+                  <a:srgbClr val="3C4A50"/>
+                </a:solidFill>
+                <a:latin typeface="Calibri" pitchFamily="34" charset="0"/>
+                <a:ea typeface="Calibri" pitchFamily="34" charset="-122"/>
+                <a:cs typeface="Calibri" pitchFamily="34" charset="-120"/>
+              </a:rPr>
+              <a:t>•  실측: WARNING (slouch_forward) [NEAR] 확인</a:t>
+            </a:r>
+            <a:endParaRPr lang="en-US" sz="1150" dirty="0"/>
+          </a:p>
+        </p:txBody>
+      </p:sp>
+      <p:sp>
+        <p:nvSpPr>
+          <p:cNvPr id="19" name="Shape 14"/>
+          <p:cNvSpPr/>
+          <p:nvPr/>
+        </p:nvSpPr>
+        <p:spPr>
+          <a:xfrm>
+            <a:off x="8951976" y="1691640"/>
+            <a:ext cx="2596896" cy="3840480"/>
+          </a:xfrm>
+          <a:prstGeom prst="roundRect">
+            <a:avLst>
+              <a:gd name="adj" fmla="val 4225"/>
+            </a:avLst>
+          </a:prstGeom>
+          <a:solidFill>
+            <a:srgbClr val="FFFFFF"/>
+          </a:solidFill>
+          <a:ln/>
+        </p:spPr>
+      </p:sp>
+      <p:sp>
+        <p:nvSpPr>
+          <p:cNvPr id="20" name="Shape 15"/>
+          <p:cNvSpPr/>
+          <p:nvPr/>
+        </p:nvSpPr>
+        <p:spPr>
+          <a:xfrm>
+            <a:off x="9208008" y="1920240"/>
+            <a:ext cx="548640" cy="548640"/>
+          </a:xfrm>
+          <a:prstGeom prst="ellipse">
+            <a:avLst/>
+          </a:prstGeom>
+          <a:solidFill>
+            <a:srgbClr val="12655A"/>
+          </a:solidFill>
+          <a:ln/>
+        </p:spPr>
+      </p:sp>
+      <p:pic>
+        <p:nvPicPr>
+          <p:cNvPr id="21" name="Image 3" descr="preencoded.png">    </p:cNvPr>
+          <p:cNvPicPr>
+            <a:picLocks noChangeAspect="1"/>
+          </p:cNvPicPr>
+          <p:nvPr/>
+        </p:nvPicPr>
+        <p:blipFill>
+          <a:blip r:embed="rId5"/>
+          <a:stretch>
+            <a:fillRect/>
+          </a:stretch>
+        </p:blipFill>
+        <p:spPr>
+          <a:xfrm>
+            <a:off x="9350654" y="2062886"/>
+            <a:ext cx="263347" cy="263347"/>
+          </a:xfrm>
+          <a:prstGeom prst="rect">
+            <a:avLst/>
+          </a:prstGeom>
+        </p:spPr>
+      </p:pic>
+      <p:sp>
+        <p:nvSpPr>
+          <p:cNvPr id="22" name="Text 16"/>
+          <p:cNvSpPr txBox="1"/>
+          <p:nvPr/>
+        </p:nvSpPr>
+        <p:spPr>
+          <a:xfrm>
+            <a:off x="9912096" y="1920240"/>
+            <a:ext cx="1408176" cy="548640"/>
+          </a:xfrm>
+          <a:prstGeom prst="rect">
+            <a:avLst/>
+          </a:prstGeom>
+          <a:noFill/>
+          <a:ln/>
+        </p:spPr>
+        <p:txBody>
+          <a:bodyPr wrap="square" lIns="0" tIns="0" rIns="0" bIns="0" rtlCol="0" anchor="ctr"/>
+          <a:lstStyle/>
+          <a:p>
+            <a:pPr indent="0" marL="0">
+              <a:buNone/>
+            </a:pPr>
+            <a:r>
+              <a:rPr lang="en-US" sz="1450" b="1" dirty="0">
+                <a:solidFill>
+                  <a:srgbClr val="16262E"/>
+                </a:solidFill>
+                <a:latin typeface="Arial" pitchFamily="34" charset="0"/>
+                <a:ea typeface="Arial" pitchFamily="34" charset="-122"/>
+                <a:cs typeface="Arial" pitchFamily="34" charset="-120"/>
+              </a:rPr>
+              <a:t>기댐 신호의 겹침</a:t>
+            </a:r>
+            <a:endParaRPr lang="en-US" sz="1450" dirty="0"/>
+          </a:p>
+        </p:txBody>
+      </p:sp>
+      <p:sp>
+        <p:nvSpPr>
+          <p:cNvPr id="23" name="Text 17"/>
+          <p:cNvSpPr txBox="1"/>
+          <p:nvPr/>
+        </p:nvSpPr>
+        <p:spPr>
+          <a:xfrm>
+            <a:off x="9153144" y="2697480"/>
+            <a:ext cx="2194560" cy="2697480"/>
+          </a:xfrm>
+          <a:prstGeom prst="rect">
+            <a:avLst/>
+          </a:prstGeom>
+          <a:noFill/>
+          <a:ln/>
+        </p:spPr>
+        <p:txBody>
+          <a:bodyPr wrap="square" lIns="0" tIns="0" rIns="0" bIns="0" rtlCol="0" anchor="t"/>
+          <a:lstStyle/>
+          <a:p>
+            <a:pPr indent="0" marL="0">
+              <a:lnSpc>
+                <a:spcPct val="115000"/>
+              </a:lnSpc>
+              <a:spcAft>
+                <a:spcPts val="700"/>
+              </a:spcAft>
+              <a:buNone/>
+            </a:pPr>
+            <a:r>
+              <a:rPr lang="en-US" sz="1150" dirty="0">
+                <a:solidFill>
+                  <a:srgbClr val="3C4A50"/>
+                </a:solidFill>
+                <a:latin typeface="Calibri" pitchFamily="34" charset="0"/>
+                <a:ea typeface="Calibri" pitchFamily="34" charset="-122"/>
+                <a:cs typeface="Calibri" pitchFamily="34" charset="-120"/>
+              </a:rPr>
+              <a:t>•  머리−가슴 depth 차: 정상 0.153 / 기댐 0.062 / 심하게 ≈0</a:t>
+            </a:r>
+            <a:endParaRPr lang="en-US" sz="1150" dirty="0"/>
+          </a:p>
+          <a:p>
+            <a:pPr indent="0" marL="0">
+              <a:lnSpc>
+                <a:spcPct val="115000"/>
+              </a:lnSpc>
+              <a:spcAft>
+                <a:spcPts val="700"/>
+              </a:spcAft>
+              <a:buNone/>
+            </a:pPr>
+            <a:r>
+              <a:rPr lang="en-US" sz="1150" dirty="0">
+                <a:solidFill>
+                  <a:srgbClr val="3C4A50"/>
+                </a:solidFill>
+                <a:latin typeface="Calibri" pitchFamily="34" charset="0"/>
+                <a:ea typeface="Calibri" pitchFamily="34" charset="-122"/>
+                <a:cs typeface="Calibri" pitchFamily="34" charset="-120"/>
+              </a:rPr>
+              <a:t>•  앞숙임도 0.062로 줄어 기댐과 겹침 → 근접이 아니고 가슴 ≥ 0.55m일 때만 기댐 신호 사용</a:t>
+            </a:r>
+            <a:endParaRPr lang="en-US" sz="1150" dirty="0"/>
+          </a:p>
+          <a:p>
+            <a:pPr indent="0" marL="0">
+              <a:lnSpc>
+                <a:spcPct val="115000"/>
+              </a:lnSpc>
+              <a:spcAft>
+                <a:spcPts val="700"/>
+              </a:spcAft>
+              <a:buNone/>
+            </a:pPr>
+            <a:r>
+              <a:rPr lang="en-US" sz="1150" dirty="0">
+                <a:solidFill>
+                  <a:srgbClr val="3C4A50"/>
+                </a:solidFill>
+                <a:latin typeface="Calibri" pitchFamily="34" charset="0"/>
+                <a:ea typeface="Calibri" pitchFamily="34" charset="-122"/>
+                <a:cs typeface="Calibri" pitchFamily="34" charset="-120"/>
+              </a:rPr>
+              <a:t>•  한계: 한 명·자세당 1회 값 — 체형·앉는 거리에 따라 달라질 수 있음</a:t>
+            </a:r>
+            <a:endParaRPr lang="en-US" sz="1150" dirty="0"/>
+          </a:p>
+        </p:txBody>
+      </p:sp>
+      <p:sp>
+        <p:nvSpPr>
+          <p:cNvPr id="24" name="Shape 18"/>
+          <p:cNvSpPr/>
+          <p:nvPr/>
+        </p:nvSpPr>
+        <p:spPr>
+          <a:xfrm>
+            <a:off x="640080" y="5715000"/>
+            <a:ext cx="5998464" cy="310896"/>
+          </a:xfrm>
+          <a:prstGeom prst="roundRect">
+            <a:avLst>
+              <a:gd name="adj" fmla="val 50000"/>
+            </a:avLst>
+          </a:prstGeom>
+          <a:solidFill>
+            <a:srgbClr val="3A2A22"/>
+          </a:solidFill>
+          <a:ln/>
+        </p:spPr>
+      </p:sp>
+      <p:sp>
+        <p:nvSpPr>
+          <p:cNvPr id="25" name="Text 19"/>
+          <p:cNvSpPr txBox="1"/>
+          <p:nvPr/>
+        </p:nvSpPr>
+        <p:spPr>
+          <a:xfrm>
+            <a:off x="640080" y="5715000"/>
+            <a:ext cx="5998464" cy="310896"/>
+          </a:xfrm>
+          <a:prstGeom prst="rect">
+            <a:avLst/>
+          </a:prstGeom>
+          <a:noFill/>
+          <a:ln/>
+        </p:spPr>
+        <p:txBody>
+          <a:bodyPr wrap="square" lIns="0" tIns="0" rIns="0" bIns="0" rtlCol="0" anchor="ctr"/>
+          <a:lstStyle/>
+          <a:p>
+            <a:pPr algn="ctr" indent="0" marL="0">
+              <a:buNone/>
+            </a:pPr>
+            <a:r>
+              <a:rPr lang="en-US" sz="1050" b="1" dirty="0">
+                <a:solidFill>
+                  <a:srgbClr val="E8734A"/>
+                </a:solidFill>
+                <a:latin typeface="Calibri" pitchFamily="34" charset="0"/>
+                <a:ea typeface="Calibri" pitchFamily="34" charset="-122"/>
+                <a:cs typeface="Calibri" pitchFamily="34" charset="-120"/>
+              </a:rPr>
+              <a:t>수정 후 정상·뒤기댐·앞숙임·좌우 기울임 판정과 알림 확인(1인) — 다인·다거리 재검증은 6주차</a:t>
+            </a:r>
+            <a:endParaRPr lang="en-US" sz="1050" dirty="0"/>
+          </a:p>
+        </p:txBody>
+      </p:sp>
+      <p:sp>
+        <p:nvSpPr>
+          <p:cNvPr id="26" name="Text 20"/>
           <p:cNvSpPr txBox="1"/>
           <p:nvPr/>
         </p:nvSpPr>

--- a/barunjase_week5.pptx
+++ b/barunjase_week5.pptx
@@ -18,10 +18,9 @@
     <p:sldId id="266" r:id="rId12"/>
     <p:sldId id="267" r:id="rId13"/>
     <p:sldId id="268" r:id="rId14"/>
-    <p:sldId id="269" r:id="rId15"/>
   </p:sldIdLst>
   <p:notesMasterIdLst>
-    <p:notesMasterId r:id="rId16"/>
+    <p:notesMasterId r:id="rId15"/>
   </p:notesMasterIdLst>
   <p:sldSz cx="12192000" cy="6858000"/>
   <p:notesSz cx="6858000" cy="12192000"/>
@@ -1134,94 +1133,6 @@
             <a:fld id="{F7021451-1387-4CA6-816F-3879F97B5CBC}" type="slidenum">
               <a:rPr lang="en-US"/>
               <a:t>13</a:t>
-            </a:fld>
-            <a:endParaRPr lang="en-US"/>
-          </a:p>
-        </p:txBody>
-      </p:sp>
-    </p:spTree>
-    <p:extLst>
-      <p:ext uri="{BB962C8B-B14F-4D97-AF65-F5344CB8AC3E}">
-        <p14:creationId xmlns:p14="http://schemas.microsoft.com/office/powerpoint/2010/main" val="1024086991"/>
-      </p:ext>
-    </p:extLst>
-  </p:cSld>
-  <p:clrMapOvr>
-    <a:masterClrMapping/>
-  </p:clrMapOvr>
-</p:notes>
-</file>
-
-<file path=ppt/notesSlides/notesSlide14.xml><?xml version="1.0" encoding="utf-8"?>
-<p:notes xmlns:a="http://schemas.openxmlformats.org/drawingml/2006/main" xmlns:r="http://schemas.openxmlformats.org/officeDocument/2006/relationships" xmlns:p="http://schemas.openxmlformats.org/presentationml/2006/main">
-  <p:cSld>
-    <p:spTree>
-      <p:nvGrpSpPr>
-        <p:cNvPr id="1" name=""/>
-        <p:cNvGrpSpPr/>
-        <p:nvPr/>
-      </p:nvGrpSpPr>
-      <p:grpSpPr>
-        <a:xfrm>
-          <a:off x="0" y="0"/>
-          <a:ext cx="0" cy="0"/>
-          <a:chOff x="0" y="0"/>
-          <a:chExt cx="0" cy="0"/>
-        </a:xfrm>
-      </p:grpSpPr>
-      <p:sp>
-        <p:nvSpPr>
-          <p:cNvPr id="2" name="Slide Image Placeholder 1"/>
-          <p:cNvSpPr>
-            <a:spLocks noGrp="1" noRot="1" noChangeAspect="1"/>
-          </p:cNvSpPr>
-          <p:nvPr>
-            <p:ph type="sldImg"/>
-          </p:nvPr>
-        </p:nvSpPr>
-        <p:spPr/>
-      </p:sp>
-      <p:sp>
-        <p:nvSpPr>
-          <p:cNvPr id="3" name="Notes Placeholder 2"/>
-          <p:cNvSpPr>
-            <a:spLocks noGrp="1"/>
-          </p:cNvSpPr>
-          <p:nvPr>
-            <p:ph type="body" idx="1"/>
-          </p:nvPr>
-        </p:nvSpPr>
-        <p:spPr/>
-        <p:txBody>
-          <a:bodyPr/>
-          <a:lstStyle/>
-          <a:p>
-            <a:r>
-              <a:rPr lang="en-US" dirty="0"/>
-              <a:t/>
-            </a:r>
-            <a:endParaRPr lang="en-US" dirty="0"/>
-          </a:p>
-        </p:txBody>
-      </p:sp>
-      <p:sp>
-        <p:nvSpPr>
-          <p:cNvPr id="4" name="Slide Number Placeholder 3"/>
-          <p:cNvSpPr>
-            <a:spLocks noGrp="1"/>
-          </p:cNvSpPr>
-          <p:nvPr>
-            <p:ph type="sldNum" sz="quarter" idx="10"/>
-          </p:nvPr>
-        </p:nvSpPr>
-        <p:spPr/>
-        <p:txBody>
-          <a:bodyPr/>
-          <a:lstStyle/>
-          <a:p>
-            <a:fld id="{F7021451-1387-4CA6-816F-3879F97B5CBC}" type="slidenum">
-              <a:rPr lang="en-US"/>
-              <a:t>14</a:t>
             </a:fld>
             <a:endParaRPr lang="en-US"/>
           </a:p>
@@ -6334,7 +6245,7 @@
                 <a:ea typeface="Calibri" pitchFamily="34" charset="-122"/>
                 <a:cs typeface="Calibri" pitchFamily="34" charset="-120"/>
               </a:rPr>
-              <a:t>PRIOR WORK</a:t>
+              <a:t>LIMITS &amp; NEXT</a:t>
             </a:r>
             <a:endParaRPr lang="en-US" sz="1200" dirty="0"/>
           </a:p>
@@ -6373,7 +6284,7 @@
                 <a:ea typeface="Arial" pitchFamily="34" charset="-122"/>
                 <a:cs typeface="Arial" pitchFamily="34" charset="-120"/>
               </a:rPr>
-              <a:t>선행연구로 본 근거와 한계</a:t>
+              <a:t>한계와 카메라 확보 후 할 일</a:t>
             </a:r>
             <a:endParaRPr lang="en-US" sz="2700" dirty="0"/>
           </a:p>
@@ -6388,11 +6299,11 @@
         <p:spPr>
           <a:xfrm>
             <a:off x="640080" y="1691640"/>
-            <a:ext cx="5349240" cy="3657600"/>
+            <a:ext cx="5349240" cy="4434840"/>
           </a:xfrm>
           <a:prstGeom prst="roundRect">
             <a:avLst>
-              <a:gd name="adj" fmla="val 3000"/>
+              <a:gd name="adj" fmla="val 2474"/>
             </a:avLst>
           </a:prstGeom>
           <a:solidFill>
@@ -6478,7 +6389,7 @@
                 <a:ea typeface="Arial" pitchFamily="34" charset="-122"/>
                 <a:cs typeface="Arial" pitchFamily="34" charset="-120"/>
               </a:rPr>
-              <a:t>Manghisi 외 (2017) · Kinect v2 K2RULA</a:t>
+              <a:t>아직 검증되지 않은 것</a:t>
             </a:r>
             <a:endParaRPr lang="en-US" sz="1450" dirty="0"/>
           </a:p>
@@ -6493,7 +6404,7 @@
         <p:spPr>
           <a:xfrm>
             <a:off x="914400" y="2651760"/>
-            <a:ext cx="4800600" cy="2560320"/>
+            <a:ext cx="4846320" cy="3383280"/>
           </a:xfrm>
           <a:prstGeom prst="rect">
             <a:avLst/>
@@ -6515,7 +6426,7 @@
               <a:buNone/>
             </a:pPr>
             <a:r>
-              <a:rPr lang="en-US" sz="1250" dirty="0">
+              <a:rPr lang="en-US" sz="1400" dirty="0">
                 <a:solidFill>
                   <a:srgbClr val="3C4A50"/>
                 </a:solidFill>
@@ -6523,9 +6434,9 @@
                 <a:ea typeface="Calibri" pitchFamily="34" charset="-122"/>
                 <a:cs typeface="Calibri" pitchFamily="34" charset="-120"/>
               </a:rPr>
-              <a:t>•  깊이 카메라로 RULA를 실시간 계산. 광학 모션캡처와 총점 일치 0.97(κ=0.87), RULA 전문가와 0.96(κ=0.84)</a:t>
-            </a:r>
-            <a:endParaRPr lang="en-US" sz="1250" dirty="0"/>
+              <a:t>•  판정(--judge) 기준값 — 1인·자세당 1회 실측, 참가자·앉는 거리·카메라 각도 확대 필요</a:t>
+            </a:r>
+            <a:endParaRPr lang="en-US" sz="1400" dirty="0"/>
           </a:p>
           <a:p>
             <a:pPr indent="0" marL="0">
@@ -6538,7 +6449,7 @@
               <a:buNone/>
             </a:pPr>
             <a:r>
-              <a:rPr lang="en-US" sz="1250" dirty="0">
+              <a:rPr lang="en-US" sz="1400" dirty="0">
                 <a:solidFill>
                   <a:srgbClr val="3C4A50"/>
                 </a:solidFill>
@@ -6546,9 +6457,9 @@
                 <a:ea typeface="Calibri" pitchFamily="34" charset="-122"/>
                 <a:cs typeface="Calibri" pitchFamily="34" charset="-120"/>
               </a:rPr>
-              <a:t>•  몸통 굽힘을 수직 방향 대비 각도로 계산 → 우리 접근과 같은 계열</a:t>
-            </a:r>
-            <a:endParaRPr lang="en-US" sz="1250" dirty="0"/>
+              <a:t>•  근접 보완의 40cm 미만 구간 정확도</a:t>
+            </a:r>
+            <a:endParaRPr lang="en-US" sz="1400" dirty="0"/>
           </a:p>
           <a:p>
             <a:pPr indent="0" marL="0">
@@ -6561,7 +6472,7 @@
               <a:buNone/>
             </a:pPr>
             <a:r>
-              <a:rPr lang="en-US" sz="1250" dirty="0">
+              <a:rPr lang="en-US" sz="1400" dirty="0">
                 <a:solidFill>
                   <a:srgbClr val="3C4A50"/>
                 </a:solidFill>
@@ -6569,9 +6480,9 @@
                 <a:ea typeface="Calibri" pitchFamily="34" charset="-122"/>
                 <a:cs typeface="Calibri" pitchFamily="34" charset="-120"/>
               </a:rPr>
-              <a:t>•  RULA는 구간이 넓어 각도 오차 영향이 줄어듦 → 정상/주의/경고 구간 설계의 근거</a:t>
-            </a:r>
-            <a:endParaRPr lang="en-US" sz="1250" dirty="0"/>
+              <a:t>•  두 명이 앉은 환경에서의 자동 인식·추적</a:t>
+            </a:r>
+            <a:endParaRPr lang="en-US" sz="1400" dirty="0"/>
           </a:p>
           <a:p>
             <a:pPr indent="0" marL="0">
@@ -6584,7 +6495,7 @@
               <a:buNone/>
             </a:pPr>
             <a:r>
-              <a:rPr lang="en-US" sz="1250" dirty="0">
+              <a:rPr lang="en-US" sz="1400" dirty="0">
                 <a:solidFill>
                   <a:srgbClr val="3C4A50"/>
                 </a:solidFill>
@@ -6592,137 +6503,10 @@
                 <a:ea typeface="Calibri" pitchFamily="34" charset="-122"/>
                 <a:cs typeface="Calibri" pitchFamily="34" charset="-120"/>
               </a:rPr>
-              <a:t>•  한계: 배우 1명, 실험실, 가림 없음. 인용된 연구에서 Kinect v2 목 각도 오차 큼 → 거북목 특징 주의</a:t>
-            </a:r>
-            <a:endParaRPr lang="en-US" sz="1250" dirty="0"/>
-          </a:p>
-        </p:txBody>
-      </p:sp>
-      <p:sp>
-        <p:nvSpPr>
-          <p:cNvPr id="9" name="Shape 6"/>
-          <p:cNvSpPr/>
-          <p:nvPr/>
-        </p:nvSpPr>
-        <p:spPr>
-          <a:xfrm>
-            <a:off x="6199632" y="1691640"/>
-            <a:ext cx="5349240" cy="3657600"/>
-          </a:xfrm>
-          <a:prstGeom prst="roundRect">
-            <a:avLst>
-              <a:gd name="adj" fmla="val 3000"/>
-            </a:avLst>
-          </a:prstGeom>
-          <a:solidFill>
-            <a:srgbClr val="FFFFFF"/>
-          </a:solidFill>
-          <a:ln/>
-        </p:spPr>
-      </p:sp>
-      <p:sp>
-        <p:nvSpPr>
-          <p:cNvPr id="10" name="Shape 7"/>
-          <p:cNvSpPr/>
-          <p:nvPr/>
-        </p:nvSpPr>
-        <p:spPr>
-          <a:xfrm>
-            <a:off x="6455664" y="1920240"/>
-            <a:ext cx="548640" cy="548640"/>
-          </a:xfrm>
-          <a:prstGeom prst="ellipse">
-            <a:avLst/>
-          </a:prstGeom>
-          <a:solidFill>
-            <a:srgbClr val="12655A"/>
-          </a:solidFill>
-          <a:ln/>
-        </p:spPr>
-      </p:sp>
-      <p:pic>
-        <p:nvPicPr>
-          <p:cNvPr id="11" name="Image 1" descr="preencoded.png">    </p:cNvPr>
-          <p:cNvPicPr>
-            <a:picLocks noChangeAspect="1"/>
-          </p:cNvPicPr>
-          <p:nvPr/>
-        </p:nvPicPr>
-        <p:blipFill>
-          <a:blip r:embed="rId3"/>
-          <a:stretch>
-            <a:fillRect/>
-          </a:stretch>
-        </p:blipFill>
-        <p:spPr>
-          <a:xfrm>
-            <a:off x="6598310" y="2062886"/>
-            <a:ext cx="263347" cy="263347"/>
-          </a:xfrm>
-          <a:prstGeom prst="rect">
-            <a:avLst/>
-          </a:prstGeom>
-        </p:spPr>
-      </p:pic>
-      <p:sp>
-        <p:nvSpPr>
-          <p:cNvPr id="12" name="Text 8"/>
-          <p:cNvSpPr txBox="1"/>
-          <p:nvPr/>
-        </p:nvSpPr>
-        <p:spPr>
-          <a:xfrm>
-            <a:off x="7159752" y="1920240"/>
-            <a:ext cx="4160520" cy="548640"/>
-          </a:xfrm>
-          <a:prstGeom prst="rect">
-            <a:avLst/>
-          </a:prstGeom>
-          <a:noFill/>
-          <a:ln/>
-        </p:spPr>
-        <p:txBody>
-          <a:bodyPr wrap="square" lIns="0" tIns="0" rIns="0" bIns="0" rtlCol="0" anchor="ctr"/>
-          <a:lstStyle/>
-          <a:p>
-            <a:pPr indent="0" marL="0">
-              <a:buNone/>
-            </a:pPr>
-            <a:r>
-              <a:rPr lang="en-US" sz="1450" b="1" dirty="0">
-                <a:solidFill>
-                  <a:srgbClr val="16262E"/>
-                </a:solidFill>
-                <a:latin typeface="Arial" pitchFamily="34" charset="0"/>
-                <a:ea typeface="Arial" pitchFamily="34" charset="-122"/>
-                <a:cs typeface="Arial" pitchFamily="34" charset="-120"/>
-              </a:rPr>
-              <a:t>Rodrigues 외 (2022) · 3D-AJA</a:t>
-            </a:r>
-            <a:endParaRPr lang="en-US" sz="1450" dirty="0"/>
-          </a:p>
-        </p:txBody>
-      </p:sp>
-      <p:sp>
-        <p:nvSpPr>
-          <p:cNvPr id="13" name="Text 9"/>
-          <p:cNvSpPr txBox="1"/>
-          <p:nvPr/>
-        </p:nvSpPr>
-        <p:spPr>
-          <a:xfrm>
-            <a:off x="6473952" y="2651760"/>
-            <a:ext cx="4800600" cy="2560320"/>
-          </a:xfrm>
-          <a:prstGeom prst="rect">
-            <a:avLst/>
-          </a:prstGeom>
-          <a:noFill/>
-          <a:ln/>
-        </p:spPr>
-        <p:txBody>
-          <a:bodyPr wrap="square" lIns="0" tIns="0" rIns="0" bIns="0" rtlCol="0" anchor="t"/>
-          <a:lstStyle/>
+              <a:t>•  허리가 책상에 가려질 때 허리 depth 기반 판정 불가 — 머리−가슴 depth 차로 보완(1인 기준값)</a:t>
+            </a:r>
+            <a:endParaRPr lang="en-US" sz="1400" dirty="0"/>
+          </a:p>
           <a:p>
             <a:pPr indent="0" marL="0">
               <a:lnSpc>
@@ -6734,7 +6518,7 @@
               <a:buNone/>
             </a:pPr>
             <a:r>
-              <a:rPr lang="en-US" sz="1250" dirty="0">
+              <a:rPr lang="en-US" sz="1400" dirty="0">
                 <a:solidFill>
                   <a:srgbClr val="3C4A50"/>
                 </a:solidFill>
@@ -6742,9 +6526,9 @@
                 <a:ea typeface="Calibri" pitchFamily="34" charset="-122"/>
                 <a:cs typeface="Calibri" pitchFamily="34" charset="-120"/>
               </a:rPr>
-              <a:t>•  사무직 20명, 6가지 책상 세팅. 각도계 대비 평균 오차 5.6~8.5° (Kinect SDK 8.3~18.2°)</a:t>
-            </a:r>
-            <a:endParaRPr lang="en-US" sz="1250" dirty="0"/>
+              <a:t>•  절대 특징의 실제 분포·임계값, IMU 연동</a:t>
+            </a:r>
+            <a:endParaRPr lang="en-US" sz="1400" dirty="0"/>
           </a:p>
           <a:p>
             <a:pPr indent="0" marL="0">
@@ -6757,7 +6541,7 @@
               <a:buNone/>
             </a:pPr>
             <a:r>
-              <a:rPr lang="en-US" sz="1250" dirty="0">
+              <a:rPr lang="en-US" sz="1400" dirty="0">
                 <a:solidFill>
                   <a:srgbClr val="3C4A50"/>
                 </a:solidFill>
@@ -6765,10 +6549,137 @@
                 <a:ea typeface="Calibri" pitchFamily="34" charset="-122"/>
                 <a:cs typeface="Calibri" pitchFamily="34" charset="-120"/>
               </a:rPr>
-              <a:t>•  2D keypoint + 깊이로 3D 각도 계산이 SDK 골격보다 정확 → 우리 구성(MoveNet + depth)과 같은 계열</a:t>
-            </a:r>
-            <a:endParaRPr lang="en-US" sz="1250" dirty="0"/>
-          </a:p>
+              <a:t>•  체형 다양성 — 참가자 2명, 단일 날짜</a:t>
+            </a:r>
+            <a:endParaRPr lang="en-US" sz="1400" dirty="0"/>
+          </a:p>
+        </p:txBody>
+      </p:sp>
+      <p:sp>
+        <p:nvSpPr>
+          <p:cNvPr id="9" name="Shape 6"/>
+          <p:cNvSpPr/>
+          <p:nvPr/>
+        </p:nvSpPr>
+        <p:spPr>
+          <a:xfrm>
+            <a:off x="6199632" y="1691640"/>
+            <a:ext cx="5349240" cy="4434840"/>
+          </a:xfrm>
+          <a:prstGeom prst="roundRect">
+            <a:avLst>
+              <a:gd name="adj" fmla="val 2474"/>
+            </a:avLst>
+          </a:prstGeom>
+          <a:solidFill>
+            <a:srgbClr val="FFFFFF"/>
+          </a:solidFill>
+          <a:ln/>
+        </p:spPr>
+      </p:sp>
+      <p:sp>
+        <p:nvSpPr>
+          <p:cNvPr id="10" name="Shape 7"/>
+          <p:cNvSpPr/>
+          <p:nvPr/>
+        </p:nvSpPr>
+        <p:spPr>
+          <a:xfrm>
+            <a:off x="6455664" y="1920240"/>
+            <a:ext cx="548640" cy="548640"/>
+          </a:xfrm>
+          <a:prstGeom prst="ellipse">
+            <a:avLst/>
+          </a:prstGeom>
+          <a:solidFill>
+            <a:srgbClr val="12655A"/>
+          </a:solidFill>
+          <a:ln/>
+        </p:spPr>
+      </p:sp>
+      <p:pic>
+        <p:nvPicPr>
+          <p:cNvPr id="11" name="Image 1" descr="preencoded.png">    </p:cNvPr>
+          <p:cNvPicPr>
+            <a:picLocks noChangeAspect="1"/>
+          </p:cNvPicPr>
+          <p:nvPr/>
+        </p:nvPicPr>
+        <p:blipFill>
+          <a:blip r:embed="rId3"/>
+          <a:stretch>
+            <a:fillRect/>
+          </a:stretch>
+        </p:blipFill>
+        <p:spPr>
+          <a:xfrm>
+            <a:off x="6598310" y="2062886"/>
+            <a:ext cx="263347" cy="263347"/>
+          </a:xfrm>
+          <a:prstGeom prst="rect">
+            <a:avLst/>
+          </a:prstGeom>
+        </p:spPr>
+      </p:pic>
+      <p:sp>
+        <p:nvSpPr>
+          <p:cNvPr id="12" name="Text 8"/>
+          <p:cNvSpPr txBox="1"/>
+          <p:nvPr/>
+        </p:nvSpPr>
+        <p:spPr>
+          <a:xfrm>
+            <a:off x="7159752" y="1920240"/>
+            <a:ext cx="4160520" cy="548640"/>
+          </a:xfrm>
+          <a:prstGeom prst="rect">
+            <a:avLst/>
+          </a:prstGeom>
+          <a:noFill/>
+          <a:ln/>
+        </p:spPr>
+        <p:txBody>
+          <a:bodyPr wrap="square" lIns="0" tIns="0" rIns="0" bIns="0" rtlCol="0" anchor="ctr"/>
+          <a:lstStyle/>
+          <a:p>
+            <a:pPr indent="0" marL="0">
+              <a:buNone/>
+            </a:pPr>
+            <a:r>
+              <a:rPr lang="en-US" sz="1450" b="1" dirty="0">
+                <a:solidFill>
+                  <a:srgbClr val="16262E"/>
+                </a:solidFill>
+                <a:latin typeface="Arial" pitchFamily="34" charset="0"/>
+                <a:ea typeface="Arial" pitchFamily="34" charset="-122"/>
+                <a:cs typeface="Arial" pitchFamily="34" charset="-120"/>
+              </a:rPr>
+              <a:t>카메라 확보 상태에서 남은 실측 (체크리스트)</a:t>
+            </a:r>
+            <a:endParaRPr lang="en-US" sz="1450" dirty="0"/>
+          </a:p>
+        </p:txBody>
+      </p:sp>
+      <p:sp>
+        <p:nvSpPr>
+          <p:cNvPr id="13" name="Text 9"/>
+          <p:cNvSpPr txBox="1"/>
+          <p:nvPr/>
+        </p:nvSpPr>
+        <p:spPr>
+          <a:xfrm>
+            <a:off x="6473952" y="2651760"/>
+            <a:ext cx="4846320" cy="3383280"/>
+          </a:xfrm>
+          <a:prstGeom prst="rect">
+            <a:avLst/>
+          </a:prstGeom>
+          <a:noFill/>
+          <a:ln/>
+        </p:spPr>
+        <p:txBody>
+          <a:bodyPr wrap="square" lIns="0" tIns="0" rIns="0" bIns="0" rtlCol="0" anchor="t"/>
+          <a:lstStyle/>
           <a:p>
             <a:pPr indent="0" marL="0">
               <a:lnSpc>
@@ -6780,7 +6691,7 @@
               <a:buNone/>
             </a:pPr>
             <a:r>
-              <a:rPr lang="en-US" sz="1250" dirty="0">
+              <a:rPr lang="en-US" sz="1400" dirty="0">
                 <a:solidFill>
                   <a:srgbClr val="3C4A50"/>
                 </a:solidFill>
@@ -6788,9 +6699,9 @@
                 <a:ea typeface="Calibri" pitchFamily="34" charset="-122"/>
                 <a:cs typeface="Calibri" pitchFamily="34" charset="-120"/>
               </a:rPr>
-              <a:t>•  임상 기준(±5°)은 이 논문도 못 넘음 → 우리도 5~8° 수준이 현실적인 기대치</a:t>
-            </a:r>
-            <a:endParaRPr lang="en-US" sz="1250" dirty="0"/>
+              <a:t>•  알림 쿨다운 시간 확인(60초/300초), 40cm 미만 근접, ROI 추적, 다인 환경</a:t>
+            </a:r>
+            <a:endParaRPr lang="en-US" sz="1400" dirty="0"/>
           </a:p>
           <a:p>
             <a:pPr indent="0" marL="0">
@@ -6803,7 +6714,7 @@
               <a:buNone/>
             </a:pPr>
             <a:r>
-              <a:rPr lang="en-US" sz="1250" dirty="0">
+              <a:rPr lang="en-US" sz="1400" dirty="0">
                 <a:solidFill>
                   <a:srgbClr val="3C4A50"/>
                 </a:solidFill>
@@ -6811,76 +6722,107 @@
                 <a:ea typeface="Calibri" pitchFamily="34" charset="-122"/>
                 <a:cs typeface="Calibri" pitchFamily="34" charset="-120"/>
               </a:rPr>
-              <a:t>•  한계: 책상에 가려지면 성능 하락, 체형·성별 차이 분석엔 표본 부족</a:t>
-            </a:r>
-            <a:endParaRPr lang="en-US" sz="1250" dirty="0"/>
-          </a:p>
-        </p:txBody>
-      </p:sp>
-      <p:sp>
-        <p:nvSpPr>
-          <p:cNvPr id="14" name="Shape 10"/>
-          <p:cNvSpPr/>
-          <p:nvPr/>
-        </p:nvSpPr>
-        <p:spPr>
-          <a:xfrm>
-            <a:off x="640080" y="5486400"/>
-            <a:ext cx="10908792" cy="731520"/>
-          </a:xfrm>
-          <a:prstGeom prst="roundRect">
-            <a:avLst>
-              <a:gd name="adj" fmla="val 15000"/>
-            </a:avLst>
-          </a:prstGeom>
-          <a:solidFill>
-            <a:srgbClr val="12655A"/>
-          </a:solidFill>
-          <a:ln/>
-        </p:spPr>
-      </p:sp>
-      <p:sp>
-        <p:nvSpPr>
-          <p:cNvPr id="15" name="Text 11"/>
-          <p:cNvSpPr txBox="1"/>
-          <p:nvPr/>
-        </p:nvSpPr>
-        <p:spPr>
-          <a:xfrm>
-            <a:off x="914400" y="5486400"/>
-            <a:ext cx="10424160" cy="731520"/>
-          </a:xfrm>
-          <a:prstGeom prst="rect">
-            <a:avLst/>
-          </a:prstGeom>
-          <a:noFill/>
-          <a:ln/>
-        </p:spPr>
-        <p:txBody>
-          <a:bodyPr wrap="square" lIns="0" tIns="0" rIns="0" bIns="0" rtlCol="0" anchor="ctr"/>
-          <a:lstStyle/>
+              <a:t>•  참가자·거리·카메라 각도를 바꿔 --judge 로그 재측정, 기준값 재보정</a:t>
+            </a:r>
+            <a:endParaRPr lang="en-US" sz="1400" dirty="0"/>
+          </a:p>
           <a:p>
             <a:pPr indent="0" marL="0">
+              <a:lnSpc>
+                <a:spcPct val="115000"/>
+              </a:lnSpc>
+              <a:spcAft>
+                <a:spcPts val="700"/>
+              </a:spcAft>
               <a:buNone/>
             </a:pPr>
             <a:r>
-              <a:rPr lang="en-US" sz="1250" b="1" dirty="0">
+              <a:rPr lang="en-US" sz="1400" dirty="0">
                 <a:solidFill>
-                  <a:srgbClr val="EAF3F1"/>
+                  <a:srgbClr val="3C4A50"/>
                 </a:solidFill>
                 <a:latin typeface="Calibri" pitchFamily="34" charset="0"/>
                 <a:ea typeface="Calibri" pitchFamily="34" charset="-122"/>
                 <a:cs typeface="Calibri" pitchFamily="34" charset="-120"/>
               </a:rPr>
-              <a:t>두 논문 모두 거리 고정·카메라 정면 설치였고, '거리에 불변'과 'IMU로 기울기 보정'은 검증하지 않음 → 이 두 가지는 우리가 직접 실험으로 보일 부분</a:t>
-            </a:r>
-            <a:endParaRPr lang="en-US" sz="1250" dirty="0"/>
+              <a:t>•  IMU 스트림·내부 파라미터 읽기, 새 특징을 캡처 로그에 기록</a:t>
+            </a:r>
+            <a:endParaRPr lang="en-US" sz="1400" dirty="0"/>
+          </a:p>
+          <a:p>
+            <a:pPr indent="0" marL="0">
+              <a:lnSpc>
+                <a:spcPct val="115000"/>
+              </a:lnSpc>
+              <a:spcAft>
+                <a:spcPts val="700"/>
+              </a:spcAft>
+              <a:buNone/>
+            </a:pPr>
+            <a:r>
+              <a:rPr lang="en-US" sz="1400" dirty="0">
+                <a:solidFill>
+                  <a:srgbClr val="3C4A50"/>
+                </a:solidFill>
+                <a:latin typeface="Calibri" pitchFamily="34" charset="0"/>
+                <a:ea typeface="Calibri" pitchFamily="34" charset="-122"/>
+                <a:cs typeface="Calibri" pitchFamily="34" charset="-120"/>
+              </a:rPr>
+              <a:t>•  거리·카메라 기울기 불변성 실험</a:t>
+            </a:r>
+            <a:endParaRPr lang="en-US" sz="1400" dirty="0"/>
+          </a:p>
+          <a:p>
+            <a:pPr indent="0" marL="0">
+              <a:lnSpc>
+                <a:spcPct val="115000"/>
+              </a:lnSpc>
+              <a:spcAft>
+                <a:spcPts val="700"/>
+              </a:spcAft>
+              <a:buNone/>
+            </a:pPr>
+            <a:r>
+              <a:rPr lang="en-US" sz="1400" dirty="0">
+                <a:solidFill>
+                  <a:srgbClr val="3C4A50"/>
+                </a:solidFill>
+                <a:latin typeface="Calibri" pitchFamily="34" charset="0"/>
+                <a:ea typeface="Calibri" pitchFamily="34" charset="-122"/>
+                <a:cs typeface="Calibri" pitchFamily="34" charset="-120"/>
+              </a:rPr>
+              <a:t>•  새 참가자·다른 조명/복장으로 추가 수집</a:t>
+            </a:r>
+            <a:endParaRPr lang="en-US" sz="1400" dirty="0"/>
+          </a:p>
+          <a:p>
+            <a:pPr indent="0" marL="0">
+              <a:lnSpc>
+                <a:spcPct val="115000"/>
+              </a:lnSpc>
+              <a:spcAft>
+                <a:spcPts val="700"/>
+              </a:spcAft>
+              <a:buNone/>
+            </a:pPr>
+            <a:r>
+              <a:rPr lang="en-US" sz="1400" dirty="0">
+                <a:solidFill>
+                  <a:srgbClr val="3C4A50"/>
+                </a:solidFill>
+                <a:latin typeface="Calibri" pitchFamily="34" charset="0"/>
+                <a:ea typeface="Calibri" pitchFamily="34" charset="-122"/>
+                <a:cs typeface="Calibri" pitchFamily="34" charset="-120"/>
+              </a:rPr>
+              <a:t>•  반납 전 로그 커밋 — depth는 사후 복구 불가</a:t>
+            </a:r>
+            <a:endParaRPr lang="en-US" sz="1400" dirty="0"/>
           </a:p>
         </p:txBody>
       </p:sp>
       <p:sp>
         <p:nvSpPr>
-          <p:cNvPr id="16" name="Text 12"/>
+          <p:cNvPr id="14" name="Text 10"/>
           <p:cNvSpPr txBox="1"/>
           <p:nvPr/>
         </p:nvSpPr>
@@ -6989,7 +6931,7 @@
                 <a:ea typeface="Calibri" pitchFamily="34" charset="-122"/>
                 <a:cs typeface="Calibri" pitchFamily="34" charset="-120"/>
               </a:rPr>
-              <a:t>LIMITS &amp; NEXT</a:t>
+              <a:t>NEXT WEEK</a:t>
             </a:r>
             <a:endParaRPr lang="en-US" sz="1200" dirty="0"/>
           </a:p>
@@ -7028,7 +6970,7 @@
                 <a:ea typeface="Arial" pitchFamily="34" charset="-122"/>
                 <a:cs typeface="Arial" pitchFamily="34" charset="-120"/>
               </a:rPr>
-              <a:t>한계와 카메라 확보 후 할 일</a:t>
+              <a:t>6주차 계획</a:t>
             </a:r>
             <a:endParaRPr lang="en-US" sz="2700" dirty="0"/>
           </a:p>
@@ -7042,12 +6984,12 @@
         </p:nvSpPr>
         <p:spPr>
           <a:xfrm>
-            <a:off x="640080" y="1691640"/>
-            <a:ext cx="5349240" cy="4434840"/>
+            <a:off x="640080" y="1737360"/>
+            <a:ext cx="10908792" cy="731520"/>
           </a:xfrm>
           <a:prstGeom prst="roundRect">
             <a:avLst>
-              <a:gd name="adj" fmla="val 2474"/>
+              <a:gd name="adj" fmla="val 15000"/>
             </a:avLst>
           </a:prstGeom>
           <a:solidFill>
@@ -7064,52 +7006,30 @@
         </p:nvSpPr>
         <p:spPr>
           <a:xfrm>
-            <a:off x="896112" y="1920240"/>
-            <a:ext cx="548640" cy="548640"/>
-          </a:xfrm>
-          <a:prstGeom prst="ellipse">
-            <a:avLst/>
+            <a:off x="822960" y="1920240"/>
+            <a:ext cx="502920" cy="365760"/>
+          </a:xfrm>
+          <a:prstGeom prst="roundRect">
+            <a:avLst>
+              <a:gd name="adj" fmla="val 20000"/>
+            </a:avLst>
           </a:prstGeom>
           <a:solidFill>
-            <a:srgbClr val="12655A"/>
+            <a:srgbClr val="E9FBF7"/>
           </a:solidFill>
           <a:ln/>
         </p:spPr>
       </p:sp>
-      <p:pic>
-        <p:nvPicPr>
-          <p:cNvPr id="6" name="Image 0" descr="preencoded.png">    </p:cNvPr>
-          <p:cNvPicPr>
-            <a:picLocks noChangeAspect="1"/>
-          </p:cNvPicPr>
-          <p:nvPr/>
-        </p:nvPicPr>
-        <p:blipFill>
-          <a:blip r:embed="rId2"/>
-          <a:stretch>
-            <a:fillRect/>
-          </a:stretch>
-        </p:blipFill>
-        <p:spPr>
-          <a:xfrm>
-            <a:off x="1038758" y="2062886"/>
-            <a:ext cx="263347" cy="263347"/>
-          </a:xfrm>
-          <a:prstGeom prst="rect">
-            <a:avLst/>
-          </a:prstGeom>
-        </p:spPr>
-      </p:pic>
-      <p:sp>
-        <p:nvSpPr>
-          <p:cNvPr id="7" name="Text 4"/>
+      <p:sp>
+        <p:nvSpPr>
+          <p:cNvPr id="6" name="Text 4"/>
           <p:cNvSpPr txBox="1"/>
           <p:nvPr/>
         </p:nvSpPr>
         <p:spPr>
           <a:xfrm>
-            <a:off x="1600200" y="1920240"/>
-            <a:ext cx="4160520" cy="548640"/>
+            <a:off x="822960" y="1920240"/>
+            <a:ext cx="502920" cy="365760"/>
           </a:xfrm>
           <a:prstGeom prst="rect">
             <a:avLst/>
@@ -7121,198 +7041,330 @@
           <a:bodyPr wrap="square" lIns="0" tIns="0" rIns="0" bIns="0" rtlCol="0" anchor="ctr"/>
           <a:lstStyle/>
           <a:p>
-            <a:pPr indent="0" marL="0">
+            <a:pPr algn="ctr" indent="0" marL="0">
               <a:buNone/>
             </a:pPr>
             <a:r>
-              <a:rPr lang="en-US" sz="1450" b="1" dirty="0">
+              <a:rPr lang="en-US" sz="1100" b="1" dirty="0">
                 <a:solidFill>
-                  <a:srgbClr val="16262E"/>
-                </a:solidFill>
-                <a:latin typeface="Arial" pitchFamily="34" charset="0"/>
-                <a:ea typeface="Arial" pitchFamily="34" charset="-122"/>
-                <a:cs typeface="Arial" pitchFamily="34" charset="-120"/>
-              </a:rPr>
-              <a:t>아직 검증되지 않은 것</a:t>
-            </a:r>
-            <a:endParaRPr lang="en-US" sz="1450" dirty="0"/>
-          </a:p>
-        </p:txBody>
-      </p:sp>
-      <p:sp>
-        <p:nvSpPr>
-          <p:cNvPr id="8" name="Text 5"/>
-          <p:cNvSpPr txBox="1"/>
-          <p:nvPr/>
-        </p:nvSpPr>
-        <p:spPr>
-          <a:xfrm>
-            <a:off x="914400" y="2651760"/>
-            <a:ext cx="4846320" cy="3383280"/>
-          </a:xfrm>
-          <a:prstGeom prst="rect">
-            <a:avLst/>
-          </a:prstGeom>
-          <a:noFill/>
-          <a:ln/>
-        </p:spPr>
-        <p:txBody>
-          <a:bodyPr wrap="square" lIns="0" tIns="0" rIns="0" bIns="0" rtlCol="0" anchor="t"/>
-          <a:lstStyle/>
-          <a:p>
-            <a:pPr indent="0" marL="0">
-              <a:lnSpc>
-                <a:spcPct val="115000"/>
-              </a:lnSpc>
-              <a:spcAft>
-                <a:spcPts val="700"/>
-              </a:spcAft>
-              <a:buNone/>
-            </a:pPr>
-            <a:r>
-              <a:rPr lang="en-US" sz="1400" dirty="0">
-                <a:solidFill>
-                  <a:srgbClr val="3C4A50"/>
+                  <a:srgbClr val="12655A"/>
                 </a:solidFill>
                 <a:latin typeface="Calibri" pitchFamily="34" charset="0"/>
                 <a:ea typeface="Calibri" pitchFamily="34" charset="-122"/>
                 <a:cs typeface="Calibri" pitchFamily="34" charset="-120"/>
               </a:rPr>
-              <a:t>•  판정(--judge) 기준값 — 1인·자세당 1회 실측, 참가자·앉는 거리·카메라 각도 확대 필요</a:t>
-            </a:r>
-            <a:endParaRPr lang="en-US" sz="1400" dirty="0"/>
-          </a:p>
+              <a:t>1</a:t>
+            </a:r>
+            <a:endParaRPr lang="en-US" sz="1100" dirty="0"/>
+          </a:p>
+        </p:txBody>
+      </p:sp>
+      <p:sp>
+        <p:nvSpPr>
+          <p:cNvPr id="7" name="Text 5"/>
+          <p:cNvSpPr txBox="1"/>
+          <p:nvPr/>
+        </p:nvSpPr>
+        <p:spPr>
+          <a:xfrm>
+            <a:off x="1508760" y="1737360"/>
+            <a:ext cx="9875520" cy="731520"/>
+          </a:xfrm>
+          <a:prstGeom prst="rect">
+            <a:avLst/>
+          </a:prstGeom>
+          <a:noFill/>
+          <a:ln/>
+        </p:spPr>
+        <p:txBody>
+          <a:bodyPr wrap="square" lIns="0" tIns="0" rIns="0" bIns="0" rtlCol="0" anchor="ctr"/>
+          <a:lstStyle/>
           <a:p>
             <a:pPr indent="0" marL="0">
               <a:lnSpc>
-                <a:spcPct val="115000"/>
+                <a:spcPct val="110000"/>
               </a:lnSpc>
-              <a:spcAft>
-                <a:spcPts val="700"/>
-              </a:spcAft>
               <a:buNone/>
             </a:pPr>
             <a:r>
-              <a:rPr lang="en-US" sz="1400" dirty="0">
+              <a:rPr lang="en-US" sz="1500" dirty="0">
                 <a:solidFill>
-                  <a:srgbClr val="3C4A50"/>
+                  <a:srgbClr val="16262E"/>
                 </a:solidFill>
                 <a:latin typeface="Calibri" pitchFamily="34" charset="0"/>
                 <a:ea typeface="Calibri" pitchFamily="34" charset="-122"/>
                 <a:cs typeface="Calibri" pitchFamily="34" charset="-120"/>
               </a:rPr>
-              <a:t>•  근접 보완의 40cm 미만 구간 정확도</a:t>
-            </a:r>
-            <a:endParaRPr lang="en-US" sz="1400" dirty="0"/>
-          </a:p>
-          <a:p>
-            <a:pPr indent="0" marL="0">
-              <a:lnSpc>
-                <a:spcPct val="115000"/>
-              </a:lnSpc>
-              <a:spcAft>
-                <a:spcPts val="700"/>
-              </a:spcAft>
+              <a:t>판정 기준 다인·다거리 재보정, 절대 특징 실험(IMU·불변성), 알림 쿨다운 확인</a:t>
+            </a:r>
+            <a:endParaRPr lang="en-US" sz="1500" dirty="0"/>
+          </a:p>
+        </p:txBody>
+      </p:sp>
+      <p:sp>
+        <p:nvSpPr>
+          <p:cNvPr id="8" name="Shape 6"/>
+          <p:cNvSpPr/>
+          <p:nvPr/>
+        </p:nvSpPr>
+        <p:spPr>
+          <a:xfrm>
+            <a:off x="640080" y="2578608"/>
+            <a:ext cx="10908792" cy="731520"/>
+          </a:xfrm>
+          <a:prstGeom prst="roundRect">
+            <a:avLst>
+              <a:gd name="adj" fmla="val 15000"/>
+            </a:avLst>
+          </a:prstGeom>
+          <a:solidFill>
+            <a:srgbClr val="FFFFFF"/>
+          </a:solidFill>
+          <a:ln/>
+        </p:spPr>
+      </p:sp>
+      <p:sp>
+        <p:nvSpPr>
+          <p:cNvPr id="9" name="Shape 7"/>
+          <p:cNvSpPr/>
+          <p:nvPr/>
+        </p:nvSpPr>
+        <p:spPr>
+          <a:xfrm>
+            <a:off x="822960" y="2761488"/>
+            <a:ext cx="502920" cy="365760"/>
+          </a:xfrm>
+          <a:prstGeom prst="roundRect">
+            <a:avLst>
+              <a:gd name="adj" fmla="val 20000"/>
+            </a:avLst>
+          </a:prstGeom>
+          <a:solidFill>
+            <a:srgbClr val="E9FBF7"/>
+          </a:solidFill>
+          <a:ln/>
+        </p:spPr>
+      </p:sp>
+      <p:sp>
+        <p:nvSpPr>
+          <p:cNvPr id="10" name="Text 8"/>
+          <p:cNvSpPr txBox="1"/>
+          <p:nvPr/>
+        </p:nvSpPr>
+        <p:spPr>
+          <a:xfrm>
+            <a:off x="822960" y="2761488"/>
+            <a:ext cx="502920" cy="365760"/>
+          </a:xfrm>
+          <a:prstGeom prst="rect">
+            <a:avLst/>
+          </a:prstGeom>
+          <a:noFill/>
+          <a:ln/>
+        </p:spPr>
+        <p:txBody>
+          <a:bodyPr wrap="square" lIns="0" tIns="0" rIns="0" bIns="0" rtlCol="0" anchor="ctr"/>
+          <a:lstStyle/>
+          <a:p>
+            <a:pPr algn="ctr" indent="0" marL="0">
               <a:buNone/>
             </a:pPr>
             <a:r>
-              <a:rPr lang="en-US" sz="1400" dirty="0">
+              <a:rPr lang="en-US" sz="1100" b="1" dirty="0">
                 <a:solidFill>
-                  <a:srgbClr val="3C4A50"/>
+                  <a:srgbClr val="12655A"/>
                 </a:solidFill>
                 <a:latin typeface="Calibri" pitchFamily="34" charset="0"/>
                 <a:ea typeface="Calibri" pitchFamily="34" charset="-122"/>
                 <a:cs typeface="Calibri" pitchFamily="34" charset="-120"/>
               </a:rPr>
-              <a:t>•  두 명이 앉은 환경에서의 자동 인식·추적</a:t>
-            </a:r>
-            <a:endParaRPr lang="en-US" sz="1400" dirty="0"/>
-          </a:p>
+              <a:t>2</a:t>
+            </a:r>
+            <a:endParaRPr lang="en-US" sz="1100" dirty="0"/>
+          </a:p>
+        </p:txBody>
+      </p:sp>
+      <p:sp>
+        <p:nvSpPr>
+          <p:cNvPr id="11" name="Text 9"/>
+          <p:cNvSpPr txBox="1"/>
+          <p:nvPr/>
+        </p:nvSpPr>
+        <p:spPr>
+          <a:xfrm>
+            <a:off x="1508760" y="2578608"/>
+            <a:ext cx="9875520" cy="731520"/>
+          </a:xfrm>
+          <a:prstGeom prst="rect">
+            <a:avLst/>
+          </a:prstGeom>
+          <a:noFill/>
+          <a:ln/>
+        </p:spPr>
+        <p:txBody>
+          <a:bodyPr wrap="square" lIns="0" tIns="0" rIns="0" bIns="0" rtlCol="0" anchor="ctr"/>
+          <a:lstStyle/>
           <a:p>
             <a:pPr indent="0" marL="0">
               <a:lnSpc>
-                <a:spcPct val="115000"/>
+                <a:spcPct val="110000"/>
               </a:lnSpc>
-              <a:spcAft>
-                <a:spcPts val="700"/>
-              </a:spcAft>
               <a:buNone/>
             </a:pPr>
             <a:r>
-              <a:rPr lang="en-US" sz="1400" dirty="0">
+              <a:rPr lang="en-US" sz="1500" dirty="0">
                 <a:solidFill>
-                  <a:srgbClr val="3C4A50"/>
+                  <a:srgbClr val="16262E"/>
                 </a:solidFill>
                 <a:latin typeface="Calibri" pitchFamily="34" charset="0"/>
                 <a:ea typeface="Calibri" pitchFamily="34" charset="-122"/>
                 <a:cs typeface="Calibri" pitchFamily="34" charset="-120"/>
               </a:rPr>
-              <a:t>•  허리가 책상에 가려질 때 허리 depth 기반 판정 불가 — 머리−가슴 depth 차로 보완(1인 기준값)</a:t>
-            </a:r>
-            <a:endParaRPr lang="en-US" sz="1400" dirty="0"/>
-          </a:p>
-          <a:p>
-            <a:pPr indent="0" marL="0">
-              <a:lnSpc>
-                <a:spcPct val="115000"/>
-              </a:lnSpc>
-              <a:spcAft>
-                <a:spcPts val="700"/>
-              </a:spcAft>
+              <a:t>데이터 라벨링 마무리, 교차검증 결과 반영, 추가 참가자 수집</a:t>
+            </a:r>
+            <a:endParaRPr lang="en-US" sz="1500" dirty="0"/>
+          </a:p>
+        </p:txBody>
+      </p:sp>
+      <p:sp>
+        <p:nvSpPr>
+          <p:cNvPr id="12" name="Shape 10"/>
+          <p:cNvSpPr/>
+          <p:nvPr/>
+        </p:nvSpPr>
+        <p:spPr>
+          <a:xfrm>
+            <a:off x="640080" y="3419856"/>
+            <a:ext cx="10908792" cy="731520"/>
+          </a:xfrm>
+          <a:prstGeom prst="roundRect">
+            <a:avLst>
+              <a:gd name="adj" fmla="val 15000"/>
+            </a:avLst>
+          </a:prstGeom>
+          <a:solidFill>
+            <a:srgbClr val="FFFFFF"/>
+          </a:solidFill>
+          <a:ln/>
+        </p:spPr>
+      </p:sp>
+      <p:sp>
+        <p:nvSpPr>
+          <p:cNvPr id="13" name="Shape 11"/>
+          <p:cNvSpPr/>
+          <p:nvPr/>
+        </p:nvSpPr>
+        <p:spPr>
+          <a:xfrm>
+            <a:off x="822960" y="3602736"/>
+            <a:ext cx="502920" cy="365760"/>
+          </a:xfrm>
+          <a:prstGeom prst="roundRect">
+            <a:avLst>
+              <a:gd name="adj" fmla="val 20000"/>
+            </a:avLst>
+          </a:prstGeom>
+          <a:solidFill>
+            <a:srgbClr val="E9FBF7"/>
+          </a:solidFill>
+          <a:ln/>
+        </p:spPr>
+      </p:sp>
+      <p:sp>
+        <p:nvSpPr>
+          <p:cNvPr id="14" name="Text 12"/>
+          <p:cNvSpPr txBox="1"/>
+          <p:nvPr/>
+        </p:nvSpPr>
+        <p:spPr>
+          <a:xfrm>
+            <a:off x="822960" y="3602736"/>
+            <a:ext cx="502920" cy="365760"/>
+          </a:xfrm>
+          <a:prstGeom prst="rect">
+            <a:avLst/>
+          </a:prstGeom>
+          <a:noFill/>
+          <a:ln/>
+        </p:spPr>
+        <p:txBody>
+          <a:bodyPr wrap="square" lIns="0" tIns="0" rIns="0" bIns="0" rtlCol="0" anchor="ctr"/>
+          <a:lstStyle/>
+          <a:p>
+            <a:pPr algn="ctr" indent="0" marL="0">
               <a:buNone/>
             </a:pPr>
             <a:r>
-              <a:rPr lang="en-US" sz="1400" dirty="0">
+              <a:rPr lang="en-US" sz="1100" b="1" dirty="0">
                 <a:solidFill>
-                  <a:srgbClr val="3C4A50"/>
+                  <a:srgbClr val="12655A"/>
                 </a:solidFill>
                 <a:latin typeface="Calibri" pitchFamily="34" charset="0"/>
                 <a:ea typeface="Calibri" pitchFamily="34" charset="-122"/>
                 <a:cs typeface="Calibri" pitchFamily="34" charset="-120"/>
               </a:rPr>
-              <a:t>•  절대 특징의 실제 분포·임계값, IMU 연동</a:t>
-            </a:r>
-            <a:endParaRPr lang="en-US" sz="1400" dirty="0"/>
-          </a:p>
+              <a:t>3</a:t>
+            </a:r>
+            <a:endParaRPr lang="en-US" sz="1100" dirty="0"/>
+          </a:p>
+        </p:txBody>
+      </p:sp>
+      <p:sp>
+        <p:nvSpPr>
+          <p:cNvPr id="15" name="Text 13"/>
+          <p:cNvSpPr txBox="1"/>
+          <p:nvPr/>
+        </p:nvSpPr>
+        <p:spPr>
+          <a:xfrm>
+            <a:off x="1508760" y="3419856"/>
+            <a:ext cx="9875520" cy="731520"/>
+          </a:xfrm>
+          <a:prstGeom prst="rect">
+            <a:avLst/>
+          </a:prstGeom>
+          <a:noFill/>
+          <a:ln/>
+        </p:spPr>
+        <p:txBody>
+          <a:bodyPr wrap="square" lIns="0" tIns="0" rIns="0" bIns="0" rtlCol="0" anchor="ctr"/>
+          <a:lstStyle/>
           <a:p>
             <a:pPr indent="0" marL="0">
               <a:lnSpc>
-                <a:spcPct val="115000"/>
+                <a:spcPct val="110000"/>
               </a:lnSpc>
-              <a:spcAft>
-                <a:spcPts val="700"/>
-              </a:spcAft>
               <a:buNone/>
             </a:pPr>
             <a:r>
-              <a:rPr lang="en-US" sz="1400" dirty="0">
+              <a:rPr lang="en-US" sz="1500" dirty="0">
                 <a:solidFill>
-                  <a:srgbClr val="3C4A50"/>
+                  <a:srgbClr val="16262E"/>
                 </a:solidFill>
                 <a:latin typeface="Calibri" pitchFamily="34" charset="0"/>
                 <a:ea typeface="Calibri" pitchFamily="34" charset="-122"/>
                 <a:cs typeface="Calibri" pitchFamily="34" charset="-120"/>
               </a:rPr>
-              <a:t>•  체형 다양성 — 참가자 2명, 단일 날짜</a:t>
-            </a:r>
-            <a:endParaRPr lang="en-US" sz="1400" dirty="0"/>
+              <a:t>특징 확정(depth 이상치 필터링 포함)과 임계값 확정 — RULA 참고 + RF 기준모델 학습</a:t>
+            </a:r>
+            <a:endParaRPr lang="en-US" sz="1500" dirty="0"/>
           </a:p>
         </p:txBody>
       </p:sp>
       <p:sp>
         <p:nvSpPr>
-          <p:cNvPr id="9" name="Shape 6"/>
+          <p:cNvPr id="16" name="Shape 14"/>
           <p:cNvSpPr/>
           <p:nvPr/>
         </p:nvSpPr>
         <p:spPr>
           <a:xfrm>
-            <a:off x="6199632" y="1691640"/>
-            <a:ext cx="5349240" cy="4434840"/>
+            <a:off x="640080" y="4261104"/>
+            <a:ext cx="10908792" cy="731520"/>
           </a:xfrm>
           <a:prstGeom prst="roundRect">
             <a:avLst>
-              <a:gd name="adj" fmla="val 2474"/>
+              <a:gd name="adj" fmla="val 15000"/>
             </a:avLst>
           </a:prstGeom>
           <a:solidFill>
@@ -7323,58 +7375,36 @@
       </p:sp>
       <p:sp>
         <p:nvSpPr>
-          <p:cNvPr id="10" name="Shape 7"/>
+          <p:cNvPr id="17" name="Shape 15"/>
           <p:cNvSpPr/>
           <p:nvPr/>
         </p:nvSpPr>
         <p:spPr>
           <a:xfrm>
-            <a:off x="6455664" y="1920240"/>
-            <a:ext cx="548640" cy="548640"/>
-          </a:xfrm>
-          <a:prstGeom prst="ellipse">
-            <a:avLst/>
+            <a:off x="822960" y="4443984"/>
+            <a:ext cx="502920" cy="365760"/>
+          </a:xfrm>
+          <a:prstGeom prst="roundRect">
+            <a:avLst>
+              <a:gd name="adj" fmla="val 20000"/>
+            </a:avLst>
           </a:prstGeom>
           <a:solidFill>
-            <a:srgbClr val="12655A"/>
+            <a:srgbClr val="E9FBF7"/>
           </a:solidFill>
           <a:ln/>
         </p:spPr>
       </p:sp>
-      <p:pic>
-        <p:nvPicPr>
-          <p:cNvPr id="11" name="Image 1" descr="preencoded.png">    </p:cNvPr>
-          <p:cNvPicPr>
-            <a:picLocks noChangeAspect="1"/>
-          </p:cNvPicPr>
-          <p:nvPr/>
-        </p:nvPicPr>
-        <p:blipFill>
-          <a:blip r:embed="rId3"/>
-          <a:stretch>
-            <a:fillRect/>
-          </a:stretch>
-        </p:blipFill>
-        <p:spPr>
-          <a:xfrm>
-            <a:off x="6598310" y="2062886"/>
-            <a:ext cx="263347" cy="263347"/>
-          </a:xfrm>
-          <a:prstGeom prst="rect">
-            <a:avLst/>
-          </a:prstGeom>
-        </p:spPr>
-      </p:pic>
-      <p:sp>
-        <p:nvSpPr>
-          <p:cNvPr id="12" name="Text 8"/>
+      <p:sp>
+        <p:nvSpPr>
+          <p:cNvPr id="18" name="Text 16"/>
           <p:cNvSpPr txBox="1"/>
           <p:nvPr/>
         </p:nvSpPr>
         <p:spPr>
           <a:xfrm>
-            <a:off x="7159752" y="1920240"/>
-            <a:ext cx="4160520" cy="548640"/>
+            <a:off x="822960" y="4443984"/>
+            <a:ext cx="502920" cy="365760"/>
           </a:xfrm>
           <a:prstGeom prst="rect">
             <a:avLst/>
@@ -7386,187 +7416,108 @@
           <a:bodyPr wrap="square" lIns="0" tIns="0" rIns="0" bIns="0" rtlCol="0" anchor="ctr"/>
           <a:lstStyle/>
           <a:p>
-            <a:pPr indent="0" marL="0">
+            <a:pPr algn="ctr" indent="0" marL="0">
               <a:buNone/>
             </a:pPr>
             <a:r>
-              <a:rPr lang="en-US" sz="1450" b="1" dirty="0">
+              <a:rPr lang="en-US" sz="1100" b="1" dirty="0">
                 <a:solidFill>
-                  <a:srgbClr val="16262E"/>
-                </a:solidFill>
-                <a:latin typeface="Arial" pitchFamily="34" charset="0"/>
-                <a:ea typeface="Arial" pitchFamily="34" charset="-122"/>
-                <a:cs typeface="Arial" pitchFamily="34" charset="-120"/>
-              </a:rPr>
-              <a:t>카메라 확보 상태에서 남은 실측 (체크리스트)</a:t>
-            </a:r>
-            <a:endParaRPr lang="en-US" sz="1450" dirty="0"/>
-          </a:p>
-        </p:txBody>
-      </p:sp>
-      <p:sp>
-        <p:nvSpPr>
-          <p:cNvPr id="13" name="Text 9"/>
-          <p:cNvSpPr txBox="1"/>
-          <p:nvPr/>
-        </p:nvSpPr>
-        <p:spPr>
-          <a:xfrm>
-            <a:off x="6473952" y="2651760"/>
-            <a:ext cx="4846320" cy="3383280"/>
-          </a:xfrm>
-          <a:prstGeom prst="rect">
-            <a:avLst/>
-          </a:prstGeom>
-          <a:noFill/>
-          <a:ln/>
-        </p:spPr>
-        <p:txBody>
-          <a:bodyPr wrap="square" lIns="0" tIns="0" rIns="0" bIns="0" rtlCol="0" anchor="t"/>
-          <a:lstStyle/>
-          <a:p>
-            <a:pPr indent="0" marL="0">
-              <a:lnSpc>
-                <a:spcPct val="115000"/>
-              </a:lnSpc>
-              <a:spcAft>
-                <a:spcPts val="700"/>
-              </a:spcAft>
-              <a:buNone/>
-            </a:pPr>
-            <a:r>
-              <a:rPr lang="en-US" sz="1400" dirty="0">
-                <a:solidFill>
-                  <a:srgbClr val="3C4A50"/>
+                  <a:srgbClr val="12655A"/>
                 </a:solidFill>
                 <a:latin typeface="Calibri" pitchFamily="34" charset="0"/>
                 <a:ea typeface="Calibri" pitchFamily="34" charset="-122"/>
                 <a:cs typeface="Calibri" pitchFamily="34" charset="-120"/>
               </a:rPr>
-              <a:t>•  알림 쿨다운 시간 확인(60초/300초), 40cm 미만 근접, ROI 추적, 다인 환경</a:t>
-            </a:r>
-            <a:endParaRPr lang="en-US" sz="1400" dirty="0"/>
-          </a:p>
+              <a:t>4</a:t>
+            </a:r>
+            <a:endParaRPr lang="en-US" sz="1100" dirty="0"/>
+          </a:p>
+        </p:txBody>
+      </p:sp>
+      <p:sp>
+        <p:nvSpPr>
+          <p:cNvPr id="19" name="Text 17"/>
+          <p:cNvSpPr txBox="1"/>
+          <p:nvPr/>
+        </p:nvSpPr>
+        <p:spPr>
+          <a:xfrm>
+            <a:off x="1508760" y="4261104"/>
+            <a:ext cx="9875520" cy="731520"/>
+          </a:xfrm>
+          <a:prstGeom prst="rect">
+            <a:avLst/>
+          </a:prstGeom>
+          <a:noFill/>
+          <a:ln/>
+        </p:spPr>
+        <p:txBody>
+          <a:bodyPr wrap="square" lIns="0" tIns="0" rIns="0" bIns="0" rtlCol="0" anchor="ctr"/>
+          <a:lstStyle/>
           <a:p>
             <a:pPr indent="0" marL="0">
               <a:lnSpc>
-                <a:spcPct val="115000"/>
+                <a:spcPct val="110000"/>
               </a:lnSpc>
-              <a:spcAft>
-                <a:spcPts val="700"/>
-              </a:spcAft>
               <a:buNone/>
             </a:pPr>
             <a:r>
-              <a:rPr lang="en-US" sz="1400" dirty="0">
+              <a:rPr lang="en-US" sz="1500" dirty="0">
                 <a:solidFill>
-                  <a:srgbClr val="3C4A50"/>
+                  <a:srgbClr val="16262E"/>
                 </a:solidFill>
                 <a:latin typeface="Calibri" pitchFamily="34" charset="0"/>
                 <a:ea typeface="Calibri" pitchFamily="34" charset="-122"/>
                 <a:cs typeface="Calibri" pitchFamily="34" charset="-120"/>
               </a:rPr>
-              <a:t>•  참가자·거리·카메라 각도를 바꿔 --judge 로그 재측정, 기준값 재보정</a:t>
-            </a:r>
-            <a:endParaRPr lang="en-US" sz="1400" dirty="0"/>
-          </a:p>
-          <a:p>
-            <a:pPr indent="0" marL="0">
-              <a:lnSpc>
-                <a:spcPct val="115000"/>
-              </a:lnSpc>
-              <a:spcAft>
-                <a:spcPts val="700"/>
-              </a:spcAft>
+              <a:t>SQLite 저장 계층 구현</a:t>
+            </a:r>
+            <a:endParaRPr lang="en-US" sz="1500" dirty="0"/>
+          </a:p>
+        </p:txBody>
+      </p:sp>
+      <p:sp>
+        <p:nvSpPr>
+          <p:cNvPr id="20" name="Text 18"/>
+          <p:cNvSpPr txBox="1"/>
+          <p:nvPr/>
+        </p:nvSpPr>
+        <p:spPr>
+          <a:xfrm>
+            <a:off x="640080" y="6172200"/>
+            <a:ext cx="10908792" cy="365760"/>
+          </a:xfrm>
+          <a:prstGeom prst="rect">
+            <a:avLst/>
+          </a:prstGeom>
+          <a:noFill/>
+          <a:ln/>
+        </p:spPr>
+        <p:txBody>
+          <a:bodyPr wrap="square" lIns="0" tIns="0" rIns="0" bIns="0" rtlCol="0" anchor="ctr"/>
+          <a:lstStyle/>
+          <a:p>
+            <a:pPr algn="ctr" indent="0" marL="0">
               <a:buNone/>
             </a:pPr>
             <a:r>
-              <a:rPr lang="en-US" sz="1400" dirty="0">
+              <a:rPr lang="en-US" sz="1300" i="1" dirty="0">
                 <a:solidFill>
-                  <a:srgbClr val="3C4A50"/>
+                  <a:srgbClr val="9FB6BC"/>
                 </a:solidFill>
                 <a:latin typeface="Calibri" pitchFamily="34" charset="0"/>
                 <a:ea typeface="Calibri" pitchFamily="34" charset="-122"/>
                 <a:cs typeface="Calibri" pitchFamily="34" charset="-120"/>
               </a:rPr>
-              <a:t>•  IMU 스트림·내부 파라미터 읽기, 새 특징을 캡처 로그에 기록</a:t>
-            </a:r>
-            <a:endParaRPr lang="en-US" sz="1400" dirty="0"/>
-          </a:p>
-          <a:p>
-            <a:pPr indent="0" marL="0">
-              <a:lnSpc>
-                <a:spcPct val="115000"/>
-              </a:lnSpc>
-              <a:spcAft>
-                <a:spcPts val="700"/>
-              </a:spcAft>
-              <a:buNone/>
-            </a:pPr>
-            <a:r>
-              <a:rPr lang="en-US" sz="1400" dirty="0">
-                <a:solidFill>
-                  <a:srgbClr val="3C4A50"/>
-                </a:solidFill>
-                <a:latin typeface="Calibri" pitchFamily="34" charset="0"/>
-                <a:ea typeface="Calibri" pitchFamily="34" charset="-122"/>
-                <a:cs typeface="Calibri" pitchFamily="34" charset="-120"/>
-              </a:rPr>
-              <a:t>•  거리·카메라 기울기 불변성 실험</a:t>
-            </a:r>
-            <a:endParaRPr lang="en-US" sz="1400" dirty="0"/>
-          </a:p>
-          <a:p>
-            <a:pPr indent="0" marL="0">
-              <a:lnSpc>
-                <a:spcPct val="115000"/>
-              </a:lnSpc>
-              <a:spcAft>
-                <a:spcPts val="700"/>
-              </a:spcAft>
-              <a:buNone/>
-            </a:pPr>
-            <a:r>
-              <a:rPr lang="en-US" sz="1400" dirty="0">
-                <a:solidFill>
-                  <a:srgbClr val="3C4A50"/>
-                </a:solidFill>
-                <a:latin typeface="Calibri" pitchFamily="34" charset="0"/>
-                <a:ea typeface="Calibri" pitchFamily="34" charset="-122"/>
-                <a:cs typeface="Calibri" pitchFamily="34" charset="-120"/>
-              </a:rPr>
-              <a:t>•  새 참가자·다른 조명/복장으로 추가 수집</a:t>
-            </a:r>
-            <a:endParaRPr lang="en-US" sz="1400" dirty="0"/>
-          </a:p>
-          <a:p>
-            <a:pPr indent="0" marL="0">
-              <a:lnSpc>
-                <a:spcPct val="115000"/>
-              </a:lnSpc>
-              <a:spcAft>
-                <a:spcPts val="700"/>
-              </a:spcAft>
-              <a:buNone/>
-            </a:pPr>
-            <a:r>
-              <a:rPr lang="en-US" sz="1400" dirty="0">
-                <a:solidFill>
-                  <a:srgbClr val="3C4A50"/>
-                </a:solidFill>
-                <a:latin typeface="Calibri" pitchFamily="34" charset="0"/>
-                <a:ea typeface="Calibri" pitchFamily="34" charset="-122"/>
-                <a:cs typeface="Calibri" pitchFamily="34" charset="-120"/>
-              </a:rPr>
-              <a:t>•  반납 전 로그 커밋 — depth는 사후 복구 불가</a:t>
-            </a:r>
-            <a:endParaRPr lang="en-US" sz="1400" dirty="0"/>
+              <a:t>이상으로 5주차 발표를 마치겠습니다. 질문 받겠습니다.</a:t>
+            </a:r>
+            <a:endParaRPr lang="en-US" sz="1300" dirty="0"/>
           </a:p>
         </p:txBody>
       </p:sp>
       <p:sp>
         <p:nvSpPr>
-          <p:cNvPr id="14" name="Text 10"/>
+          <p:cNvPr id="21" name="Text 19"/>
           <p:cNvSpPr txBox="1"/>
           <p:nvPr/>
         </p:nvSpPr>
@@ -7598,701 +7549,6 @@
                 <a:cs typeface="Calibri" pitchFamily="34" charset="-120"/>
               </a:rPr>
               <a:t>13</a:t>
-            </a:r>
-            <a:endParaRPr lang="en-US" sz="1100" dirty="0"/>
-          </a:p>
-        </p:txBody>
-      </p:sp>
-    </p:spTree>
-  </p:cSld>
-  <p:clrMapOvr>
-    <a:masterClrMapping/>
-  </p:clrMapOvr>
-</p:sld>
-</file>
-
-<file path=ppt/slides/slide14.xml><?xml version="1.0" encoding="utf-8"?>
-<p:sld xmlns:a="http://schemas.openxmlformats.org/drawingml/2006/main" xmlns:r="http://schemas.openxmlformats.org/officeDocument/2006/relationships" xmlns:p="http://schemas.openxmlformats.org/presentationml/2006/main">
-  <p:cSld name="Slide 14">
-    <p:bg>
-      <p:bgPr>
-        <a:blipFill dpi="0" rotWithShape="1">
-          <a:blip r:embed="rId1">
-            <a:lum/>
-          </a:blip>
-          <a:srcRect/>
-          <a:stretch>
-            <a:fillRect/>
-          </a:stretch>
-        </a:blipFill>
-        <a:effectLst/>
-      </p:bgPr>
-    </p:bg>
-    <p:spTree>
-      <p:nvGrpSpPr>
-        <p:cNvPr id="1" name=""/>
-        <p:cNvGrpSpPr/>
-        <p:nvPr/>
-      </p:nvGrpSpPr>
-      <p:grpSpPr>
-        <a:xfrm>
-          <a:off x="0" y="0"/>
-          <a:ext cx="0" cy="0"/>
-          <a:chOff x="0" y="0"/>
-          <a:chExt cx="0" cy="0"/>
-        </a:xfrm>
-      </p:grpSpPr>
-      <p:sp>
-        <p:nvSpPr>
-          <p:cNvPr id="2" name="Text 0"/>
-          <p:cNvSpPr txBox="1"/>
-          <p:nvPr/>
-        </p:nvSpPr>
-        <p:spPr>
-          <a:xfrm>
-            <a:off x="640080" y="384048"/>
-            <a:ext cx="8229600" cy="320040"/>
-          </a:xfrm>
-          <a:prstGeom prst="rect">
-            <a:avLst/>
-          </a:prstGeom>
-          <a:noFill/>
-          <a:ln/>
-        </p:spPr>
-        <p:txBody>
-          <a:bodyPr wrap="square" lIns="0" tIns="0" rIns="0" bIns="0" rtlCol="0" anchor="ctr"/>
-          <a:lstStyle/>
-          <a:p>
-            <a:pPr indent="0" marL="0">
-              <a:buNone/>
-            </a:pPr>
-            <a:r>
-              <a:rPr lang="en-US" sz="1200" b="1" spc="200" kern="0" dirty="0">
-                <a:solidFill>
-                  <a:srgbClr val="2FE0C4"/>
-                </a:solidFill>
-                <a:latin typeface="Calibri" pitchFamily="34" charset="0"/>
-                <a:ea typeface="Calibri" pitchFamily="34" charset="-122"/>
-                <a:cs typeface="Calibri" pitchFamily="34" charset="-120"/>
-              </a:rPr>
-              <a:t>NEXT WEEK</a:t>
-            </a:r>
-            <a:endParaRPr lang="en-US" sz="1200" dirty="0"/>
-          </a:p>
-        </p:txBody>
-      </p:sp>
-      <p:sp>
-        <p:nvSpPr>
-          <p:cNvPr id="3" name="Text 1"/>
-          <p:cNvSpPr txBox="1"/>
-          <p:nvPr/>
-        </p:nvSpPr>
-        <p:spPr>
-          <a:xfrm>
-            <a:off x="640080" y="685800"/>
-            <a:ext cx="10881360" cy="822960"/>
-          </a:xfrm>
-          <a:prstGeom prst="rect">
-            <a:avLst/>
-          </a:prstGeom>
-          <a:noFill/>
-          <a:ln/>
-        </p:spPr>
-        <p:txBody>
-          <a:bodyPr wrap="square" lIns="0" tIns="0" rIns="0" bIns="0" rtlCol="0" anchor="ctr"/>
-          <a:lstStyle/>
-          <a:p>
-            <a:pPr indent="0" marL="0">
-              <a:buNone/>
-            </a:pPr>
-            <a:r>
-              <a:rPr lang="en-US" sz="2700" b="1" dirty="0">
-                <a:solidFill>
-                  <a:srgbClr val="EAF3F1"/>
-                </a:solidFill>
-                <a:latin typeface="Arial" pitchFamily="34" charset="0"/>
-                <a:ea typeface="Arial" pitchFamily="34" charset="-122"/>
-                <a:cs typeface="Arial" pitchFamily="34" charset="-120"/>
-              </a:rPr>
-              <a:t>6주차 계획</a:t>
-            </a:r>
-            <a:endParaRPr lang="en-US" sz="2700" dirty="0"/>
-          </a:p>
-        </p:txBody>
-      </p:sp>
-      <p:sp>
-        <p:nvSpPr>
-          <p:cNvPr id="4" name="Shape 2"/>
-          <p:cNvSpPr/>
-          <p:nvPr/>
-        </p:nvSpPr>
-        <p:spPr>
-          <a:xfrm>
-            <a:off x="640080" y="1737360"/>
-            <a:ext cx="10908792" cy="731520"/>
-          </a:xfrm>
-          <a:prstGeom prst="roundRect">
-            <a:avLst>
-              <a:gd name="adj" fmla="val 15000"/>
-            </a:avLst>
-          </a:prstGeom>
-          <a:solidFill>
-            <a:srgbClr val="FFFFFF"/>
-          </a:solidFill>
-          <a:ln/>
-        </p:spPr>
-      </p:sp>
-      <p:sp>
-        <p:nvSpPr>
-          <p:cNvPr id="5" name="Shape 3"/>
-          <p:cNvSpPr/>
-          <p:nvPr/>
-        </p:nvSpPr>
-        <p:spPr>
-          <a:xfrm>
-            <a:off x="822960" y="1920240"/>
-            <a:ext cx="502920" cy="365760"/>
-          </a:xfrm>
-          <a:prstGeom prst="roundRect">
-            <a:avLst>
-              <a:gd name="adj" fmla="val 20000"/>
-            </a:avLst>
-          </a:prstGeom>
-          <a:solidFill>
-            <a:srgbClr val="E9FBF7"/>
-          </a:solidFill>
-          <a:ln/>
-        </p:spPr>
-      </p:sp>
-      <p:sp>
-        <p:nvSpPr>
-          <p:cNvPr id="6" name="Text 4"/>
-          <p:cNvSpPr txBox="1"/>
-          <p:nvPr/>
-        </p:nvSpPr>
-        <p:spPr>
-          <a:xfrm>
-            <a:off x="822960" y="1920240"/>
-            <a:ext cx="502920" cy="365760"/>
-          </a:xfrm>
-          <a:prstGeom prst="rect">
-            <a:avLst/>
-          </a:prstGeom>
-          <a:noFill/>
-          <a:ln/>
-        </p:spPr>
-        <p:txBody>
-          <a:bodyPr wrap="square" lIns="0" tIns="0" rIns="0" bIns="0" rtlCol="0" anchor="ctr"/>
-          <a:lstStyle/>
-          <a:p>
-            <a:pPr algn="ctr" indent="0" marL="0">
-              <a:buNone/>
-            </a:pPr>
-            <a:r>
-              <a:rPr lang="en-US" sz="1100" b="1" dirty="0">
-                <a:solidFill>
-                  <a:srgbClr val="12655A"/>
-                </a:solidFill>
-                <a:latin typeface="Calibri" pitchFamily="34" charset="0"/>
-                <a:ea typeface="Calibri" pitchFamily="34" charset="-122"/>
-                <a:cs typeface="Calibri" pitchFamily="34" charset="-120"/>
-              </a:rPr>
-              <a:t>1</a:t>
-            </a:r>
-            <a:endParaRPr lang="en-US" sz="1100" dirty="0"/>
-          </a:p>
-        </p:txBody>
-      </p:sp>
-      <p:sp>
-        <p:nvSpPr>
-          <p:cNvPr id="7" name="Text 5"/>
-          <p:cNvSpPr txBox="1"/>
-          <p:nvPr/>
-        </p:nvSpPr>
-        <p:spPr>
-          <a:xfrm>
-            <a:off x="1508760" y="1737360"/>
-            <a:ext cx="9875520" cy="731520"/>
-          </a:xfrm>
-          <a:prstGeom prst="rect">
-            <a:avLst/>
-          </a:prstGeom>
-          <a:noFill/>
-          <a:ln/>
-        </p:spPr>
-        <p:txBody>
-          <a:bodyPr wrap="square" lIns="0" tIns="0" rIns="0" bIns="0" rtlCol="0" anchor="ctr"/>
-          <a:lstStyle/>
-          <a:p>
-            <a:pPr indent="0" marL="0">
-              <a:lnSpc>
-                <a:spcPct val="110000"/>
-              </a:lnSpc>
-              <a:buNone/>
-            </a:pPr>
-            <a:r>
-              <a:rPr lang="en-US" sz="1500" dirty="0">
-                <a:solidFill>
-                  <a:srgbClr val="16262E"/>
-                </a:solidFill>
-                <a:latin typeface="Calibri" pitchFamily="34" charset="0"/>
-                <a:ea typeface="Calibri" pitchFamily="34" charset="-122"/>
-                <a:cs typeface="Calibri" pitchFamily="34" charset="-120"/>
-              </a:rPr>
-              <a:t>판정 기준 다인·다거리 재보정, 절대 특징 실험(IMU·불변성), 알림 쿨다운 확인</a:t>
-            </a:r>
-            <a:endParaRPr lang="en-US" sz="1500" dirty="0"/>
-          </a:p>
-        </p:txBody>
-      </p:sp>
-      <p:sp>
-        <p:nvSpPr>
-          <p:cNvPr id="8" name="Shape 6"/>
-          <p:cNvSpPr/>
-          <p:nvPr/>
-        </p:nvSpPr>
-        <p:spPr>
-          <a:xfrm>
-            <a:off x="640080" y="2578608"/>
-            <a:ext cx="10908792" cy="731520"/>
-          </a:xfrm>
-          <a:prstGeom prst="roundRect">
-            <a:avLst>
-              <a:gd name="adj" fmla="val 15000"/>
-            </a:avLst>
-          </a:prstGeom>
-          <a:solidFill>
-            <a:srgbClr val="FFFFFF"/>
-          </a:solidFill>
-          <a:ln/>
-        </p:spPr>
-      </p:sp>
-      <p:sp>
-        <p:nvSpPr>
-          <p:cNvPr id="9" name="Shape 7"/>
-          <p:cNvSpPr/>
-          <p:nvPr/>
-        </p:nvSpPr>
-        <p:spPr>
-          <a:xfrm>
-            <a:off x="822960" y="2761488"/>
-            <a:ext cx="502920" cy="365760"/>
-          </a:xfrm>
-          <a:prstGeom prst="roundRect">
-            <a:avLst>
-              <a:gd name="adj" fmla="val 20000"/>
-            </a:avLst>
-          </a:prstGeom>
-          <a:solidFill>
-            <a:srgbClr val="E9FBF7"/>
-          </a:solidFill>
-          <a:ln/>
-        </p:spPr>
-      </p:sp>
-      <p:sp>
-        <p:nvSpPr>
-          <p:cNvPr id="10" name="Text 8"/>
-          <p:cNvSpPr txBox="1"/>
-          <p:nvPr/>
-        </p:nvSpPr>
-        <p:spPr>
-          <a:xfrm>
-            <a:off x="822960" y="2761488"/>
-            <a:ext cx="502920" cy="365760"/>
-          </a:xfrm>
-          <a:prstGeom prst="rect">
-            <a:avLst/>
-          </a:prstGeom>
-          <a:noFill/>
-          <a:ln/>
-        </p:spPr>
-        <p:txBody>
-          <a:bodyPr wrap="square" lIns="0" tIns="0" rIns="0" bIns="0" rtlCol="0" anchor="ctr"/>
-          <a:lstStyle/>
-          <a:p>
-            <a:pPr algn="ctr" indent="0" marL="0">
-              <a:buNone/>
-            </a:pPr>
-            <a:r>
-              <a:rPr lang="en-US" sz="1100" b="1" dirty="0">
-                <a:solidFill>
-                  <a:srgbClr val="12655A"/>
-                </a:solidFill>
-                <a:latin typeface="Calibri" pitchFamily="34" charset="0"/>
-                <a:ea typeface="Calibri" pitchFamily="34" charset="-122"/>
-                <a:cs typeface="Calibri" pitchFamily="34" charset="-120"/>
-              </a:rPr>
-              <a:t>2</a:t>
-            </a:r>
-            <a:endParaRPr lang="en-US" sz="1100" dirty="0"/>
-          </a:p>
-        </p:txBody>
-      </p:sp>
-      <p:sp>
-        <p:nvSpPr>
-          <p:cNvPr id="11" name="Text 9"/>
-          <p:cNvSpPr txBox="1"/>
-          <p:nvPr/>
-        </p:nvSpPr>
-        <p:spPr>
-          <a:xfrm>
-            <a:off x="1508760" y="2578608"/>
-            <a:ext cx="9875520" cy="731520"/>
-          </a:xfrm>
-          <a:prstGeom prst="rect">
-            <a:avLst/>
-          </a:prstGeom>
-          <a:noFill/>
-          <a:ln/>
-        </p:spPr>
-        <p:txBody>
-          <a:bodyPr wrap="square" lIns="0" tIns="0" rIns="0" bIns="0" rtlCol="0" anchor="ctr"/>
-          <a:lstStyle/>
-          <a:p>
-            <a:pPr indent="0" marL="0">
-              <a:lnSpc>
-                <a:spcPct val="110000"/>
-              </a:lnSpc>
-              <a:buNone/>
-            </a:pPr>
-            <a:r>
-              <a:rPr lang="en-US" sz="1500" dirty="0">
-                <a:solidFill>
-                  <a:srgbClr val="16262E"/>
-                </a:solidFill>
-                <a:latin typeface="Calibri" pitchFamily="34" charset="0"/>
-                <a:ea typeface="Calibri" pitchFamily="34" charset="-122"/>
-                <a:cs typeface="Calibri" pitchFamily="34" charset="-120"/>
-              </a:rPr>
-              <a:t>데이터 라벨링 마무리, 교차검증 결과 반영, 추가 참가자 수집</a:t>
-            </a:r>
-            <a:endParaRPr lang="en-US" sz="1500" dirty="0"/>
-          </a:p>
-        </p:txBody>
-      </p:sp>
-      <p:sp>
-        <p:nvSpPr>
-          <p:cNvPr id="12" name="Shape 10"/>
-          <p:cNvSpPr/>
-          <p:nvPr/>
-        </p:nvSpPr>
-        <p:spPr>
-          <a:xfrm>
-            <a:off x="640080" y="3419856"/>
-            <a:ext cx="10908792" cy="731520"/>
-          </a:xfrm>
-          <a:prstGeom prst="roundRect">
-            <a:avLst>
-              <a:gd name="adj" fmla="val 15000"/>
-            </a:avLst>
-          </a:prstGeom>
-          <a:solidFill>
-            <a:srgbClr val="FFFFFF"/>
-          </a:solidFill>
-          <a:ln/>
-        </p:spPr>
-      </p:sp>
-      <p:sp>
-        <p:nvSpPr>
-          <p:cNvPr id="13" name="Shape 11"/>
-          <p:cNvSpPr/>
-          <p:nvPr/>
-        </p:nvSpPr>
-        <p:spPr>
-          <a:xfrm>
-            <a:off x="822960" y="3602736"/>
-            <a:ext cx="502920" cy="365760"/>
-          </a:xfrm>
-          <a:prstGeom prst="roundRect">
-            <a:avLst>
-              <a:gd name="adj" fmla="val 20000"/>
-            </a:avLst>
-          </a:prstGeom>
-          <a:solidFill>
-            <a:srgbClr val="E9FBF7"/>
-          </a:solidFill>
-          <a:ln/>
-        </p:spPr>
-      </p:sp>
-      <p:sp>
-        <p:nvSpPr>
-          <p:cNvPr id="14" name="Text 12"/>
-          <p:cNvSpPr txBox="1"/>
-          <p:nvPr/>
-        </p:nvSpPr>
-        <p:spPr>
-          <a:xfrm>
-            <a:off x="822960" y="3602736"/>
-            <a:ext cx="502920" cy="365760"/>
-          </a:xfrm>
-          <a:prstGeom prst="rect">
-            <a:avLst/>
-          </a:prstGeom>
-          <a:noFill/>
-          <a:ln/>
-        </p:spPr>
-        <p:txBody>
-          <a:bodyPr wrap="square" lIns="0" tIns="0" rIns="0" bIns="0" rtlCol="0" anchor="ctr"/>
-          <a:lstStyle/>
-          <a:p>
-            <a:pPr algn="ctr" indent="0" marL="0">
-              <a:buNone/>
-            </a:pPr>
-            <a:r>
-              <a:rPr lang="en-US" sz="1100" b="1" dirty="0">
-                <a:solidFill>
-                  <a:srgbClr val="12655A"/>
-                </a:solidFill>
-                <a:latin typeface="Calibri" pitchFamily="34" charset="0"/>
-                <a:ea typeface="Calibri" pitchFamily="34" charset="-122"/>
-                <a:cs typeface="Calibri" pitchFamily="34" charset="-120"/>
-              </a:rPr>
-              <a:t>3</a:t>
-            </a:r>
-            <a:endParaRPr lang="en-US" sz="1100" dirty="0"/>
-          </a:p>
-        </p:txBody>
-      </p:sp>
-      <p:sp>
-        <p:nvSpPr>
-          <p:cNvPr id="15" name="Text 13"/>
-          <p:cNvSpPr txBox="1"/>
-          <p:nvPr/>
-        </p:nvSpPr>
-        <p:spPr>
-          <a:xfrm>
-            <a:off x="1508760" y="3419856"/>
-            <a:ext cx="9875520" cy="731520"/>
-          </a:xfrm>
-          <a:prstGeom prst="rect">
-            <a:avLst/>
-          </a:prstGeom>
-          <a:noFill/>
-          <a:ln/>
-        </p:spPr>
-        <p:txBody>
-          <a:bodyPr wrap="square" lIns="0" tIns="0" rIns="0" bIns="0" rtlCol="0" anchor="ctr"/>
-          <a:lstStyle/>
-          <a:p>
-            <a:pPr indent="0" marL="0">
-              <a:lnSpc>
-                <a:spcPct val="110000"/>
-              </a:lnSpc>
-              <a:buNone/>
-            </a:pPr>
-            <a:r>
-              <a:rPr lang="en-US" sz="1500" dirty="0">
-                <a:solidFill>
-                  <a:srgbClr val="16262E"/>
-                </a:solidFill>
-                <a:latin typeface="Calibri" pitchFamily="34" charset="0"/>
-                <a:ea typeface="Calibri" pitchFamily="34" charset="-122"/>
-                <a:cs typeface="Calibri" pitchFamily="34" charset="-120"/>
-              </a:rPr>
-              <a:t>특징 확정(depth 이상치 필터링 포함)과 임계값 확정 — RULA 참고 + RF 기준모델 학습</a:t>
-            </a:r>
-            <a:endParaRPr lang="en-US" sz="1500" dirty="0"/>
-          </a:p>
-        </p:txBody>
-      </p:sp>
-      <p:sp>
-        <p:nvSpPr>
-          <p:cNvPr id="16" name="Shape 14"/>
-          <p:cNvSpPr/>
-          <p:nvPr/>
-        </p:nvSpPr>
-        <p:spPr>
-          <a:xfrm>
-            <a:off x="640080" y="4261104"/>
-            <a:ext cx="10908792" cy="731520"/>
-          </a:xfrm>
-          <a:prstGeom prst="roundRect">
-            <a:avLst>
-              <a:gd name="adj" fmla="val 15000"/>
-            </a:avLst>
-          </a:prstGeom>
-          <a:solidFill>
-            <a:srgbClr val="FFFFFF"/>
-          </a:solidFill>
-          <a:ln/>
-        </p:spPr>
-      </p:sp>
-      <p:sp>
-        <p:nvSpPr>
-          <p:cNvPr id="17" name="Shape 15"/>
-          <p:cNvSpPr/>
-          <p:nvPr/>
-        </p:nvSpPr>
-        <p:spPr>
-          <a:xfrm>
-            <a:off x="822960" y="4443984"/>
-            <a:ext cx="502920" cy="365760"/>
-          </a:xfrm>
-          <a:prstGeom prst="roundRect">
-            <a:avLst>
-              <a:gd name="adj" fmla="val 20000"/>
-            </a:avLst>
-          </a:prstGeom>
-          <a:solidFill>
-            <a:srgbClr val="E9FBF7"/>
-          </a:solidFill>
-          <a:ln/>
-        </p:spPr>
-      </p:sp>
-      <p:sp>
-        <p:nvSpPr>
-          <p:cNvPr id="18" name="Text 16"/>
-          <p:cNvSpPr txBox="1"/>
-          <p:nvPr/>
-        </p:nvSpPr>
-        <p:spPr>
-          <a:xfrm>
-            <a:off x="822960" y="4443984"/>
-            <a:ext cx="502920" cy="365760"/>
-          </a:xfrm>
-          <a:prstGeom prst="rect">
-            <a:avLst/>
-          </a:prstGeom>
-          <a:noFill/>
-          <a:ln/>
-        </p:spPr>
-        <p:txBody>
-          <a:bodyPr wrap="square" lIns="0" tIns="0" rIns="0" bIns="0" rtlCol="0" anchor="ctr"/>
-          <a:lstStyle/>
-          <a:p>
-            <a:pPr algn="ctr" indent="0" marL="0">
-              <a:buNone/>
-            </a:pPr>
-            <a:r>
-              <a:rPr lang="en-US" sz="1100" b="1" dirty="0">
-                <a:solidFill>
-                  <a:srgbClr val="12655A"/>
-                </a:solidFill>
-                <a:latin typeface="Calibri" pitchFamily="34" charset="0"/>
-                <a:ea typeface="Calibri" pitchFamily="34" charset="-122"/>
-                <a:cs typeface="Calibri" pitchFamily="34" charset="-120"/>
-              </a:rPr>
-              <a:t>4</a:t>
-            </a:r>
-            <a:endParaRPr lang="en-US" sz="1100" dirty="0"/>
-          </a:p>
-        </p:txBody>
-      </p:sp>
-      <p:sp>
-        <p:nvSpPr>
-          <p:cNvPr id="19" name="Text 17"/>
-          <p:cNvSpPr txBox="1"/>
-          <p:nvPr/>
-        </p:nvSpPr>
-        <p:spPr>
-          <a:xfrm>
-            <a:off x="1508760" y="4261104"/>
-            <a:ext cx="9875520" cy="731520"/>
-          </a:xfrm>
-          <a:prstGeom prst="rect">
-            <a:avLst/>
-          </a:prstGeom>
-          <a:noFill/>
-          <a:ln/>
-        </p:spPr>
-        <p:txBody>
-          <a:bodyPr wrap="square" lIns="0" tIns="0" rIns="0" bIns="0" rtlCol="0" anchor="ctr"/>
-          <a:lstStyle/>
-          <a:p>
-            <a:pPr indent="0" marL="0">
-              <a:lnSpc>
-                <a:spcPct val="110000"/>
-              </a:lnSpc>
-              <a:buNone/>
-            </a:pPr>
-            <a:r>
-              <a:rPr lang="en-US" sz="1500" dirty="0">
-                <a:solidFill>
-                  <a:srgbClr val="16262E"/>
-                </a:solidFill>
-                <a:latin typeface="Calibri" pitchFamily="34" charset="0"/>
-                <a:ea typeface="Calibri" pitchFamily="34" charset="-122"/>
-                <a:cs typeface="Calibri" pitchFamily="34" charset="-120"/>
-              </a:rPr>
-              <a:t>SQLite 저장 계층 구현</a:t>
-            </a:r>
-            <a:endParaRPr lang="en-US" sz="1500" dirty="0"/>
-          </a:p>
-        </p:txBody>
-      </p:sp>
-      <p:sp>
-        <p:nvSpPr>
-          <p:cNvPr id="20" name="Text 18"/>
-          <p:cNvSpPr txBox="1"/>
-          <p:nvPr/>
-        </p:nvSpPr>
-        <p:spPr>
-          <a:xfrm>
-            <a:off x="640080" y="6172200"/>
-            <a:ext cx="10908792" cy="365760"/>
-          </a:xfrm>
-          <a:prstGeom prst="rect">
-            <a:avLst/>
-          </a:prstGeom>
-          <a:noFill/>
-          <a:ln/>
-        </p:spPr>
-        <p:txBody>
-          <a:bodyPr wrap="square" lIns="0" tIns="0" rIns="0" bIns="0" rtlCol="0" anchor="ctr"/>
-          <a:lstStyle/>
-          <a:p>
-            <a:pPr algn="ctr" indent="0" marL="0">
-              <a:buNone/>
-            </a:pPr>
-            <a:r>
-              <a:rPr lang="en-US" sz="1300" i="1" dirty="0">
-                <a:solidFill>
-                  <a:srgbClr val="9FB6BC"/>
-                </a:solidFill>
-                <a:latin typeface="Calibri" pitchFamily="34" charset="0"/>
-                <a:ea typeface="Calibri" pitchFamily="34" charset="-122"/>
-                <a:cs typeface="Calibri" pitchFamily="34" charset="-120"/>
-              </a:rPr>
-              <a:t>이상으로 5주차 발표를 마치겠습니다. 질문 받겠습니다.</a:t>
-            </a:r>
-            <a:endParaRPr lang="en-US" sz="1300" dirty="0"/>
-          </a:p>
-        </p:txBody>
-      </p:sp>
-      <p:sp>
-        <p:nvSpPr>
-          <p:cNvPr id="21" name="Text 19"/>
-          <p:cNvSpPr txBox="1"/>
-          <p:nvPr/>
-        </p:nvSpPr>
-        <p:spPr>
-          <a:xfrm>
-            <a:off x="11365992" y="6355080"/>
-            <a:ext cx="548640" cy="320040"/>
-          </a:xfrm>
-          <a:prstGeom prst="rect">
-            <a:avLst/>
-          </a:prstGeom>
-          <a:noFill/>
-          <a:ln/>
-        </p:spPr>
-        <p:txBody>
-          <a:bodyPr wrap="square" lIns="0" tIns="0" rIns="0" bIns="0" rtlCol="0" anchor="ctr"/>
-          <a:lstStyle/>
-          <a:p>
-            <a:pPr algn="r" indent="0" marL="0">
-              <a:buNone/>
-            </a:pPr>
-            <a:r>
-              <a:rPr lang="en-US" sz="1100" dirty="0">
-                <a:solidFill>
-                  <a:srgbClr val="9FB6BC"/>
-                </a:solidFill>
-                <a:latin typeface="Calibri" pitchFamily="34" charset="0"/>
-                <a:ea typeface="Calibri" pitchFamily="34" charset="-122"/>
-                <a:cs typeface="Calibri" pitchFamily="34" charset="-120"/>
-              </a:rPr>
-              <a:t>14</a:t>
             </a:r>
             <a:endParaRPr lang="en-US" sz="1100" dirty="0"/>
           </a:p>
@@ -8775,7 +8031,7 @@
                 <a:ea typeface="Calibri" pitchFamily="34" charset="-122"/>
                 <a:cs typeface="Calibri" pitchFamily="34" charset="-120"/>
               </a:rPr>
-              <a:t>06   절대값 판정 설계 · 선행연구 근거</a:t>
+              <a:t>06   절대값 판정 설계</a:t>
             </a:r>
             <a:endParaRPr lang="en-US" sz="1350" dirty="0"/>
           </a:p>
